--- a/outputs/NTL_in_Population_Presentation.pptx
+++ b/outputs/NTL_in_Population_Presentation.pptx
@@ -5,17 +5,19 @@
     <p:sldMasterId id="2147483648" r:id="rId1"/>
   </p:sldMasterIdLst>
   <p:sldIdLst>
-    <p:sldId id="256" r:id="rId7"/>
-    <p:sldId id="257" r:id="rId8"/>
-    <p:sldId id="258" r:id="rId9"/>
-    <p:sldId id="259" r:id="rId10"/>
-    <p:sldId id="260" r:id="rId11"/>
-    <p:sldId id="261" r:id="rId12"/>
-    <p:sldId id="262" r:id="rId13"/>
-    <p:sldId id="263" r:id="rId14"/>
-    <p:sldId id="264" r:id="rId15"/>
+    <p:sldId id="256" r:id="rId2"/>
+    <p:sldId id="257" r:id="rId3"/>
+    <p:sldId id="258" r:id="rId4"/>
+    <p:sldId id="259" r:id="rId5"/>
+    <p:sldId id="265" r:id="rId6"/>
+    <p:sldId id="260" r:id="rId7"/>
+    <p:sldId id="261" r:id="rId8"/>
+    <p:sldId id="262" r:id="rId9"/>
+    <p:sldId id="263" r:id="rId10"/>
+    <p:sldId id="266" r:id="rId11"/>
+    <p:sldId id="264" r:id="rId12"/>
   </p:sldIdLst>
-  <p:sldSz cx="12191695" cy="6858000" type="screen4x3"/>
+  <p:sldSz cx="12192000" cy="6858000"/>
   <p:notesSz cx="6858000" cy="9144000"/>
   <p:defaultTextStyle>
     <a:defPPr>
@@ -112,6 +114,22 @@
       </a:defRPr>
     </a:lvl9pPr>
   </p:defaultTextStyle>
+  <p:extLst>
+    <p:ext uri="{EFAFB233-063F-42B5-8137-9DF3F51BA10A}">
+      <p15:sldGuideLst xmlns:p15="http://schemas.microsoft.com/office/powerpoint/2012/main">
+        <p15:guide id="1" orient="horz" pos="2160">
+          <p15:clr>
+            <a:srgbClr val="A4A3A4"/>
+          </p15:clr>
+        </p15:guide>
+        <p15:guide id="2" pos="2880">
+          <p15:clr>
+            <a:srgbClr val="A4A3A4"/>
+          </p15:clr>
+        </p15:guide>
+      </p15:sldGuideLst>
+    </p:ext>
+  </p:extLst>
 </p:presentation>
 </file>
 
@@ -153,10 +171,9 @@
           <a:lstStyle/>
           <a:p>
             <a:r>
-              <a:rPr lang="en-US" smtClean="0"/>
+              <a:rPr lang="en-US"/>
               <a:t>Click to edit Master title style</a:t>
             </a:r>
-            <a:endParaRPr lang="en-US"/>
           </a:p>
         </p:txBody>
       </p:sp>
@@ -272,10 +289,9 @@
           </a:lstStyle>
           <a:p>
             <a:r>
-              <a:rPr lang="en-US" smtClean="0"/>
+              <a:rPr lang="en-US"/>
               <a:t>Click to edit Master subtitle style</a:t>
             </a:r>
-            <a:endParaRPr lang="en-US"/>
           </a:p>
         </p:txBody>
       </p:sp>
@@ -296,7 +312,7 @@
           <a:p>
             <a:fld id="{5BCAD085-E8A6-8845-BD4E-CB4CCA059FC4}" type="datetimeFigureOut">
               <a:rPr lang="en-US" smtClean="0"/>
-              <a:t>1/27/13</a:t>
+              <a:t>4/21/2026</a:t>
             </a:fld>
             <a:endParaRPr lang="en-US"/>
           </a:p>
@@ -390,10 +406,9 @@
           <a:lstStyle/>
           <a:p>
             <a:r>
-              <a:rPr lang="en-US" smtClean="0"/>
+              <a:rPr lang="en-US"/>
               <a:t>Click to edit Master title style</a:t>
             </a:r>
-            <a:endParaRPr lang="en-US"/>
           </a:p>
         </p:txBody>
       </p:sp>
@@ -414,38 +429,37 @@
           <a:p>
             <a:pPr lvl="0"/>
             <a:r>
-              <a:rPr lang="en-US" smtClean="0"/>
+              <a:rPr lang="en-US"/>
               <a:t>Click to edit Master text styles</a:t>
             </a:r>
           </a:p>
           <a:p>
             <a:pPr lvl="1"/>
             <a:r>
-              <a:rPr lang="en-US" smtClean="0"/>
+              <a:rPr lang="en-US"/>
               <a:t>Second level</a:t>
             </a:r>
           </a:p>
           <a:p>
             <a:pPr lvl="2"/>
             <a:r>
-              <a:rPr lang="en-US" smtClean="0"/>
+              <a:rPr lang="en-US"/>
               <a:t>Third level</a:t>
             </a:r>
           </a:p>
           <a:p>
             <a:pPr lvl="3"/>
             <a:r>
-              <a:rPr lang="en-US" smtClean="0"/>
+              <a:rPr lang="en-US"/>
               <a:t>Fourth level</a:t>
             </a:r>
           </a:p>
           <a:p>
             <a:pPr lvl="4"/>
             <a:r>
-              <a:rPr lang="en-US" smtClean="0"/>
+              <a:rPr lang="en-US"/>
               <a:t>Fifth level</a:t>
             </a:r>
-            <a:endParaRPr lang="en-US"/>
           </a:p>
         </p:txBody>
       </p:sp>
@@ -466,7 +480,7 @@
           <a:p>
             <a:fld id="{5BCAD085-E8A6-8845-BD4E-CB4CCA059FC4}" type="datetimeFigureOut">
               <a:rPr lang="en-US" smtClean="0"/>
-              <a:t>1/27/13</a:t>
+              <a:t>4/21/2026</a:t>
             </a:fld>
             <a:endParaRPr lang="en-US"/>
           </a:p>
@@ -565,10 +579,9 @@
           <a:lstStyle/>
           <a:p>
             <a:r>
-              <a:rPr lang="en-US" smtClean="0"/>
+              <a:rPr lang="en-US"/>
               <a:t>Click to edit Master title style</a:t>
             </a:r>
-            <a:endParaRPr lang="en-US"/>
           </a:p>
         </p:txBody>
       </p:sp>
@@ -594,38 +607,37 @@
           <a:p>
             <a:pPr lvl="0"/>
             <a:r>
-              <a:rPr lang="en-US" smtClean="0"/>
+              <a:rPr lang="en-US"/>
               <a:t>Click to edit Master text styles</a:t>
             </a:r>
           </a:p>
           <a:p>
             <a:pPr lvl="1"/>
             <a:r>
-              <a:rPr lang="en-US" smtClean="0"/>
+              <a:rPr lang="en-US"/>
               <a:t>Second level</a:t>
             </a:r>
           </a:p>
           <a:p>
             <a:pPr lvl="2"/>
             <a:r>
-              <a:rPr lang="en-US" smtClean="0"/>
+              <a:rPr lang="en-US"/>
               <a:t>Third level</a:t>
             </a:r>
           </a:p>
           <a:p>
             <a:pPr lvl="3"/>
             <a:r>
-              <a:rPr lang="en-US" smtClean="0"/>
+              <a:rPr lang="en-US"/>
               <a:t>Fourth level</a:t>
             </a:r>
           </a:p>
           <a:p>
             <a:pPr lvl="4"/>
             <a:r>
-              <a:rPr lang="en-US" smtClean="0"/>
+              <a:rPr lang="en-US"/>
               <a:t>Fifth level</a:t>
             </a:r>
-            <a:endParaRPr lang="en-US"/>
           </a:p>
         </p:txBody>
       </p:sp>
@@ -646,7 +658,7 @@
           <a:p>
             <a:fld id="{5BCAD085-E8A6-8845-BD4E-CB4CCA059FC4}" type="datetimeFigureOut">
               <a:rPr lang="en-US" smtClean="0"/>
-              <a:t>1/27/13</a:t>
+              <a:t>4/21/2026</a:t>
             </a:fld>
             <a:endParaRPr lang="en-US"/>
           </a:p>
@@ -740,10 +752,9 @@
           <a:lstStyle/>
           <a:p>
             <a:r>
-              <a:rPr lang="en-US" smtClean="0"/>
+              <a:rPr lang="en-US"/>
               <a:t>Click to edit Master title style</a:t>
             </a:r>
-            <a:endParaRPr lang="en-US"/>
           </a:p>
         </p:txBody>
       </p:sp>
@@ -764,38 +775,37 @@
           <a:p>
             <a:pPr lvl="0"/>
             <a:r>
-              <a:rPr lang="en-US" smtClean="0"/>
+              <a:rPr lang="en-US"/>
               <a:t>Click to edit Master text styles</a:t>
             </a:r>
           </a:p>
           <a:p>
             <a:pPr lvl="1"/>
             <a:r>
-              <a:rPr lang="en-US" smtClean="0"/>
+              <a:rPr lang="en-US"/>
               <a:t>Second level</a:t>
             </a:r>
           </a:p>
           <a:p>
             <a:pPr lvl="2"/>
             <a:r>
-              <a:rPr lang="en-US" smtClean="0"/>
+              <a:rPr lang="en-US"/>
               <a:t>Third level</a:t>
             </a:r>
           </a:p>
           <a:p>
             <a:pPr lvl="3"/>
             <a:r>
-              <a:rPr lang="en-US" smtClean="0"/>
+              <a:rPr lang="en-US"/>
               <a:t>Fourth level</a:t>
             </a:r>
           </a:p>
           <a:p>
             <a:pPr lvl="4"/>
             <a:r>
-              <a:rPr lang="en-US" smtClean="0"/>
+              <a:rPr lang="en-US"/>
               <a:t>Fifth level</a:t>
             </a:r>
-            <a:endParaRPr lang="en-US"/>
           </a:p>
         </p:txBody>
       </p:sp>
@@ -816,7 +826,7 @@
           <a:p>
             <a:fld id="{5BCAD085-E8A6-8845-BD4E-CB4CCA059FC4}" type="datetimeFigureOut">
               <a:rPr lang="en-US" smtClean="0"/>
-              <a:t>1/27/13</a:t>
+              <a:t>4/21/2026</a:t>
             </a:fld>
             <a:endParaRPr lang="en-US"/>
           </a:p>
@@ -919,10 +929,9 @@
           </a:lstStyle>
           <a:p>
             <a:r>
-              <a:rPr lang="en-US" smtClean="0"/>
+              <a:rPr lang="en-US"/>
               <a:t>Click to edit Master title style</a:t>
             </a:r>
-            <a:endParaRPr lang="en-US"/>
           </a:p>
         </p:txBody>
       </p:sp>
@@ -1039,7 +1048,7 @@
           <a:p>
             <a:pPr lvl="0"/>
             <a:r>
-              <a:rPr lang="en-US" smtClean="0"/>
+              <a:rPr lang="en-US"/>
               <a:t>Click to edit Master text styles</a:t>
             </a:r>
           </a:p>
@@ -1062,7 +1071,7 @@
           <a:p>
             <a:fld id="{5BCAD085-E8A6-8845-BD4E-CB4CCA059FC4}" type="datetimeFigureOut">
               <a:rPr lang="en-US" smtClean="0"/>
-              <a:t>1/27/13</a:t>
+              <a:t>4/21/2026</a:t>
             </a:fld>
             <a:endParaRPr lang="en-US"/>
           </a:p>
@@ -1156,10 +1165,9 @@
           <a:lstStyle/>
           <a:p>
             <a:r>
-              <a:rPr lang="en-US" smtClean="0"/>
+              <a:rPr lang="en-US"/>
               <a:t>Click to edit Master title style</a:t>
             </a:r>
-            <a:endParaRPr lang="en-US"/>
           </a:p>
         </p:txBody>
       </p:sp>
@@ -1213,38 +1221,37 @@
           <a:p>
             <a:pPr lvl="0"/>
             <a:r>
-              <a:rPr lang="en-US" smtClean="0"/>
+              <a:rPr lang="en-US"/>
               <a:t>Click to edit Master text styles</a:t>
             </a:r>
           </a:p>
           <a:p>
             <a:pPr lvl="1"/>
             <a:r>
-              <a:rPr lang="en-US" smtClean="0"/>
+              <a:rPr lang="en-US"/>
               <a:t>Second level</a:t>
             </a:r>
           </a:p>
           <a:p>
             <a:pPr lvl="2"/>
             <a:r>
-              <a:rPr lang="en-US" smtClean="0"/>
+              <a:rPr lang="en-US"/>
               <a:t>Third level</a:t>
             </a:r>
           </a:p>
           <a:p>
             <a:pPr lvl="3"/>
             <a:r>
-              <a:rPr lang="en-US" smtClean="0"/>
+              <a:rPr lang="en-US"/>
               <a:t>Fourth level</a:t>
             </a:r>
           </a:p>
           <a:p>
             <a:pPr lvl="4"/>
             <a:r>
-              <a:rPr lang="en-US" smtClean="0"/>
+              <a:rPr lang="en-US"/>
               <a:t>Fifth level</a:t>
             </a:r>
-            <a:endParaRPr lang="en-US"/>
           </a:p>
         </p:txBody>
       </p:sp>
@@ -1298,38 +1305,37 @@
           <a:p>
             <a:pPr lvl="0"/>
             <a:r>
-              <a:rPr lang="en-US" smtClean="0"/>
+              <a:rPr lang="en-US"/>
               <a:t>Click to edit Master text styles</a:t>
             </a:r>
           </a:p>
           <a:p>
             <a:pPr lvl="1"/>
             <a:r>
-              <a:rPr lang="en-US" smtClean="0"/>
+              <a:rPr lang="en-US"/>
               <a:t>Second level</a:t>
             </a:r>
           </a:p>
           <a:p>
             <a:pPr lvl="2"/>
             <a:r>
-              <a:rPr lang="en-US" smtClean="0"/>
+              <a:rPr lang="en-US"/>
               <a:t>Third level</a:t>
             </a:r>
           </a:p>
           <a:p>
             <a:pPr lvl="3"/>
             <a:r>
-              <a:rPr lang="en-US" smtClean="0"/>
+              <a:rPr lang="en-US"/>
               <a:t>Fourth level</a:t>
             </a:r>
           </a:p>
           <a:p>
             <a:pPr lvl="4"/>
             <a:r>
-              <a:rPr lang="en-US" smtClean="0"/>
+              <a:rPr lang="en-US"/>
               <a:t>Fifth level</a:t>
             </a:r>
-            <a:endParaRPr lang="en-US"/>
           </a:p>
         </p:txBody>
       </p:sp>
@@ -1350,7 +1356,7 @@
           <a:p>
             <a:fld id="{5BCAD085-E8A6-8845-BD4E-CB4CCA059FC4}" type="datetimeFigureOut">
               <a:rPr lang="en-US" smtClean="0"/>
-              <a:t>1/27/13</a:t>
+              <a:t>4/21/2026</a:t>
             </a:fld>
             <a:endParaRPr lang="en-US"/>
           </a:p>
@@ -1448,10 +1454,9 @@
           </a:lstStyle>
           <a:p>
             <a:r>
-              <a:rPr lang="en-US" smtClean="0"/>
+              <a:rPr lang="en-US"/>
               <a:t>Click to edit Master title style</a:t>
             </a:r>
-            <a:endParaRPr lang="en-US"/>
           </a:p>
         </p:txBody>
       </p:sp>
@@ -1514,7 +1519,7 @@
           <a:p>
             <a:pPr lvl="0"/>
             <a:r>
-              <a:rPr lang="en-US" smtClean="0"/>
+              <a:rPr lang="en-US"/>
               <a:t>Click to edit Master text styles</a:t>
             </a:r>
           </a:p>
@@ -1570,38 +1575,37 @@
           <a:p>
             <a:pPr lvl="0"/>
             <a:r>
-              <a:rPr lang="en-US" smtClean="0"/>
+              <a:rPr lang="en-US"/>
               <a:t>Click to edit Master text styles</a:t>
             </a:r>
           </a:p>
           <a:p>
             <a:pPr lvl="1"/>
             <a:r>
-              <a:rPr lang="en-US" smtClean="0"/>
+              <a:rPr lang="en-US"/>
               <a:t>Second level</a:t>
             </a:r>
           </a:p>
           <a:p>
             <a:pPr lvl="2"/>
             <a:r>
-              <a:rPr lang="en-US" smtClean="0"/>
+              <a:rPr lang="en-US"/>
               <a:t>Third level</a:t>
             </a:r>
           </a:p>
           <a:p>
             <a:pPr lvl="3"/>
             <a:r>
-              <a:rPr lang="en-US" smtClean="0"/>
+              <a:rPr lang="en-US"/>
               <a:t>Fourth level</a:t>
             </a:r>
           </a:p>
           <a:p>
             <a:pPr lvl="4"/>
             <a:r>
-              <a:rPr lang="en-US" smtClean="0"/>
+              <a:rPr lang="en-US"/>
               <a:t>Fifth level</a:t>
             </a:r>
-            <a:endParaRPr lang="en-US"/>
           </a:p>
         </p:txBody>
       </p:sp>
@@ -1664,7 +1668,7 @@
           <a:p>
             <a:pPr lvl="0"/>
             <a:r>
-              <a:rPr lang="en-US" smtClean="0"/>
+              <a:rPr lang="en-US"/>
               <a:t>Click to edit Master text styles</a:t>
             </a:r>
           </a:p>
@@ -1720,38 +1724,37 @@
           <a:p>
             <a:pPr lvl="0"/>
             <a:r>
-              <a:rPr lang="en-US" smtClean="0"/>
+              <a:rPr lang="en-US"/>
               <a:t>Click to edit Master text styles</a:t>
             </a:r>
           </a:p>
           <a:p>
             <a:pPr lvl="1"/>
             <a:r>
-              <a:rPr lang="en-US" smtClean="0"/>
+              <a:rPr lang="en-US"/>
               <a:t>Second level</a:t>
             </a:r>
           </a:p>
           <a:p>
             <a:pPr lvl="2"/>
             <a:r>
-              <a:rPr lang="en-US" smtClean="0"/>
+              <a:rPr lang="en-US"/>
               <a:t>Third level</a:t>
             </a:r>
           </a:p>
           <a:p>
             <a:pPr lvl="3"/>
             <a:r>
-              <a:rPr lang="en-US" smtClean="0"/>
+              <a:rPr lang="en-US"/>
               <a:t>Fourth level</a:t>
             </a:r>
           </a:p>
           <a:p>
             <a:pPr lvl="4"/>
             <a:r>
-              <a:rPr lang="en-US" smtClean="0"/>
+              <a:rPr lang="en-US"/>
               <a:t>Fifth level</a:t>
             </a:r>
-            <a:endParaRPr lang="en-US"/>
           </a:p>
         </p:txBody>
       </p:sp>
@@ -1772,7 +1775,7 @@
           <a:p>
             <a:fld id="{5BCAD085-E8A6-8845-BD4E-CB4CCA059FC4}" type="datetimeFigureOut">
               <a:rPr lang="en-US" smtClean="0"/>
-              <a:t>1/27/13</a:t>
+              <a:t>4/21/2026</a:t>
             </a:fld>
             <a:endParaRPr lang="en-US"/>
           </a:p>
@@ -1866,10 +1869,9 @@
           <a:lstStyle/>
           <a:p>
             <a:r>
-              <a:rPr lang="en-US" smtClean="0"/>
+              <a:rPr lang="en-US"/>
               <a:t>Click to edit Master title style</a:t>
             </a:r>
-            <a:endParaRPr lang="en-US"/>
           </a:p>
         </p:txBody>
       </p:sp>
@@ -1890,7 +1892,7 @@
           <a:p>
             <a:fld id="{5BCAD085-E8A6-8845-BD4E-CB4CCA059FC4}" type="datetimeFigureOut">
               <a:rPr lang="en-US" smtClean="0"/>
-              <a:t>1/27/13</a:t>
+              <a:t>4/21/2026</a:t>
             </a:fld>
             <a:endParaRPr lang="en-US"/>
           </a:p>
@@ -1985,7 +1987,7 @@
           <a:p>
             <a:fld id="{5BCAD085-E8A6-8845-BD4E-CB4CCA059FC4}" type="datetimeFigureOut">
               <a:rPr lang="en-US" smtClean="0"/>
-              <a:t>1/27/13</a:t>
+              <a:t>4/21/2026</a:t>
             </a:fld>
             <a:endParaRPr lang="en-US"/>
           </a:p>
@@ -2088,10 +2090,9 @@
           </a:lstStyle>
           <a:p>
             <a:r>
-              <a:rPr lang="en-US" smtClean="0"/>
+              <a:rPr lang="en-US"/>
               <a:t>Click to edit Master title style</a:t>
             </a:r>
-            <a:endParaRPr lang="en-US"/>
           </a:p>
         </p:txBody>
       </p:sp>
@@ -2145,38 +2146,37 @@
           <a:p>
             <a:pPr lvl="0"/>
             <a:r>
-              <a:rPr lang="en-US" smtClean="0"/>
+              <a:rPr lang="en-US"/>
               <a:t>Click to edit Master text styles</a:t>
             </a:r>
           </a:p>
           <a:p>
             <a:pPr lvl="1"/>
             <a:r>
-              <a:rPr lang="en-US" smtClean="0"/>
+              <a:rPr lang="en-US"/>
               <a:t>Second level</a:t>
             </a:r>
           </a:p>
           <a:p>
             <a:pPr lvl="2"/>
             <a:r>
-              <a:rPr lang="en-US" smtClean="0"/>
+              <a:rPr lang="en-US"/>
               <a:t>Third level</a:t>
             </a:r>
           </a:p>
           <a:p>
             <a:pPr lvl="3"/>
             <a:r>
-              <a:rPr lang="en-US" smtClean="0"/>
+              <a:rPr lang="en-US"/>
               <a:t>Fourth level</a:t>
             </a:r>
           </a:p>
           <a:p>
             <a:pPr lvl="4"/>
             <a:r>
-              <a:rPr lang="en-US" smtClean="0"/>
+              <a:rPr lang="en-US"/>
               <a:t>Fifth level</a:t>
             </a:r>
-            <a:endParaRPr lang="en-US"/>
           </a:p>
         </p:txBody>
       </p:sp>
@@ -2239,7 +2239,7 @@
           <a:p>
             <a:pPr lvl="0"/>
             <a:r>
-              <a:rPr lang="en-US" smtClean="0"/>
+              <a:rPr lang="en-US"/>
               <a:t>Click to edit Master text styles</a:t>
             </a:r>
           </a:p>
@@ -2262,7 +2262,7 @@
           <a:p>
             <a:fld id="{5BCAD085-E8A6-8845-BD4E-CB4CCA059FC4}" type="datetimeFigureOut">
               <a:rPr lang="en-US" smtClean="0"/>
-              <a:t>1/27/13</a:t>
+              <a:t>4/21/2026</a:t>
             </a:fld>
             <a:endParaRPr lang="en-US"/>
           </a:p>
@@ -2365,10 +2365,9 @@
           </a:lstStyle>
           <a:p>
             <a:r>
-              <a:rPr lang="en-US" smtClean="0"/>
+              <a:rPr lang="en-US"/>
               <a:t>Click to edit Master title style</a:t>
             </a:r>
-            <a:endParaRPr lang="en-US"/>
           </a:p>
         </p:txBody>
       </p:sp>
@@ -2492,7 +2491,7 @@
           <a:p>
             <a:pPr lvl="0"/>
             <a:r>
-              <a:rPr lang="en-US" smtClean="0"/>
+              <a:rPr lang="en-US"/>
               <a:t>Click to edit Master text styles</a:t>
             </a:r>
           </a:p>
@@ -2515,7 +2514,7 @@
           <a:p>
             <a:fld id="{5BCAD085-E8A6-8845-BD4E-CB4CCA059FC4}" type="datetimeFigureOut">
               <a:rPr lang="en-US" smtClean="0"/>
-              <a:t>1/27/13</a:t>
+              <a:t>4/21/2026</a:t>
             </a:fld>
             <a:endParaRPr lang="en-US"/>
           </a:p>
@@ -2624,10 +2623,9 @@
           <a:lstStyle/>
           <a:p>
             <a:r>
-              <a:rPr lang="en-US" smtClean="0"/>
+              <a:rPr lang="en-US"/>
               <a:t>Click to edit Master title style</a:t>
             </a:r>
-            <a:endParaRPr lang="en-US"/>
           </a:p>
         </p:txBody>
       </p:sp>
@@ -2658,38 +2656,37 @@
           <a:p>
             <a:pPr lvl="0"/>
             <a:r>
-              <a:rPr lang="en-US" smtClean="0"/>
+              <a:rPr lang="en-US"/>
               <a:t>Click to edit Master text styles</a:t>
             </a:r>
           </a:p>
           <a:p>
             <a:pPr lvl="1"/>
             <a:r>
-              <a:rPr lang="en-US" smtClean="0"/>
+              <a:rPr lang="en-US"/>
               <a:t>Second level</a:t>
             </a:r>
           </a:p>
           <a:p>
             <a:pPr lvl="2"/>
             <a:r>
-              <a:rPr lang="en-US" smtClean="0"/>
+              <a:rPr lang="en-US"/>
               <a:t>Third level</a:t>
             </a:r>
           </a:p>
           <a:p>
             <a:pPr lvl="3"/>
             <a:r>
-              <a:rPr lang="en-US" smtClean="0"/>
+              <a:rPr lang="en-US"/>
               <a:t>Fourth level</a:t>
             </a:r>
           </a:p>
           <a:p>
             <a:pPr lvl="4"/>
             <a:r>
-              <a:rPr lang="en-US" smtClean="0"/>
+              <a:rPr lang="en-US"/>
               <a:t>Fifth level</a:t>
             </a:r>
-            <a:endParaRPr lang="en-US"/>
           </a:p>
         </p:txBody>
       </p:sp>
@@ -2728,7 +2725,7 @@
           <a:p>
             <a:fld id="{5BCAD085-E8A6-8845-BD4E-CB4CCA059FC4}" type="datetimeFigureOut">
               <a:rPr lang="en-US" smtClean="0"/>
-              <a:t>1/27/13</a:t>
+              <a:t>4/21/2026</a:t>
             </a:fld>
             <a:endParaRPr lang="en-US"/>
           </a:p>
@@ -3087,7 +3084,7 @@
 </file>
 
 <file path=ppt/slides/slide1.xml><?xml version="1.0" encoding="utf-8"?>
-<p:sld xmlns:a="http://schemas.openxmlformats.org/drawingml/2006/main" xmlns:p="http://schemas.openxmlformats.org/presentationml/2006/main" xmlns:r="http://schemas.openxmlformats.org/officeDocument/2006/relationships">
+<p:sld xmlns:a="http://schemas.openxmlformats.org/drawingml/2006/main" xmlns:r="http://schemas.openxmlformats.org/officeDocument/2006/relationships" xmlns:p="http://schemas.openxmlformats.org/presentationml/2006/main">
   <p:cSld>
     <p:spTree>
       <p:nvGrpSpPr>
@@ -3095,7 +3092,14 @@
         <p:cNvGrpSpPr/>
         <p:nvPr/>
       </p:nvGrpSpPr>
-      <p:grpSpPr/>
+      <p:grpSpPr>
+        <a:xfrm>
+          <a:off x="0" y="0"/>
+          <a:ext cx="0" cy="0"/>
+          <a:chOff x="0" y="0"/>
+          <a:chExt cx="0" cy="0"/>
+        </a:xfrm>
+      </p:grpSpPr>
       <p:sp>
         <p:nvSpPr>
           <p:cNvPr id="2" name="Rectangle 1"/>
@@ -3136,6 +3140,7 @@
           <a:lstStyle/>
           <a:p>
             <a:pPr algn="ctr"/>
+            <a:endParaRPr/>
           </a:p>
         </p:txBody>
       </p:sp>
@@ -3179,6 +3184,7 @@
           <a:lstStyle/>
           <a:p>
             <a:pPr algn="ctr"/>
+            <a:endParaRPr/>
           </a:p>
         </p:txBody>
       </p:sp>
@@ -3222,6 +3228,7 @@
           <a:lstStyle/>
           <a:p>
             <a:pPr algn="ctr"/>
+            <a:endParaRPr/>
           </a:p>
         </p:txBody>
       </p:sp>
@@ -3256,6 +3263,7 @@
               </a:defRPr>
             </a:pPr>
             <a:r>
+              <a:rPr dirty="0"/>
               <a:t>NTL in Population</a:t>
             </a:r>
           </a:p>
@@ -3292,6 +3300,7 @@
               </a:defRPr>
             </a:pPr>
             <a:r>
+              <a:rPr dirty="0"/>
               <a:t>Estimation of Population of Pakistan from Nighttime Light Imagery for 2025</a:t>
             </a:r>
           </a:p>
@@ -3337,6 +3346,7 @@
           <a:lstStyle/>
           <a:p>
             <a:pPr algn="ctr"/>
+            <a:endParaRPr/>
           </a:p>
         </p:txBody>
       </p:sp>
@@ -3371,6 +3381,7 @@
               </a:defRPr>
             </a:pPr>
             <a:r>
+              <a:rPr dirty="0"/>
               <a:t>AI Application Course  |  ResNet-18 + GHSL Built-Up Volume  |  Pearson R = 0.881</a:t>
             </a:r>
           </a:p>
@@ -3384,8 +3395,8 @@
         </p:nvSpPr>
         <p:spPr>
           <a:xfrm>
-            <a:off x="914400" y="5029200"/>
-            <a:ext cx="10058400" cy="731520"/>
+            <a:off x="1066647" y="5054600"/>
+            <a:ext cx="10058400" cy="292388"/>
           </a:xfrm>
           <a:prstGeom prst="rect">
             <a:avLst/>
@@ -3407,7 +3418,554 @@
               </a:defRPr>
             </a:pPr>
             <a:r>
-              <a:t>Team: [Author 1  Data Engineering]  |  [Author 2  Model Engineering]  |  [Author 3  Evaluation &amp; Application]</a:t>
+              <a:rPr dirty="0"/>
+              <a:t>Team: </a:t>
+            </a:r>
+            <a:r>
+              <a:rPr lang="en-GB" dirty="0"/>
+              <a:t>LS2525242 </a:t>
+            </a:r>
+            <a:r>
+              <a:rPr lang="en-GB" dirty="0" err="1"/>
+              <a:t>Tokhirjon</a:t>
+            </a:r>
+            <a:r>
+              <a:rPr lang="en-GB" dirty="0"/>
+              <a:t> Teshaboev; LS2525241 Rasul Anvar; LS2525266 Elattar Mohamed Mostafa Mohamed Ahmed </a:t>
+            </a:r>
+            <a:endParaRPr dirty="0"/>
+          </a:p>
+        </p:txBody>
+      </p:sp>
+    </p:spTree>
+  </p:cSld>
+  <p:clrMapOvr>
+    <a:masterClrMapping/>
+  </p:clrMapOvr>
+</p:sld>
+</file>
+
+<file path=ppt/slides/slide10.xml><?xml version="1.0" encoding="utf-8"?>
+<p:sld xmlns:a="http://schemas.openxmlformats.org/drawingml/2006/main" xmlns:r="http://schemas.openxmlformats.org/officeDocument/2006/relationships" xmlns:p="http://schemas.openxmlformats.org/presentationml/2006/main">
+  <p:cSld>
+    <p:spTree>
+      <p:nvGrpSpPr>
+        <p:cNvPr id="1" name=""/>
+        <p:cNvGrpSpPr/>
+        <p:nvPr/>
+      </p:nvGrpSpPr>
+      <p:grpSpPr>
+        <a:xfrm>
+          <a:off x="0" y="0"/>
+          <a:ext cx="0" cy="0"/>
+          <a:chOff x="0" y="0"/>
+          <a:chExt cx="0" cy="0"/>
+        </a:xfrm>
+      </p:grpSpPr>
+      <p:sp>
+        <p:nvSpPr>
+          <p:cNvPr id="4" name="Rectangle 3">
+            <a:extLst>
+              <a:ext uri="{FF2B5EF4-FFF2-40B4-BE49-F238E27FC236}">
+                <a16:creationId xmlns:a16="http://schemas.microsoft.com/office/drawing/2014/main" id="{013500B0-3830-85B8-4322-5C4C08C60747}"/>
+              </a:ext>
+            </a:extLst>
+          </p:cNvPr>
+          <p:cNvSpPr/>
+          <p:nvPr/>
+        </p:nvSpPr>
+        <p:spPr>
+          <a:xfrm>
+            <a:off x="0" y="0"/>
+            <a:ext cx="12191695" cy="6858000"/>
+          </a:xfrm>
+          <a:prstGeom prst="rect">
+            <a:avLst/>
+          </a:prstGeom>
+          <a:solidFill>
+            <a:srgbClr val="0F172A"/>
+          </a:solidFill>
+          <a:ln>
+            <a:noFill/>
+          </a:ln>
+        </p:spPr>
+        <p:style>
+          <a:lnRef idx="1">
+            <a:schemeClr val="accent1"/>
+          </a:lnRef>
+          <a:fillRef idx="3">
+            <a:schemeClr val="accent1"/>
+          </a:fillRef>
+          <a:effectRef idx="2">
+            <a:schemeClr val="accent1"/>
+          </a:effectRef>
+          <a:fontRef idx="minor">
+            <a:schemeClr val="lt1"/>
+          </a:fontRef>
+        </p:style>
+        <p:txBody>
+          <a:bodyPr rtlCol="0" anchor="ctr"/>
+          <a:lstStyle/>
+          <a:p>
+            <a:pPr algn="ctr"/>
+            <a:endParaRPr/>
+          </a:p>
+        </p:txBody>
+      </p:sp>
+      <p:pic>
+        <p:nvPicPr>
+          <p:cNvPr id="3" name="Picture 2">
+            <a:extLst>
+              <a:ext uri="{FF2B5EF4-FFF2-40B4-BE49-F238E27FC236}">
+                <a16:creationId xmlns:a16="http://schemas.microsoft.com/office/drawing/2014/main" id="{79D31E2F-3C8B-EA31-C4F8-783228301B1E}"/>
+              </a:ext>
+            </a:extLst>
+          </p:cNvPr>
+          <p:cNvPicPr>
+            <a:picLocks noChangeAspect="1"/>
+          </p:cNvPicPr>
+          <p:nvPr/>
+        </p:nvPicPr>
+        <p:blipFill>
+          <a:blip r:embed="rId2"/>
+          <a:srcRect t="16913" b="35679"/>
+          <a:stretch>
+            <a:fillRect/>
+          </a:stretch>
+        </p:blipFill>
+        <p:spPr>
+          <a:xfrm>
+            <a:off x="336492" y="-1"/>
+            <a:ext cx="11519016" cy="6835305"/>
+          </a:xfrm>
+          <a:prstGeom prst="rect">
+            <a:avLst/>
+          </a:prstGeom>
+        </p:spPr>
+      </p:pic>
+    </p:spTree>
+    <p:extLst>
+      <p:ext uri="{BB962C8B-B14F-4D97-AF65-F5344CB8AC3E}">
+        <p14:creationId xmlns:p14="http://schemas.microsoft.com/office/powerpoint/2010/main" val="2500662568"/>
+      </p:ext>
+    </p:extLst>
+  </p:cSld>
+  <p:clrMapOvr>
+    <a:masterClrMapping/>
+  </p:clrMapOvr>
+</p:sld>
+</file>
+
+<file path=ppt/slides/slide11.xml><?xml version="1.0" encoding="utf-8"?>
+<p:sld xmlns:a="http://schemas.openxmlformats.org/drawingml/2006/main" xmlns:r="http://schemas.openxmlformats.org/officeDocument/2006/relationships" xmlns:p="http://schemas.openxmlformats.org/presentationml/2006/main">
+  <p:cSld>
+    <p:spTree>
+      <p:nvGrpSpPr>
+        <p:cNvPr id="1" name=""/>
+        <p:cNvGrpSpPr/>
+        <p:nvPr/>
+      </p:nvGrpSpPr>
+      <p:grpSpPr>
+        <a:xfrm>
+          <a:off x="0" y="0"/>
+          <a:ext cx="0" cy="0"/>
+          <a:chOff x="0" y="0"/>
+          <a:chExt cx="0" cy="0"/>
+        </a:xfrm>
+      </p:grpSpPr>
+      <p:sp>
+        <p:nvSpPr>
+          <p:cNvPr id="2" name="Rectangle 1"/>
+          <p:cNvSpPr/>
+          <p:nvPr/>
+        </p:nvSpPr>
+        <p:spPr>
+          <a:xfrm>
+            <a:off x="0" y="0"/>
+            <a:ext cx="12191695" cy="6858000"/>
+          </a:xfrm>
+          <a:prstGeom prst="rect">
+            <a:avLst/>
+          </a:prstGeom>
+          <a:solidFill>
+            <a:srgbClr val="0F172A"/>
+          </a:solidFill>
+          <a:ln>
+            <a:noFill/>
+          </a:ln>
+        </p:spPr>
+        <p:style>
+          <a:lnRef idx="1">
+            <a:schemeClr val="accent1"/>
+          </a:lnRef>
+          <a:fillRef idx="3">
+            <a:schemeClr val="accent1"/>
+          </a:fillRef>
+          <a:effectRef idx="2">
+            <a:schemeClr val="accent1"/>
+          </a:effectRef>
+          <a:fontRef idx="minor">
+            <a:schemeClr val="lt1"/>
+          </a:fontRef>
+        </p:style>
+        <p:txBody>
+          <a:bodyPr rtlCol="0" anchor="ctr"/>
+          <a:lstStyle/>
+          <a:p>
+            <a:pPr algn="ctr"/>
+            <a:endParaRPr/>
+          </a:p>
+        </p:txBody>
+      </p:sp>
+      <p:sp>
+        <p:nvSpPr>
+          <p:cNvPr id="3" name="Oval 2"/>
+          <p:cNvSpPr/>
+          <p:nvPr/>
+        </p:nvSpPr>
+        <p:spPr>
+          <a:xfrm>
+            <a:off x="9144000" y="-914400"/>
+            <a:ext cx="3657600" cy="3657600"/>
+          </a:xfrm>
+          <a:prstGeom prst="ellipse">
+            <a:avLst/>
+          </a:prstGeom>
+          <a:solidFill>
+            <a:srgbClr val="60A5FA"/>
+          </a:solidFill>
+          <a:ln>
+            <a:noFill/>
+          </a:ln>
+        </p:spPr>
+        <p:style>
+          <a:lnRef idx="1">
+            <a:schemeClr val="accent1"/>
+          </a:lnRef>
+          <a:fillRef idx="3">
+            <a:schemeClr val="accent1"/>
+          </a:fillRef>
+          <a:effectRef idx="2">
+            <a:schemeClr val="accent1"/>
+          </a:effectRef>
+          <a:fontRef idx="minor">
+            <a:schemeClr val="lt1"/>
+          </a:fontRef>
+        </p:style>
+        <p:txBody>
+          <a:bodyPr rtlCol="0" anchor="ctr"/>
+          <a:lstStyle/>
+          <a:p>
+            <a:pPr algn="ctr"/>
+            <a:endParaRPr/>
+          </a:p>
+        </p:txBody>
+      </p:sp>
+      <p:sp>
+        <p:nvSpPr>
+          <p:cNvPr id="4" name="Oval 3"/>
+          <p:cNvSpPr/>
+          <p:nvPr/>
+        </p:nvSpPr>
+        <p:spPr>
+          <a:xfrm>
+            <a:off x="-1371600" y="4572000"/>
+            <a:ext cx="3200400" cy="3200400"/>
+          </a:xfrm>
+          <a:prstGeom prst="ellipse">
+            <a:avLst/>
+          </a:prstGeom>
+          <a:solidFill>
+            <a:srgbClr val="A78BFA"/>
+          </a:solidFill>
+          <a:ln>
+            <a:noFill/>
+          </a:ln>
+        </p:spPr>
+        <p:style>
+          <a:lnRef idx="1">
+            <a:schemeClr val="accent1"/>
+          </a:lnRef>
+          <a:fillRef idx="3">
+            <a:schemeClr val="accent1"/>
+          </a:fillRef>
+          <a:effectRef idx="2">
+            <a:schemeClr val="accent1"/>
+          </a:effectRef>
+          <a:fontRef idx="minor">
+            <a:schemeClr val="lt1"/>
+          </a:fontRef>
+        </p:style>
+        <p:txBody>
+          <a:bodyPr rtlCol="0" anchor="ctr"/>
+          <a:lstStyle/>
+          <a:p>
+            <a:pPr algn="ctr"/>
+            <a:endParaRPr/>
+          </a:p>
+        </p:txBody>
+      </p:sp>
+      <p:sp>
+        <p:nvSpPr>
+          <p:cNvPr id="5" name="TextBox 4"/>
+          <p:cNvSpPr txBox="1"/>
+          <p:nvPr/>
+        </p:nvSpPr>
+        <p:spPr>
+          <a:xfrm>
+            <a:off x="914400" y="2011680"/>
+            <a:ext cx="10058400" cy="914400"/>
+          </a:xfrm>
+          <a:prstGeom prst="rect">
+            <a:avLst/>
+          </a:prstGeom>
+          <a:noFill/>
+        </p:spPr>
+        <p:txBody>
+          <a:bodyPr wrap="square">
+            <a:spAutoFit/>
+          </a:bodyPr>
+          <a:lstStyle/>
+          <a:p>
+            <a:pPr algn="ctr">
+              <a:defRPr sz="6000" b="1">
+                <a:solidFill>
+                  <a:srgbClr val="FFFFFF"/>
+                </a:solidFill>
+                <a:latin typeface="Segoe UI"/>
+              </a:defRPr>
+            </a:pPr>
+            <a:r>
+              <a:t>Thank You</a:t>
+            </a:r>
+          </a:p>
+        </p:txBody>
+      </p:sp>
+      <p:sp>
+        <p:nvSpPr>
+          <p:cNvPr id="6" name="Rectangle 5"/>
+          <p:cNvSpPr/>
+          <p:nvPr/>
+        </p:nvSpPr>
+        <p:spPr>
+          <a:xfrm>
+            <a:off x="5303520" y="3017520"/>
+            <a:ext cx="1554480" cy="73152"/>
+          </a:xfrm>
+          <a:prstGeom prst="rect">
+            <a:avLst/>
+          </a:prstGeom>
+          <a:solidFill>
+            <a:srgbClr val="60A5FA"/>
+          </a:solidFill>
+          <a:ln>
+            <a:noFill/>
+          </a:ln>
+        </p:spPr>
+        <p:style>
+          <a:lnRef idx="1">
+            <a:schemeClr val="accent1"/>
+          </a:lnRef>
+          <a:fillRef idx="3">
+            <a:schemeClr val="accent1"/>
+          </a:fillRef>
+          <a:effectRef idx="2">
+            <a:schemeClr val="accent1"/>
+          </a:effectRef>
+          <a:fontRef idx="minor">
+            <a:schemeClr val="lt1"/>
+          </a:fontRef>
+        </p:style>
+        <p:txBody>
+          <a:bodyPr rtlCol="0" anchor="ctr"/>
+          <a:lstStyle/>
+          <a:p>
+            <a:pPr algn="ctr"/>
+            <a:endParaRPr/>
+          </a:p>
+        </p:txBody>
+      </p:sp>
+      <p:sp>
+        <p:nvSpPr>
+          <p:cNvPr id="7" name="TextBox 6"/>
+          <p:cNvSpPr txBox="1"/>
+          <p:nvPr/>
+        </p:nvSpPr>
+        <p:spPr>
+          <a:xfrm>
+            <a:off x="914400" y="3291840"/>
+            <a:ext cx="10058400" cy="731520"/>
+          </a:xfrm>
+          <a:prstGeom prst="rect">
+            <a:avLst/>
+          </a:prstGeom>
+          <a:noFill/>
+        </p:spPr>
+        <p:txBody>
+          <a:bodyPr wrap="square">
+            <a:spAutoFit/>
+          </a:bodyPr>
+          <a:lstStyle/>
+          <a:p>
+            <a:pPr algn="ctr">
+              <a:defRPr sz="2800" b="0">
+                <a:solidFill>
+                  <a:srgbClr val="CBD5E1"/>
+                </a:solidFill>
+                <a:latin typeface="Segoe UI"/>
+              </a:defRPr>
+            </a:pPr>
+            <a:r>
+              <a:t>Questions?</a:t>
+            </a:r>
+          </a:p>
+        </p:txBody>
+      </p:sp>
+      <p:sp>
+        <p:nvSpPr>
+          <p:cNvPr id="8" name="TextBox 7"/>
+          <p:cNvSpPr txBox="1"/>
+          <p:nvPr/>
+        </p:nvSpPr>
+        <p:spPr>
+          <a:xfrm>
+            <a:off x="914400" y="4114800"/>
+            <a:ext cx="10058400" cy="738664"/>
+          </a:xfrm>
+          <a:prstGeom prst="rect">
+            <a:avLst/>
+          </a:prstGeom>
+          <a:noFill/>
+        </p:spPr>
+        <p:txBody>
+          <a:bodyPr wrap="square">
+            <a:spAutoFit/>
+          </a:bodyPr>
+          <a:lstStyle/>
+          <a:p>
+            <a:pPr algn="ctr">
+              <a:defRPr sz="1400" b="0">
+                <a:solidFill>
+                  <a:srgbClr val="94A3B8"/>
+                </a:solidFill>
+                <a:latin typeface="Segoe UI"/>
+              </a:defRPr>
+            </a:pPr>
+            <a:r>
+              <a:rPr dirty="0"/>
+              <a:t>Team: </a:t>
+            </a:r>
+            <a:r>
+              <a:rPr lang="en-GB" dirty="0"/>
+              <a:t>LS2525242 </a:t>
+            </a:r>
+            <a:r>
+              <a:rPr lang="en-GB" dirty="0" err="1"/>
+              <a:t>Tokhirjon</a:t>
+            </a:r>
+            <a:r>
+              <a:rPr lang="en-GB" dirty="0"/>
+              <a:t> Teshaboev - </a:t>
+            </a:r>
+            <a:r>
+              <a:rPr dirty="0"/>
+              <a:t>Data Engineering  | </a:t>
+            </a:r>
+            <a:r>
+              <a:rPr lang="en-GB" dirty="0"/>
+              <a:t>LS2525241 Rasul Anvar</a:t>
+            </a:r>
+            <a:r>
+              <a:rPr dirty="0"/>
+              <a:t> </a:t>
+            </a:r>
+            <a:r>
+              <a:rPr lang="en-GB" dirty="0"/>
+              <a:t>- </a:t>
+            </a:r>
+            <a:r>
+              <a:rPr dirty="0"/>
+              <a:t>Model Engineering  </a:t>
+            </a:r>
+            <a:br>
+              <a:rPr lang="en-GB" dirty="0"/>
+            </a:br>
+            <a:r>
+              <a:rPr lang="en-GB" dirty="0"/>
+              <a:t>LS2525266 Elattar Mohamed Mostafa Mohamed Ahmed</a:t>
+            </a:r>
+            <a:r>
+              <a:rPr dirty="0"/>
+              <a:t> </a:t>
+            </a:r>
+            <a:r>
+              <a:rPr lang="en-GB" dirty="0"/>
+              <a:t>-</a:t>
+            </a:r>
+            <a:r>
+              <a:rPr dirty="0"/>
+              <a:t> Evaluation &amp; Application</a:t>
+            </a:r>
+            <a:endParaRPr lang="en-GB" dirty="0"/>
+          </a:p>
+          <a:p>
+            <a:pPr algn="ctr">
+              <a:defRPr sz="1400" b="0">
+                <a:solidFill>
+                  <a:srgbClr val="94A3B8"/>
+                </a:solidFill>
+                <a:latin typeface="Segoe UI"/>
+              </a:defRPr>
+            </a:pPr>
+            <a:endParaRPr dirty="0"/>
+          </a:p>
+        </p:txBody>
+      </p:sp>
+      <p:sp>
+        <p:nvSpPr>
+          <p:cNvPr id="9" name="TextBox 8"/>
+          <p:cNvSpPr txBox="1"/>
+          <p:nvPr/>
+        </p:nvSpPr>
+        <p:spPr>
+          <a:xfrm>
+            <a:off x="914400" y="5035209"/>
+            <a:ext cx="10058400" cy="292388"/>
+          </a:xfrm>
+          <a:prstGeom prst="rect">
+            <a:avLst/>
+          </a:prstGeom>
+          <a:noFill/>
+        </p:spPr>
+        <p:txBody>
+          <a:bodyPr wrap="square">
+            <a:spAutoFit/>
+          </a:bodyPr>
+          <a:lstStyle/>
+          <a:p>
+            <a:pPr algn="ctr">
+              <a:defRPr sz="1300" b="0">
+                <a:solidFill>
+                  <a:srgbClr val="94A3B8"/>
+                </a:solidFill>
+                <a:latin typeface="Segoe UI"/>
+              </a:defRPr>
+            </a:pPr>
+            <a:r>
+              <a:rPr dirty="0"/>
+              <a:t>Code: github.com/</a:t>
+            </a:r>
+            <a:r>
+              <a:rPr lang="en-GB" sz="1300" dirty="0" err="1"/>
+              <a:t>gistechnophile</a:t>
+            </a:r>
+            <a:r>
+              <a:rPr lang="en-GB" sz="1300" dirty="0"/>
+              <a:t>/AI-project-on-NTL</a:t>
+            </a:r>
+            <a:r>
+              <a:rPr dirty="0"/>
+              <a:t> |  Report: PROJECT_REPORT.md</a:t>
             </a:r>
           </a:p>
         </p:txBody>
@@ -3421,7 +3979,7 @@
 </file>
 
 <file path=ppt/slides/slide2.xml><?xml version="1.0" encoding="utf-8"?>
-<p:sld xmlns:a="http://schemas.openxmlformats.org/drawingml/2006/main" xmlns:p="http://schemas.openxmlformats.org/presentationml/2006/main" xmlns:r="http://schemas.openxmlformats.org/officeDocument/2006/relationships">
+<p:sld xmlns:a="http://schemas.openxmlformats.org/drawingml/2006/main" xmlns:r="http://schemas.openxmlformats.org/officeDocument/2006/relationships" xmlns:p="http://schemas.openxmlformats.org/presentationml/2006/main">
   <p:cSld>
     <p:spTree>
       <p:nvGrpSpPr>
@@ -3429,7 +3987,14 @@
         <p:cNvGrpSpPr/>
         <p:nvPr/>
       </p:nvGrpSpPr>
-      <p:grpSpPr/>
+      <p:grpSpPr>
+        <a:xfrm>
+          <a:off x="0" y="0"/>
+          <a:ext cx="0" cy="0"/>
+          <a:chOff x="0" y="0"/>
+          <a:chExt cx="0" cy="0"/>
+        </a:xfrm>
+      </p:grpSpPr>
       <p:sp>
         <p:nvSpPr>
           <p:cNvPr id="2" name="Rectangle 1"/>
@@ -3470,6 +4035,7 @@
           <a:lstStyle/>
           <a:p>
             <a:pPr algn="ctr"/>
+            <a:endParaRPr/>
           </a:p>
         </p:txBody>
       </p:sp>
@@ -3517,8 +4083,8 @@
         </p:nvSpPr>
         <p:spPr>
           <a:xfrm>
-            <a:off x="731520" y="1097280"/>
-            <a:ext cx="1097280" cy="54864"/>
+            <a:off x="731519" y="1097280"/>
+            <a:ext cx="3086947" cy="54864"/>
           </a:xfrm>
           <a:prstGeom prst="rect">
             <a:avLst/>
@@ -3549,6 +4115,7 @@
           <a:lstStyle/>
           <a:p>
             <a:pPr algn="ctr"/>
+            <a:endParaRPr/>
           </a:p>
         </p:txBody>
       </p:sp>
@@ -3630,6 +4197,7 @@
           <a:lstStyle/>
           <a:p>
             <a:pPr algn="ctr"/>
+            <a:endParaRPr/>
           </a:p>
         </p:txBody>
       </p:sp>
@@ -3747,6 +4315,7 @@
           <a:lstStyle/>
           <a:p>
             <a:pPr algn="ctr"/>
+            <a:endParaRPr/>
           </a:p>
         </p:txBody>
       </p:sp>
@@ -3867,7 +4436,7 @@
 </file>
 
 <file path=ppt/slides/slide3.xml><?xml version="1.0" encoding="utf-8"?>
-<p:sld xmlns:a="http://schemas.openxmlformats.org/drawingml/2006/main" xmlns:p="http://schemas.openxmlformats.org/presentationml/2006/main" xmlns:r="http://schemas.openxmlformats.org/officeDocument/2006/relationships">
+<p:sld xmlns:a="http://schemas.openxmlformats.org/drawingml/2006/main" xmlns:r="http://schemas.openxmlformats.org/officeDocument/2006/relationships" xmlns:p="http://schemas.openxmlformats.org/presentationml/2006/main">
   <p:cSld>
     <p:spTree>
       <p:nvGrpSpPr>
@@ -3875,7 +4444,14 @@
         <p:cNvGrpSpPr/>
         <p:nvPr/>
       </p:nvGrpSpPr>
-      <p:grpSpPr/>
+      <p:grpSpPr>
+        <a:xfrm>
+          <a:off x="0" y="0"/>
+          <a:ext cx="0" cy="0"/>
+          <a:chOff x="0" y="0"/>
+          <a:chExt cx="0" cy="0"/>
+        </a:xfrm>
+      </p:grpSpPr>
       <p:sp>
         <p:nvSpPr>
           <p:cNvPr id="2" name="Rectangle 1"/>
@@ -3916,6 +4492,7 @@
           <a:lstStyle/>
           <a:p>
             <a:pPr algn="ctr"/>
+            <a:endParaRPr/>
           </a:p>
         </p:txBody>
       </p:sp>
@@ -3962,9 +4539,9 @@
           <p:nvPr/>
         </p:nvSpPr>
         <p:spPr>
-          <a:xfrm>
-            <a:off x="731520" y="1097280"/>
-            <a:ext cx="1371600" cy="54864"/>
+          <a:xfrm flipV="1">
+            <a:off x="731519" y="1051560"/>
+            <a:ext cx="3171614" cy="45719"/>
           </a:xfrm>
           <a:prstGeom prst="rect">
             <a:avLst/>
@@ -3995,6 +4572,7 @@
           <a:lstStyle/>
           <a:p>
             <a:pPr algn="ctr"/>
+            <a:endParaRPr/>
           </a:p>
         </p:txBody>
       </p:sp>
@@ -4006,8 +4584,8 @@
         </p:nvSpPr>
         <p:spPr>
           <a:xfrm>
-            <a:off x="731520" y="1463040"/>
-            <a:ext cx="2926080" cy="594360"/>
+            <a:off x="149014" y="1583175"/>
+            <a:ext cx="2737510" cy="504613"/>
           </a:xfrm>
           <a:prstGeom prst="rect">
             <a:avLst/>
@@ -4038,6 +4616,7 @@
           <a:lstStyle/>
           <a:p>
             <a:pPr algn="ctr"/>
+            <a:endParaRPr/>
           </a:p>
         </p:txBody>
       </p:sp>
@@ -4049,8 +4628,8 @@
         </p:nvSpPr>
         <p:spPr>
           <a:xfrm>
-            <a:off x="822960" y="1600200"/>
-            <a:ext cx="2743200" cy="594360"/>
+            <a:off x="240454" y="1677063"/>
+            <a:ext cx="2566416" cy="307777"/>
           </a:xfrm>
           <a:prstGeom prst="rect">
             <a:avLst/>
@@ -4085,8 +4664,8 @@
         </p:nvSpPr>
         <p:spPr>
           <a:xfrm>
-            <a:off x="3657600" y="1463040"/>
-            <a:ext cx="3657600" cy="594360"/>
+            <a:off x="3075094" y="1583175"/>
+            <a:ext cx="3421888" cy="504613"/>
           </a:xfrm>
           <a:prstGeom prst="rect">
             <a:avLst/>
@@ -4117,6 +4696,7 @@
           <a:lstStyle/>
           <a:p>
             <a:pPr algn="ctr"/>
+            <a:endParaRPr/>
           </a:p>
         </p:txBody>
       </p:sp>
@@ -4128,8 +4708,8 @@
         </p:nvSpPr>
         <p:spPr>
           <a:xfrm>
-            <a:off x="3749040" y="1600200"/>
-            <a:ext cx="3474720" cy="594360"/>
+            <a:off x="3166534" y="1677063"/>
+            <a:ext cx="3250794" cy="307777"/>
           </a:xfrm>
           <a:prstGeom prst="rect">
             <a:avLst/>
@@ -4164,8 +4744,8 @@
         </p:nvSpPr>
         <p:spPr>
           <a:xfrm>
-            <a:off x="7315200" y="1463040"/>
-            <a:ext cx="2743200" cy="594360"/>
+            <a:off x="6732694" y="1583175"/>
+            <a:ext cx="2566416" cy="504613"/>
           </a:xfrm>
           <a:prstGeom prst="rect">
             <a:avLst/>
@@ -4196,6 +4776,7 @@
           <a:lstStyle/>
           <a:p>
             <a:pPr algn="ctr"/>
+            <a:endParaRPr/>
           </a:p>
         </p:txBody>
       </p:sp>
@@ -4207,8 +4788,8 @@
         </p:nvSpPr>
         <p:spPr>
           <a:xfrm>
-            <a:off x="7406640" y="1600200"/>
-            <a:ext cx="2560320" cy="594360"/>
+            <a:off x="6824134" y="1677063"/>
+            <a:ext cx="2395322" cy="307777"/>
           </a:xfrm>
           <a:prstGeom prst="rect">
             <a:avLst/>
@@ -4243,8 +4824,8 @@
         </p:nvSpPr>
         <p:spPr>
           <a:xfrm>
-            <a:off x="10058400" y="1463040"/>
-            <a:ext cx="2743200" cy="594360"/>
+            <a:off x="9475894" y="1583175"/>
+            <a:ext cx="2566416" cy="504613"/>
           </a:xfrm>
           <a:prstGeom prst="rect">
             <a:avLst/>
@@ -4275,6 +4856,7 @@
           <a:lstStyle/>
           <a:p>
             <a:pPr algn="ctr"/>
+            <a:endParaRPr/>
           </a:p>
         </p:txBody>
       </p:sp>
@@ -4286,8 +4868,8 @@
         </p:nvSpPr>
         <p:spPr>
           <a:xfrm>
-            <a:off x="10149840" y="1600200"/>
-            <a:ext cx="2560320" cy="594360"/>
+            <a:off x="9567334" y="1677063"/>
+            <a:ext cx="2395322" cy="307777"/>
           </a:xfrm>
           <a:prstGeom prst="rect">
             <a:avLst/>
@@ -4322,8 +4904,8 @@
         </p:nvSpPr>
         <p:spPr>
           <a:xfrm>
-            <a:off x="731520" y="2057400"/>
-            <a:ext cx="2926080" cy="594360"/>
+            <a:off x="149014" y="2177535"/>
+            <a:ext cx="2737510" cy="504613"/>
           </a:xfrm>
           <a:prstGeom prst="rect">
             <a:avLst/>
@@ -4356,6 +4938,7 @@
           <a:lstStyle/>
           <a:p>
             <a:pPr algn="ctr"/>
+            <a:endParaRPr/>
           </a:p>
         </p:txBody>
       </p:sp>
@@ -4367,8 +4950,8 @@
         </p:nvSpPr>
         <p:spPr>
           <a:xfrm>
-            <a:off x="822960" y="2194560"/>
-            <a:ext cx="2743200" cy="594360"/>
+            <a:off x="240454" y="2269099"/>
+            <a:ext cx="2566416" cy="292388"/>
           </a:xfrm>
           <a:prstGeom prst="rect">
             <a:avLst/>
@@ -4403,8 +4986,8 @@
         </p:nvSpPr>
         <p:spPr>
           <a:xfrm>
-            <a:off x="3657600" y="2057400"/>
-            <a:ext cx="3657600" cy="594360"/>
+            <a:off x="3075094" y="2177535"/>
+            <a:ext cx="3421888" cy="504613"/>
           </a:xfrm>
           <a:prstGeom prst="rect">
             <a:avLst/>
@@ -4437,6 +5020,7 @@
           <a:lstStyle/>
           <a:p>
             <a:pPr algn="ctr"/>
+            <a:endParaRPr/>
           </a:p>
         </p:txBody>
       </p:sp>
@@ -4448,8 +5032,8 @@
         </p:nvSpPr>
         <p:spPr>
           <a:xfrm>
-            <a:off x="3749040" y="2194560"/>
-            <a:ext cx="3474720" cy="594360"/>
+            <a:off x="3166534" y="2269099"/>
+            <a:ext cx="3250794" cy="292388"/>
           </a:xfrm>
           <a:prstGeom prst="rect">
             <a:avLst/>
@@ -4484,8 +5068,8 @@
         </p:nvSpPr>
         <p:spPr>
           <a:xfrm>
-            <a:off x="7315200" y="2057400"/>
-            <a:ext cx="2743200" cy="594360"/>
+            <a:off x="6732694" y="2177535"/>
+            <a:ext cx="2566416" cy="504613"/>
           </a:xfrm>
           <a:prstGeom prst="rect">
             <a:avLst/>
@@ -4518,6 +5102,7 @@
           <a:lstStyle/>
           <a:p>
             <a:pPr algn="ctr"/>
+            <a:endParaRPr/>
           </a:p>
         </p:txBody>
       </p:sp>
@@ -4529,8 +5114,8 @@
         </p:nvSpPr>
         <p:spPr>
           <a:xfrm>
-            <a:off x="7406640" y="2194560"/>
-            <a:ext cx="2560320" cy="594360"/>
+            <a:off x="6824134" y="2269099"/>
+            <a:ext cx="2395322" cy="292388"/>
           </a:xfrm>
           <a:prstGeom prst="rect">
             <a:avLst/>
@@ -4565,8 +5150,8 @@
         </p:nvSpPr>
         <p:spPr>
           <a:xfrm>
-            <a:off x="10058400" y="2057400"/>
-            <a:ext cx="2743200" cy="594360"/>
+            <a:off x="9475894" y="2177535"/>
+            <a:ext cx="2566416" cy="504613"/>
           </a:xfrm>
           <a:prstGeom prst="rect">
             <a:avLst/>
@@ -4599,6 +5184,7 @@
           <a:lstStyle/>
           <a:p>
             <a:pPr algn="ctr"/>
+            <a:endParaRPr/>
           </a:p>
         </p:txBody>
       </p:sp>
@@ -4610,8 +5196,8 @@
         </p:nvSpPr>
         <p:spPr>
           <a:xfrm>
-            <a:off x="10149840" y="2194560"/>
-            <a:ext cx="2560320" cy="594360"/>
+            <a:off x="9567334" y="2269099"/>
+            <a:ext cx="2395322" cy="292388"/>
           </a:xfrm>
           <a:prstGeom prst="rect">
             <a:avLst/>
@@ -4646,8 +5232,8 @@
         </p:nvSpPr>
         <p:spPr>
           <a:xfrm>
-            <a:off x="731520" y="2651760"/>
-            <a:ext cx="2926080" cy="594360"/>
+            <a:off x="149014" y="2771895"/>
+            <a:ext cx="2737510" cy="504613"/>
           </a:xfrm>
           <a:prstGeom prst="rect">
             <a:avLst/>
@@ -4680,6 +5266,7 @@
           <a:lstStyle/>
           <a:p>
             <a:pPr algn="ctr"/>
+            <a:endParaRPr/>
           </a:p>
         </p:txBody>
       </p:sp>
@@ -4691,8 +5278,8 @@
         </p:nvSpPr>
         <p:spPr>
           <a:xfrm>
-            <a:off x="822960" y="2788920"/>
-            <a:ext cx="2743200" cy="594360"/>
+            <a:off x="240454" y="2863459"/>
+            <a:ext cx="2566416" cy="292388"/>
           </a:xfrm>
           <a:prstGeom prst="rect">
             <a:avLst/>
@@ -4727,8 +5314,8 @@
         </p:nvSpPr>
         <p:spPr>
           <a:xfrm>
-            <a:off x="3657600" y="2651760"/>
-            <a:ext cx="3657600" cy="594360"/>
+            <a:off x="3075094" y="2771895"/>
+            <a:ext cx="3421888" cy="504613"/>
           </a:xfrm>
           <a:prstGeom prst="rect">
             <a:avLst/>
@@ -4761,6 +5348,7 @@
           <a:lstStyle/>
           <a:p>
             <a:pPr algn="ctr"/>
+            <a:endParaRPr/>
           </a:p>
         </p:txBody>
       </p:sp>
@@ -4772,8 +5360,8 @@
         </p:nvSpPr>
         <p:spPr>
           <a:xfrm>
-            <a:off x="3749040" y="2788920"/>
-            <a:ext cx="3474720" cy="594360"/>
+            <a:off x="3166534" y="2863459"/>
+            <a:ext cx="3250794" cy="292388"/>
           </a:xfrm>
           <a:prstGeom prst="rect">
             <a:avLst/>
@@ -4808,8 +5396,8 @@
         </p:nvSpPr>
         <p:spPr>
           <a:xfrm>
-            <a:off x="7315200" y="2651760"/>
-            <a:ext cx="2743200" cy="594360"/>
+            <a:off x="6732694" y="2771895"/>
+            <a:ext cx="2566416" cy="504613"/>
           </a:xfrm>
           <a:prstGeom prst="rect">
             <a:avLst/>
@@ -4842,6 +5430,7 @@
           <a:lstStyle/>
           <a:p>
             <a:pPr algn="ctr"/>
+            <a:endParaRPr/>
           </a:p>
         </p:txBody>
       </p:sp>
@@ -4853,8 +5442,8 @@
         </p:nvSpPr>
         <p:spPr>
           <a:xfrm>
-            <a:off x="7406640" y="2788920"/>
-            <a:ext cx="2560320" cy="594360"/>
+            <a:off x="6824134" y="2863459"/>
+            <a:ext cx="2395322" cy="292388"/>
           </a:xfrm>
           <a:prstGeom prst="rect">
             <a:avLst/>
@@ -4889,8 +5478,8 @@
         </p:nvSpPr>
         <p:spPr>
           <a:xfrm>
-            <a:off x="10058400" y="2651760"/>
-            <a:ext cx="2743200" cy="594360"/>
+            <a:off x="9475894" y="2771895"/>
+            <a:ext cx="2566416" cy="504613"/>
           </a:xfrm>
           <a:prstGeom prst="rect">
             <a:avLst/>
@@ -4923,6 +5512,7 @@
           <a:lstStyle/>
           <a:p>
             <a:pPr algn="ctr"/>
+            <a:endParaRPr/>
           </a:p>
         </p:txBody>
       </p:sp>
@@ -4934,8 +5524,8 @@
         </p:nvSpPr>
         <p:spPr>
           <a:xfrm>
-            <a:off x="10149840" y="2788920"/>
-            <a:ext cx="2560320" cy="594360"/>
+            <a:off x="9567334" y="2863459"/>
+            <a:ext cx="2395322" cy="292388"/>
           </a:xfrm>
           <a:prstGeom prst="rect">
             <a:avLst/>
@@ -4970,8 +5560,8 @@
         </p:nvSpPr>
         <p:spPr>
           <a:xfrm>
-            <a:off x="731520" y="3246120"/>
-            <a:ext cx="2926080" cy="594360"/>
+            <a:off x="149014" y="3366255"/>
+            <a:ext cx="2737510" cy="504613"/>
           </a:xfrm>
           <a:prstGeom prst="rect">
             <a:avLst/>
@@ -5004,6 +5594,7 @@
           <a:lstStyle/>
           <a:p>
             <a:pPr algn="ctr"/>
+            <a:endParaRPr/>
           </a:p>
         </p:txBody>
       </p:sp>
@@ -5015,8 +5606,8 @@
         </p:nvSpPr>
         <p:spPr>
           <a:xfrm>
-            <a:off x="822960" y="3383280"/>
-            <a:ext cx="2743200" cy="594360"/>
+            <a:off x="240454" y="3457819"/>
+            <a:ext cx="2566416" cy="292388"/>
           </a:xfrm>
           <a:prstGeom prst="rect">
             <a:avLst/>
@@ -5051,8 +5642,8 @@
         </p:nvSpPr>
         <p:spPr>
           <a:xfrm>
-            <a:off x="3657600" y="3246120"/>
-            <a:ext cx="3657600" cy="594360"/>
+            <a:off x="3075094" y="3366255"/>
+            <a:ext cx="3421888" cy="504613"/>
           </a:xfrm>
           <a:prstGeom prst="rect">
             <a:avLst/>
@@ -5085,6 +5676,7 @@
           <a:lstStyle/>
           <a:p>
             <a:pPr algn="ctr"/>
+            <a:endParaRPr/>
           </a:p>
         </p:txBody>
       </p:sp>
@@ -5096,8 +5688,8 @@
         </p:nvSpPr>
         <p:spPr>
           <a:xfrm>
-            <a:off x="3749040" y="3383280"/>
-            <a:ext cx="3474720" cy="594360"/>
+            <a:off x="3166534" y="3457819"/>
+            <a:ext cx="3250794" cy="292388"/>
           </a:xfrm>
           <a:prstGeom prst="rect">
             <a:avLst/>
@@ -5132,8 +5724,8 @@
         </p:nvSpPr>
         <p:spPr>
           <a:xfrm>
-            <a:off x="7315200" y="3246120"/>
-            <a:ext cx="2743200" cy="594360"/>
+            <a:off x="6732694" y="3366255"/>
+            <a:ext cx="2566416" cy="504613"/>
           </a:xfrm>
           <a:prstGeom prst="rect">
             <a:avLst/>
@@ -5166,6 +5758,7 @@
           <a:lstStyle/>
           <a:p>
             <a:pPr algn="ctr"/>
+            <a:endParaRPr/>
           </a:p>
         </p:txBody>
       </p:sp>
@@ -5177,8 +5770,8 @@
         </p:nvSpPr>
         <p:spPr>
           <a:xfrm>
-            <a:off x="7406640" y="3383280"/>
-            <a:ext cx="2560320" cy="594360"/>
+            <a:off x="6824134" y="3457819"/>
+            <a:ext cx="2395322" cy="292388"/>
           </a:xfrm>
           <a:prstGeom prst="rect">
             <a:avLst/>
@@ -5213,8 +5806,8 @@
         </p:nvSpPr>
         <p:spPr>
           <a:xfrm>
-            <a:off x="10058400" y="3246120"/>
-            <a:ext cx="2743200" cy="594360"/>
+            <a:off x="9475894" y="3366255"/>
+            <a:ext cx="2566416" cy="504613"/>
           </a:xfrm>
           <a:prstGeom prst="rect">
             <a:avLst/>
@@ -5247,6 +5840,7 @@
           <a:lstStyle/>
           <a:p>
             <a:pPr algn="ctr"/>
+            <a:endParaRPr/>
           </a:p>
         </p:txBody>
       </p:sp>
@@ -5258,8 +5852,8 @@
         </p:nvSpPr>
         <p:spPr>
           <a:xfrm>
-            <a:off x="10149840" y="3383280"/>
-            <a:ext cx="2560320" cy="594360"/>
+            <a:off x="9567334" y="3457819"/>
+            <a:ext cx="2395322" cy="292388"/>
           </a:xfrm>
           <a:prstGeom prst="rect">
             <a:avLst/>
@@ -5294,8 +5888,8 @@
         </p:nvSpPr>
         <p:spPr>
           <a:xfrm>
-            <a:off x="731520" y="3840480"/>
-            <a:ext cx="2926080" cy="594360"/>
+            <a:off x="149014" y="3960615"/>
+            <a:ext cx="2737510" cy="504613"/>
           </a:xfrm>
           <a:prstGeom prst="rect">
             <a:avLst/>
@@ -5328,6 +5922,7 @@
           <a:lstStyle/>
           <a:p>
             <a:pPr algn="ctr"/>
+            <a:endParaRPr/>
           </a:p>
         </p:txBody>
       </p:sp>
@@ -5339,8 +5934,8 @@
         </p:nvSpPr>
         <p:spPr>
           <a:xfrm>
-            <a:off x="822960" y="3977640"/>
-            <a:ext cx="2743200" cy="594360"/>
+            <a:off x="240454" y="4052179"/>
+            <a:ext cx="2566416" cy="292388"/>
           </a:xfrm>
           <a:prstGeom prst="rect">
             <a:avLst/>
@@ -5375,8 +5970,8 @@
         </p:nvSpPr>
         <p:spPr>
           <a:xfrm>
-            <a:off x="3657600" y="3840480"/>
-            <a:ext cx="3657600" cy="594360"/>
+            <a:off x="3075094" y="3960615"/>
+            <a:ext cx="3421888" cy="504613"/>
           </a:xfrm>
           <a:prstGeom prst="rect">
             <a:avLst/>
@@ -5409,6 +6004,7 @@
           <a:lstStyle/>
           <a:p>
             <a:pPr algn="ctr"/>
+            <a:endParaRPr/>
           </a:p>
         </p:txBody>
       </p:sp>
@@ -5420,8 +6016,8 @@
         </p:nvSpPr>
         <p:spPr>
           <a:xfrm>
-            <a:off x="3749040" y="3977640"/>
-            <a:ext cx="3474720" cy="594360"/>
+            <a:off x="3166534" y="4052179"/>
+            <a:ext cx="3250794" cy="292388"/>
           </a:xfrm>
           <a:prstGeom prst="rect">
             <a:avLst/>
@@ -5456,8 +6052,8 @@
         </p:nvSpPr>
         <p:spPr>
           <a:xfrm>
-            <a:off x="7315200" y="3840480"/>
-            <a:ext cx="2743200" cy="594360"/>
+            <a:off x="6732694" y="3960615"/>
+            <a:ext cx="2566416" cy="504613"/>
           </a:xfrm>
           <a:prstGeom prst="rect">
             <a:avLst/>
@@ -5490,6 +6086,7 @@
           <a:lstStyle/>
           <a:p>
             <a:pPr algn="ctr"/>
+            <a:endParaRPr/>
           </a:p>
         </p:txBody>
       </p:sp>
@@ -5501,8 +6098,8 @@
         </p:nvSpPr>
         <p:spPr>
           <a:xfrm>
-            <a:off x="7406640" y="3977640"/>
-            <a:ext cx="2560320" cy="594360"/>
+            <a:off x="6824134" y="4052179"/>
+            <a:ext cx="2395322" cy="292388"/>
           </a:xfrm>
           <a:prstGeom prst="rect">
             <a:avLst/>
@@ -5537,8 +6134,8 @@
         </p:nvSpPr>
         <p:spPr>
           <a:xfrm>
-            <a:off x="10058400" y="3840480"/>
-            <a:ext cx="2743200" cy="594360"/>
+            <a:off x="9475894" y="3960615"/>
+            <a:ext cx="2566416" cy="504613"/>
           </a:xfrm>
           <a:prstGeom prst="rect">
             <a:avLst/>
@@ -5571,6 +6168,7 @@
           <a:lstStyle/>
           <a:p>
             <a:pPr algn="ctr"/>
+            <a:endParaRPr/>
           </a:p>
         </p:txBody>
       </p:sp>
@@ -5582,8 +6180,8 @@
         </p:nvSpPr>
         <p:spPr>
           <a:xfrm>
-            <a:off x="10149840" y="3977640"/>
-            <a:ext cx="2560320" cy="594360"/>
+            <a:off x="9567334" y="4052179"/>
+            <a:ext cx="2395322" cy="292388"/>
           </a:xfrm>
           <a:prstGeom prst="rect">
             <a:avLst/>
@@ -5618,7 +6216,7 @@
         </p:nvSpPr>
         <p:spPr>
           <a:xfrm>
-            <a:off x="731520" y="4572000"/>
+            <a:off x="731520" y="5076613"/>
             <a:ext cx="10515600" cy="548640"/>
           </a:xfrm>
           <a:prstGeom prst="rect">
@@ -5641,7 +6239,24 @@
               </a:defRPr>
             </a:pPr>
             <a:r>
-              <a:t>All rasters aligned to common 500m WGS84 grid via rasterio.warp.reproject  |  4,225 valid 32x32 patches extracted</a:t>
+              <a:rPr dirty="0"/>
+              <a:t>All </a:t>
+            </a:r>
+            <a:r>
+              <a:rPr dirty="0" err="1"/>
+              <a:t>rasters</a:t>
+            </a:r>
+            <a:r>
+              <a:rPr dirty="0"/>
+              <a:t> aligned to common 500m WGS84 grid via </a:t>
+            </a:r>
+            <a:r>
+              <a:rPr dirty="0" err="1"/>
+              <a:t>rasterio.warp.reproject</a:t>
+            </a:r>
+            <a:r>
+              <a:rPr dirty="0"/>
+              <a:t>  |  4,225 valid 32x32 patches extracted</a:t>
             </a:r>
           </a:p>
         </p:txBody>
@@ -5655,7 +6270,7 @@
 </file>
 
 <file path=ppt/slides/slide4.xml><?xml version="1.0" encoding="utf-8"?>
-<p:sld xmlns:a="http://schemas.openxmlformats.org/drawingml/2006/main" xmlns:p="http://schemas.openxmlformats.org/presentationml/2006/main" xmlns:r="http://schemas.openxmlformats.org/officeDocument/2006/relationships">
+<p:sld xmlns:a="http://schemas.openxmlformats.org/drawingml/2006/main" xmlns:r="http://schemas.openxmlformats.org/officeDocument/2006/relationships" xmlns:p="http://schemas.openxmlformats.org/presentationml/2006/main">
   <p:cSld>
     <p:spTree>
       <p:nvGrpSpPr>
@@ -5663,7 +6278,14 @@
         <p:cNvGrpSpPr/>
         <p:nvPr/>
       </p:nvGrpSpPr>
-      <p:grpSpPr/>
+      <p:grpSpPr>
+        <a:xfrm>
+          <a:off x="0" y="0"/>
+          <a:ext cx="0" cy="0"/>
+          <a:chOff x="0" y="0"/>
+          <a:chExt cx="0" cy="0"/>
+        </a:xfrm>
+      </p:grpSpPr>
       <p:sp>
         <p:nvSpPr>
           <p:cNvPr id="2" name="Rectangle 1"/>
@@ -5704,6 +6326,7 @@
           <a:lstStyle/>
           <a:p>
             <a:pPr algn="ctr"/>
+            <a:endParaRPr/>
           </a:p>
         </p:txBody>
       </p:sp>
@@ -5715,7 +6338,7 @@
         </p:nvSpPr>
         <p:spPr>
           <a:xfrm>
-            <a:off x="731520" y="457200"/>
+            <a:off x="684107" y="68579"/>
             <a:ext cx="10058400" cy="731520"/>
           </a:xfrm>
           <a:prstGeom prst="rect">
@@ -5738,6 +6361,7 @@
               </a:defRPr>
             </a:pPr>
             <a:r>
+              <a:rPr dirty="0"/>
               <a:t>Model Architecture</a:t>
             </a:r>
           </a:p>
@@ -5751,8 +6375,8 @@
         </p:nvSpPr>
         <p:spPr>
           <a:xfrm>
-            <a:off x="731520" y="1097280"/>
-            <a:ext cx="1828800" cy="54864"/>
+            <a:off x="824653" y="676910"/>
+            <a:ext cx="4572000" cy="45719"/>
           </a:xfrm>
           <a:prstGeom prst="rect">
             <a:avLst/>
@@ -5783,821 +6407,41 @@
           <a:lstStyle/>
           <a:p>
             <a:pPr algn="ctr"/>
-          </a:p>
-        </p:txBody>
-      </p:sp>
-      <p:sp>
-        <p:nvSpPr>
-          <p:cNvPr id="5" name="Rounded Rectangle 4"/>
-          <p:cNvSpPr/>
-          <p:nvPr/>
-        </p:nvSpPr>
-        <p:spPr>
-          <a:xfrm>
-            <a:off x="3840480" y="1463040"/>
-            <a:ext cx="4114800" cy="640080"/>
-          </a:xfrm>
-          <a:prstGeom prst="roundRect">
-            <a:avLst/>
-          </a:prstGeom>
-          <a:solidFill>
-            <a:srgbClr val="334155"/>
-          </a:solidFill>
-          <a:ln>
-            <a:noFill/>
-          </a:ln>
-        </p:spPr>
-        <p:style>
-          <a:lnRef idx="1">
-            <a:schemeClr val="accent1"/>
-          </a:lnRef>
-          <a:fillRef idx="3">
-            <a:schemeClr val="accent1"/>
-          </a:fillRef>
-          <a:effectRef idx="2">
-            <a:schemeClr val="accent1"/>
-          </a:effectRef>
-          <a:fontRef idx="minor">
-            <a:schemeClr val="lt1"/>
-          </a:fontRef>
-        </p:style>
-        <p:txBody>
-          <a:bodyPr rtlCol="0" anchor="ctr"/>
-          <a:lstStyle/>
-          <a:p>
-            <a:pPr algn="ctr"/>
-          </a:p>
-        </p:txBody>
-      </p:sp>
-      <p:sp>
-        <p:nvSpPr>
-          <p:cNvPr id="6" name="TextBox 5"/>
-          <p:cNvSpPr txBox="1"/>
-          <p:nvPr/>
-        </p:nvSpPr>
-        <p:spPr>
-          <a:xfrm>
-            <a:off x="4023360" y="1600200"/>
-            <a:ext cx="3749040" cy="640080"/>
-          </a:xfrm>
-          <a:prstGeom prst="rect">
-            <a:avLst/>
-          </a:prstGeom>
-          <a:noFill/>
-        </p:spPr>
-        <p:txBody>
-          <a:bodyPr wrap="square">
-            <a:spAutoFit/>
-          </a:bodyPr>
-          <a:lstStyle/>
-          <a:p>
-            <a:pPr algn="ctr">
-              <a:defRPr sz="1300" b="1">
-                <a:solidFill>
-                  <a:srgbClr val="CBD5E1"/>
-                </a:solidFill>
-                <a:latin typeface="Segoe UI"/>
-              </a:defRPr>
-            </a:pPr>
-            <a:r>
-              <a:t>Input: (B, T, C, 32, 32)  C=4 channels</a:t>
-            </a:r>
-          </a:p>
-        </p:txBody>
-      </p:sp>
-      <p:sp>
-        <p:nvSpPr>
-          <p:cNvPr id="7" name="TextBox 6"/>
-          <p:cNvSpPr txBox="1"/>
-          <p:nvPr/>
-        </p:nvSpPr>
-        <p:spPr>
-          <a:xfrm>
-            <a:off x="5303520" y="2194560"/>
-            <a:ext cx="1371600" cy="365760"/>
-          </a:xfrm>
-          <a:prstGeom prst="rect">
-            <a:avLst/>
-          </a:prstGeom>
-          <a:noFill/>
-        </p:spPr>
-        <p:txBody>
-          <a:bodyPr wrap="square">
-            <a:spAutoFit/>
-          </a:bodyPr>
-          <a:lstStyle/>
-          <a:p>
-            <a:pPr algn="ctr">
-              <a:defRPr sz="2000" b="1">
-                <a:solidFill>
-                  <a:srgbClr val="94A3B8"/>
-                </a:solidFill>
-                <a:latin typeface="Segoe UI"/>
-              </a:defRPr>
-            </a:pPr>
-            <a:r>
-              <a:t>-&gt;</a:t>
-            </a:r>
-          </a:p>
-        </p:txBody>
-      </p:sp>
-      <p:sp>
-        <p:nvSpPr>
-          <p:cNvPr id="8" name="Rounded Rectangle 7"/>
-          <p:cNvSpPr/>
-          <p:nvPr/>
-        </p:nvSpPr>
-        <p:spPr>
-          <a:xfrm>
-            <a:off x="3840480" y="2560320"/>
-            <a:ext cx="4114800" cy="640080"/>
-          </a:xfrm>
-          <a:prstGeom prst="roundRect">
-            <a:avLst/>
-          </a:prstGeom>
-          <a:solidFill>
-            <a:srgbClr val="60A5FA"/>
-          </a:solidFill>
-          <a:ln>
-            <a:noFill/>
-          </a:ln>
-        </p:spPr>
-        <p:style>
-          <a:lnRef idx="1">
-            <a:schemeClr val="accent1"/>
-          </a:lnRef>
-          <a:fillRef idx="3">
-            <a:schemeClr val="accent1"/>
-          </a:fillRef>
-          <a:effectRef idx="2">
-            <a:schemeClr val="accent1"/>
-          </a:effectRef>
-          <a:fontRef idx="minor">
-            <a:schemeClr val="lt1"/>
-          </a:fontRef>
-        </p:style>
-        <p:txBody>
-          <a:bodyPr rtlCol="0" anchor="ctr"/>
-          <a:lstStyle/>
-          <a:p>
-            <a:pPr algn="ctr"/>
-          </a:p>
-        </p:txBody>
-      </p:sp>
-      <p:sp>
-        <p:nvSpPr>
-          <p:cNvPr id="9" name="TextBox 8"/>
-          <p:cNvSpPr txBox="1"/>
-          <p:nvPr/>
-        </p:nvSpPr>
-        <p:spPr>
-          <a:xfrm>
-            <a:off x="4023360" y="2697480"/>
-            <a:ext cx="3749040" cy="640080"/>
-          </a:xfrm>
-          <a:prstGeom prst="rect">
-            <a:avLst/>
-          </a:prstGeom>
-          <a:noFill/>
-        </p:spPr>
-        <p:txBody>
-          <a:bodyPr wrap="square">
-            <a:spAutoFit/>
-          </a:bodyPr>
-          <a:lstStyle/>
-          <a:p>
-            <a:pPr algn="ctr">
-              <a:defRPr sz="1400" b="1">
-                <a:solidFill>
-                  <a:srgbClr val="FFFFFF"/>
-                </a:solidFill>
-                <a:latin typeface="Segoe UI"/>
-              </a:defRPr>
-            </a:pPr>
-            <a:r>
-              <a:t>Shared ResNet-18 Encoder (ImageNet pretrained)</a:t>
-            </a:r>
-          </a:p>
-        </p:txBody>
-      </p:sp>
-      <p:sp>
-        <p:nvSpPr>
-          <p:cNvPr id="10" name="TextBox 9"/>
-          <p:cNvSpPr txBox="1"/>
-          <p:nvPr/>
-        </p:nvSpPr>
-        <p:spPr>
-          <a:xfrm>
-            <a:off x="5303520" y="3291840"/>
-            <a:ext cx="1371600" cy="365760"/>
-          </a:xfrm>
-          <a:prstGeom prst="rect">
-            <a:avLst/>
-          </a:prstGeom>
-          <a:noFill/>
-        </p:spPr>
-        <p:txBody>
-          <a:bodyPr wrap="square">
-            <a:spAutoFit/>
-          </a:bodyPr>
-          <a:lstStyle/>
-          <a:p>
-            <a:pPr algn="ctr">
-              <a:defRPr sz="2000" b="1">
-                <a:solidFill>
-                  <a:srgbClr val="94A3B8"/>
-                </a:solidFill>
-                <a:latin typeface="Segoe UI"/>
-              </a:defRPr>
-            </a:pPr>
-            <a:r>
-              <a:t>-&gt;</a:t>
-            </a:r>
-          </a:p>
-        </p:txBody>
-      </p:sp>
-      <p:sp>
-        <p:nvSpPr>
-          <p:cNvPr id="11" name="Rounded Rectangle 10"/>
-          <p:cNvSpPr/>
-          <p:nvPr/>
-        </p:nvSpPr>
-        <p:spPr>
-          <a:xfrm>
-            <a:off x="3840480" y="3657600"/>
-            <a:ext cx="4114800" cy="640080"/>
-          </a:xfrm>
-          <a:prstGeom prst="roundRect">
-            <a:avLst/>
-          </a:prstGeom>
-          <a:solidFill>
-            <a:srgbClr val="A78BFA"/>
-          </a:solidFill>
-          <a:ln>
-            <a:noFill/>
-          </a:ln>
-        </p:spPr>
-        <p:style>
-          <a:lnRef idx="1">
-            <a:schemeClr val="accent1"/>
-          </a:lnRef>
-          <a:fillRef idx="3">
-            <a:schemeClr val="accent1"/>
-          </a:fillRef>
-          <a:effectRef idx="2">
-            <a:schemeClr val="accent1"/>
-          </a:effectRef>
-          <a:fontRef idx="minor">
-            <a:schemeClr val="lt1"/>
-          </a:fontRef>
-        </p:style>
-        <p:txBody>
-          <a:bodyPr rtlCol="0" anchor="ctr"/>
-          <a:lstStyle/>
-          <a:p>
-            <a:pPr algn="ctr"/>
-          </a:p>
-        </p:txBody>
-      </p:sp>
-      <p:sp>
-        <p:nvSpPr>
-          <p:cNvPr id="12" name="TextBox 11"/>
-          <p:cNvSpPr txBox="1"/>
-          <p:nvPr/>
-        </p:nvSpPr>
-        <p:spPr>
-          <a:xfrm>
-            <a:off x="4023360" y="3794760"/>
-            <a:ext cx="3749040" cy="640080"/>
-          </a:xfrm>
-          <a:prstGeom prst="rect">
-            <a:avLst/>
-          </a:prstGeom>
-          <a:noFill/>
-        </p:spPr>
-        <p:txBody>
-          <a:bodyPr wrap="square">
-            <a:spAutoFit/>
-          </a:bodyPr>
-          <a:lstStyle/>
-          <a:p>
-            <a:pPr algn="ctr">
-              <a:defRPr sz="1300" b="1">
-                <a:solidFill>
-                  <a:srgbClr val="FFFFFF"/>
-                </a:solidFill>
-                <a:latin typeface="Segoe UI"/>
-              </a:defRPr>
-            </a:pPr>
-            <a:r>
-              <a:t>1D Temporal Conv  (512 -&gt; 128 -&gt; 128) + AdaptiveAvgPool</a:t>
-            </a:r>
-          </a:p>
-        </p:txBody>
-      </p:sp>
-      <p:sp>
-        <p:nvSpPr>
-          <p:cNvPr id="13" name="TextBox 12"/>
-          <p:cNvSpPr txBox="1"/>
-          <p:nvPr/>
-        </p:nvSpPr>
-        <p:spPr>
-          <a:xfrm>
-            <a:off x="5303520" y="4389120"/>
-            <a:ext cx="1371600" cy="365760"/>
-          </a:xfrm>
-          <a:prstGeom prst="rect">
-            <a:avLst/>
-          </a:prstGeom>
-          <a:noFill/>
-        </p:spPr>
-        <p:txBody>
-          <a:bodyPr wrap="square">
-            <a:spAutoFit/>
-          </a:bodyPr>
-          <a:lstStyle/>
-          <a:p>
-            <a:pPr algn="ctr">
-              <a:defRPr sz="2000" b="1">
-                <a:solidFill>
-                  <a:srgbClr val="94A3B8"/>
-                </a:solidFill>
-                <a:latin typeface="Segoe UI"/>
-              </a:defRPr>
-            </a:pPr>
-            <a:r>
-              <a:t>-&gt;</a:t>
-            </a:r>
-          </a:p>
-        </p:txBody>
-      </p:sp>
-      <p:sp>
-        <p:nvSpPr>
-          <p:cNvPr id="14" name="Rounded Rectangle 13"/>
-          <p:cNvSpPr/>
-          <p:nvPr/>
-        </p:nvSpPr>
-        <p:spPr>
-          <a:xfrm>
-            <a:off x="3840480" y="4754880"/>
-            <a:ext cx="4114800" cy="640080"/>
-          </a:xfrm>
-          <a:prstGeom prst="roundRect">
-            <a:avLst/>
-          </a:prstGeom>
-          <a:solidFill>
-            <a:srgbClr val="334155"/>
-          </a:solidFill>
-          <a:ln>
-            <a:noFill/>
-          </a:ln>
-        </p:spPr>
-        <p:style>
-          <a:lnRef idx="1">
-            <a:schemeClr val="accent1"/>
-          </a:lnRef>
-          <a:fillRef idx="3">
-            <a:schemeClr val="accent1"/>
-          </a:fillRef>
-          <a:effectRef idx="2">
-            <a:schemeClr val="accent1"/>
-          </a:effectRef>
-          <a:fontRef idx="minor">
-            <a:schemeClr val="lt1"/>
-          </a:fontRef>
-        </p:style>
-        <p:txBody>
-          <a:bodyPr rtlCol="0" anchor="ctr"/>
-          <a:lstStyle/>
-          <a:p>
-            <a:pPr algn="ctr"/>
-          </a:p>
-        </p:txBody>
-      </p:sp>
-      <p:sp>
-        <p:nvSpPr>
-          <p:cNvPr id="15" name="TextBox 14"/>
-          <p:cNvSpPr txBox="1"/>
-          <p:nvPr/>
-        </p:nvSpPr>
-        <p:spPr>
-          <a:xfrm>
-            <a:off x="4023360" y="4892040"/>
-            <a:ext cx="3749040" cy="640080"/>
-          </a:xfrm>
-          <a:prstGeom prst="rect">
-            <a:avLst/>
-          </a:prstGeom>
-          <a:noFill/>
-        </p:spPr>
-        <p:txBody>
-          <a:bodyPr wrap="square">
-            <a:spAutoFit/>
-          </a:bodyPr>
-          <a:lstStyle/>
-          <a:p>
-            <a:pPr algn="ctr">
-              <a:defRPr sz="1300" b="1">
-                <a:solidFill>
-                  <a:srgbClr val="CBD5E1"/>
-                </a:solidFill>
-                <a:latin typeface="Segoe UI"/>
-              </a:defRPr>
-            </a:pPr>
-            <a:r>
-              <a:t>Regression Head: Linear(128 -&gt; 1)  clamp [-2, 16]</a:t>
-            </a:r>
-          </a:p>
-        </p:txBody>
-      </p:sp>
-      <p:sp>
-        <p:nvSpPr>
-          <p:cNvPr id="16" name="TextBox 15"/>
-          <p:cNvSpPr txBox="1"/>
-          <p:nvPr/>
-        </p:nvSpPr>
-        <p:spPr>
-          <a:xfrm>
-            <a:off x="3840480" y="5577840"/>
-            <a:ext cx="4114800" cy="457200"/>
-          </a:xfrm>
-          <a:prstGeom prst="rect">
-            <a:avLst/>
-          </a:prstGeom>
-          <a:noFill/>
-        </p:spPr>
-        <p:txBody>
-          <a:bodyPr wrap="square">
-            <a:spAutoFit/>
-          </a:bodyPr>
-          <a:lstStyle/>
-          <a:p>
-            <a:pPr algn="ctr">
-              <a:defRPr sz="1500" b="1">
-                <a:solidFill>
-                  <a:srgbClr val="60A5FA"/>
-                </a:solidFill>
-                <a:latin typeface="Segoe UI"/>
-              </a:defRPr>
-            </a:pPr>
-            <a:r>
-              <a:t>Output: log1p(population per 500m patch)</a:t>
-            </a:r>
-          </a:p>
-        </p:txBody>
-      </p:sp>
-      <p:sp>
-        <p:nvSpPr>
-          <p:cNvPr id="17" name="TextBox 16"/>
-          <p:cNvSpPr txBox="1"/>
-          <p:nvPr/>
-        </p:nvSpPr>
-        <p:spPr>
-          <a:xfrm>
-            <a:off x="8686800" y="1645920"/>
-            <a:ext cx="2926080" cy="457200"/>
-          </a:xfrm>
-          <a:prstGeom prst="rect">
-            <a:avLst/>
-          </a:prstGeom>
-          <a:noFill/>
-        </p:spPr>
-        <p:txBody>
-          <a:bodyPr wrap="square">
-            <a:spAutoFit/>
-          </a:bodyPr>
-          <a:lstStyle/>
-          <a:p>
-            <a:pPr algn="l">
-              <a:defRPr sz="1600" b="1">
-                <a:solidFill>
-                  <a:srgbClr val="FFFFFF"/>
-                </a:solidFill>
-                <a:latin typeface="Segoe UI"/>
-              </a:defRPr>
-            </a:pPr>
-            <a:r>
-              <a:t>4-Channel Input:</a:t>
-            </a:r>
-          </a:p>
-        </p:txBody>
-      </p:sp>
-      <p:sp>
-        <p:nvSpPr>
-          <p:cNvPr id="18" name="Oval 17"/>
-          <p:cNvSpPr/>
-          <p:nvPr/>
-        </p:nvSpPr>
-        <p:spPr>
-          <a:xfrm>
-            <a:off x="8686800" y="2103120"/>
-            <a:ext cx="182880" cy="182880"/>
-          </a:xfrm>
-          <a:prstGeom prst="ellipse">
-            <a:avLst/>
-          </a:prstGeom>
-          <a:solidFill>
-            <a:srgbClr val="60A5FA"/>
-          </a:solidFill>
-          <a:ln>
-            <a:noFill/>
-          </a:ln>
-        </p:spPr>
-        <p:style>
-          <a:lnRef idx="1">
-            <a:schemeClr val="accent1"/>
-          </a:lnRef>
-          <a:fillRef idx="3">
-            <a:schemeClr val="accent1"/>
-          </a:fillRef>
-          <a:effectRef idx="2">
-            <a:schemeClr val="accent1"/>
-          </a:effectRef>
-          <a:fontRef idx="minor">
-            <a:schemeClr val="lt1"/>
-          </a:fontRef>
-        </p:style>
-        <p:txBody>
-          <a:bodyPr rtlCol="0" anchor="ctr"/>
-          <a:lstStyle/>
-          <a:p>
-            <a:pPr algn="ctr"/>
-          </a:p>
-        </p:txBody>
-      </p:sp>
-      <p:sp>
-        <p:nvSpPr>
-          <p:cNvPr id="19" name="TextBox 18"/>
-          <p:cNvSpPr txBox="1"/>
-          <p:nvPr/>
-        </p:nvSpPr>
-        <p:spPr>
-          <a:xfrm>
-            <a:off x="9052560" y="2057400"/>
-            <a:ext cx="2743200" cy="274320"/>
-          </a:xfrm>
-          <a:prstGeom prst="rect">
-            <a:avLst/>
-          </a:prstGeom>
-          <a:noFill/>
-        </p:spPr>
-        <p:txBody>
-          <a:bodyPr wrap="square">
-            <a:spAutoFit/>
-          </a:bodyPr>
-          <a:lstStyle/>
-          <a:p>
-            <a:pPr algn="l">
-              <a:defRPr sz="1300" b="0">
-                <a:solidFill>
-                  <a:srgbClr val="CBD5E1"/>
-                </a:solidFill>
-                <a:latin typeface="Segoe UI"/>
-              </a:defRPr>
-            </a:pPr>
-            <a:r>
-              <a:t>Ch 1: NTL (monthly)</a:t>
-            </a:r>
-          </a:p>
-        </p:txBody>
-      </p:sp>
-      <p:sp>
-        <p:nvSpPr>
-          <p:cNvPr id="20" name="Oval 19"/>
-          <p:cNvSpPr/>
-          <p:nvPr/>
-        </p:nvSpPr>
-        <p:spPr>
-          <a:xfrm>
-            <a:off x="8686800" y="2560320"/>
-            <a:ext cx="182880" cy="182880"/>
-          </a:xfrm>
-          <a:prstGeom prst="ellipse">
-            <a:avLst/>
-          </a:prstGeom>
-          <a:solidFill>
-            <a:srgbClr val="A78BFA"/>
-          </a:solidFill>
-          <a:ln>
-            <a:noFill/>
-          </a:ln>
-        </p:spPr>
-        <p:style>
-          <a:lnRef idx="1">
-            <a:schemeClr val="accent1"/>
-          </a:lnRef>
-          <a:fillRef idx="3">
-            <a:schemeClr val="accent1"/>
-          </a:fillRef>
-          <a:effectRef idx="2">
-            <a:schemeClr val="accent1"/>
-          </a:effectRef>
-          <a:fontRef idx="minor">
-            <a:schemeClr val="lt1"/>
-          </a:fontRef>
-        </p:style>
-        <p:txBody>
-          <a:bodyPr rtlCol="0" anchor="ctr"/>
-          <a:lstStyle/>
-          <a:p>
-            <a:pPr algn="ctr"/>
-          </a:p>
-        </p:txBody>
-      </p:sp>
-      <p:sp>
-        <p:nvSpPr>
-          <p:cNvPr id="21" name="TextBox 20"/>
-          <p:cNvSpPr txBox="1"/>
-          <p:nvPr/>
-        </p:nvSpPr>
-        <p:spPr>
-          <a:xfrm>
-            <a:off x="9052560" y="2514600"/>
-            <a:ext cx="2743200" cy="274320"/>
-          </a:xfrm>
-          <a:prstGeom prst="rect">
-            <a:avLst/>
-          </a:prstGeom>
-          <a:noFill/>
-        </p:spPr>
-        <p:txBody>
-          <a:bodyPr wrap="square">
-            <a:spAutoFit/>
-          </a:bodyPr>
-          <a:lstStyle/>
-          <a:p>
-            <a:pPr algn="l">
-              <a:defRPr sz="1300" b="0">
-                <a:solidFill>
-                  <a:srgbClr val="CBD5E1"/>
-                </a:solidFill>
-                <a:latin typeface="Segoe UI"/>
-              </a:defRPr>
-            </a:pPr>
-            <a:r>
-              <a:t>Ch 2: POP proxy (WorldPop)</a:t>
-            </a:r>
-          </a:p>
-        </p:txBody>
-      </p:sp>
-      <p:sp>
-        <p:nvSpPr>
-          <p:cNvPr id="22" name="Oval 21"/>
-          <p:cNvSpPr/>
-          <p:nvPr/>
-        </p:nvSpPr>
-        <p:spPr>
-          <a:xfrm>
-            <a:off x="8686800" y="3017520"/>
-            <a:ext cx="182880" cy="182880"/>
-          </a:xfrm>
-          <a:prstGeom prst="ellipse">
-            <a:avLst/>
-          </a:prstGeom>
-          <a:solidFill>
-            <a:srgbClr val="F472B6"/>
-          </a:solidFill>
-          <a:ln>
-            <a:noFill/>
-          </a:ln>
-        </p:spPr>
-        <p:style>
-          <a:lnRef idx="1">
-            <a:schemeClr val="accent1"/>
-          </a:lnRef>
-          <a:fillRef idx="3">
-            <a:schemeClr val="accent1"/>
-          </a:fillRef>
-          <a:effectRef idx="2">
-            <a:schemeClr val="accent1"/>
-          </a:effectRef>
-          <a:fontRef idx="minor">
-            <a:schemeClr val="lt1"/>
-          </a:fontRef>
-        </p:style>
-        <p:txBody>
-          <a:bodyPr rtlCol="0" anchor="ctr"/>
-          <a:lstStyle/>
-          <a:p>
-            <a:pPr algn="ctr"/>
-          </a:p>
-        </p:txBody>
-      </p:sp>
-      <p:sp>
-        <p:nvSpPr>
-          <p:cNvPr id="23" name="TextBox 22"/>
-          <p:cNvSpPr txBox="1"/>
-          <p:nvPr/>
-        </p:nvSpPr>
-        <p:spPr>
-          <a:xfrm>
-            <a:off x="9052560" y="2971800"/>
-            <a:ext cx="2743200" cy="274320"/>
-          </a:xfrm>
-          <a:prstGeom prst="rect">
-            <a:avLst/>
-          </a:prstGeom>
-          <a:noFill/>
-        </p:spPr>
-        <p:txBody>
-          <a:bodyPr wrap="square">
-            <a:spAutoFit/>
-          </a:bodyPr>
-          <a:lstStyle/>
-          <a:p>
-            <a:pPr algn="l">
-              <a:defRPr sz="1300" b="0">
-                <a:solidFill>
-                  <a:srgbClr val="CBD5E1"/>
-                </a:solidFill>
-                <a:latin typeface="Segoe UI"/>
-              </a:defRPr>
-            </a:pPr>
-            <a:r>
-              <a:t>Ch 3: GHSL Built-Up Surface</a:t>
-            </a:r>
-          </a:p>
-        </p:txBody>
-      </p:sp>
-      <p:sp>
-        <p:nvSpPr>
-          <p:cNvPr id="24" name="Oval 23"/>
-          <p:cNvSpPr/>
-          <p:nvPr/>
-        </p:nvSpPr>
-        <p:spPr>
-          <a:xfrm>
-            <a:off x="8686800" y="3474720"/>
-            <a:ext cx="182880" cy="182880"/>
-          </a:xfrm>
-          <a:prstGeom prst="ellipse">
-            <a:avLst/>
-          </a:prstGeom>
-          <a:solidFill>
-            <a:srgbClr val="34D399"/>
-          </a:solidFill>
-          <a:ln>
-            <a:noFill/>
-          </a:ln>
-        </p:spPr>
-        <p:style>
-          <a:lnRef idx="1">
-            <a:schemeClr val="accent1"/>
-          </a:lnRef>
-          <a:fillRef idx="3">
-            <a:schemeClr val="accent1"/>
-          </a:fillRef>
-          <a:effectRef idx="2">
-            <a:schemeClr val="accent1"/>
-          </a:effectRef>
-          <a:fontRef idx="minor">
-            <a:schemeClr val="lt1"/>
-          </a:fontRef>
-        </p:style>
-        <p:txBody>
-          <a:bodyPr rtlCol="0" anchor="ctr"/>
-          <a:lstStyle/>
-          <a:p>
-            <a:pPr algn="ctr"/>
-          </a:p>
-        </p:txBody>
-      </p:sp>
-      <p:sp>
-        <p:nvSpPr>
-          <p:cNvPr id="25" name="TextBox 24"/>
-          <p:cNvSpPr txBox="1"/>
-          <p:nvPr/>
-        </p:nvSpPr>
-        <p:spPr>
-          <a:xfrm>
-            <a:off x="9052560" y="3429000"/>
-            <a:ext cx="2743200" cy="274320"/>
-          </a:xfrm>
-          <a:prstGeom prst="rect">
-            <a:avLst/>
-          </a:prstGeom>
-          <a:noFill/>
-        </p:spPr>
-        <p:txBody>
-          <a:bodyPr wrap="square">
-            <a:spAutoFit/>
-          </a:bodyPr>
-          <a:lstStyle/>
-          <a:p>
-            <a:pPr algn="l">
-              <a:defRPr sz="1300" b="0">
-                <a:solidFill>
-                  <a:srgbClr val="CBD5E1"/>
-                </a:solidFill>
-                <a:latin typeface="Segoe UI"/>
-              </a:defRPr>
-            </a:pPr>
-            <a:r>
-              <a:t>Ch 4: GHSL Built-Up Volume</a:t>
-            </a:r>
-          </a:p>
-        </p:txBody>
-      </p:sp>
+            <a:endParaRPr/>
+          </a:p>
+        </p:txBody>
+      </p:sp>
+      <p:pic>
+        <p:nvPicPr>
+          <p:cNvPr id="28" name="Picture 27">
+            <a:extLst>
+              <a:ext uri="{FF2B5EF4-FFF2-40B4-BE49-F238E27FC236}">
+                <a16:creationId xmlns:a16="http://schemas.microsoft.com/office/drawing/2014/main" id="{75C3A656-A435-889D-2A39-B5B2FF1912A7}"/>
+              </a:ext>
+            </a:extLst>
+          </p:cNvPr>
+          <p:cNvPicPr>
+            <a:picLocks noChangeAspect="1"/>
+          </p:cNvPicPr>
+          <p:nvPr/>
+        </p:nvPicPr>
+        <p:blipFill>
+          <a:blip r:embed="rId2"/>
+          <a:srcRect t="5185" b="49685"/>
+          <a:stretch>
+            <a:fillRect/>
+          </a:stretch>
+        </p:blipFill>
+        <p:spPr>
+          <a:xfrm>
+            <a:off x="1153740" y="780765"/>
+            <a:ext cx="9868155" cy="5845758"/>
+          </a:xfrm>
+          <a:prstGeom prst="rect">
+            <a:avLst/>
+          </a:prstGeom>
+        </p:spPr>
+      </p:pic>
     </p:spTree>
   </p:cSld>
   <p:clrMapOvr>
@@ -6607,7 +6451,7 @@
 </file>
 
 <file path=ppt/slides/slide5.xml><?xml version="1.0" encoding="utf-8"?>
-<p:sld xmlns:a="http://schemas.openxmlformats.org/drawingml/2006/main" xmlns:p="http://schemas.openxmlformats.org/presentationml/2006/main" xmlns:r="http://schemas.openxmlformats.org/officeDocument/2006/relationships">
+<p:sld xmlns:a="http://schemas.openxmlformats.org/drawingml/2006/main" xmlns:r="http://schemas.openxmlformats.org/officeDocument/2006/relationships" xmlns:p="http://schemas.openxmlformats.org/presentationml/2006/main">
   <p:cSld>
     <p:spTree>
       <p:nvGrpSpPr>
@@ -6615,10 +6459,23 @@
         <p:cNvGrpSpPr/>
         <p:nvPr/>
       </p:nvGrpSpPr>
-      <p:grpSpPr/>
-      <p:sp>
-        <p:nvSpPr>
-          <p:cNvPr id="2" name="Rectangle 1"/>
+      <p:grpSpPr>
+        <a:xfrm>
+          <a:off x="0" y="0"/>
+          <a:ext cx="0" cy="0"/>
+          <a:chOff x="0" y="0"/>
+          <a:chExt cx="0" cy="0"/>
+        </a:xfrm>
+      </p:grpSpPr>
+      <p:sp>
+        <p:nvSpPr>
+          <p:cNvPr id="2" name="Rectangle 1">
+            <a:extLst>
+              <a:ext uri="{FF2B5EF4-FFF2-40B4-BE49-F238E27FC236}">
+                <a16:creationId xmlns:a16="http://schemas.microsoft.com/office/drawing/2014/main" id="{0517D618-3755-AE43-A498-9049B78914B5}"/>
+              </a:ext>
+            </a:extLst>
+          </p:cNvPr>
           <p:cNvSpPr/>
           <p:nvPr/>
         </p:nvSpPr>
@@ -6656,18 +6513,56 @@
           <a:lstStyle/>
           <a:p>
             <a:pPr algn="ctr"/>
-          </a:p>
-        </p:txBody>
-      </p:sp>
-      <p:sp>
-        <p:nvSpPr>
-          <p:cNvPr id="3" name="TextBox 2"/>
+            <a:endParaRPr/>
+          </a:p>
+        </p:txBody>
+      </p:sp>
+      <p:pic>
+        <p:nvPicPr>
+          <p:cNvPr id="3" name="Picture 2">
+            <a:extLst>
+              <a:ext uri="{FF2B5EF4-FFF2-40B4-BE49-F238E27FC236}">
+                <a16:creationId xmlns:a16="http://schemas.microsoft.com/office/drawing/2014/main" id="{274900A2-5171-7132-3DC9-3AE3979EA9A5}"/>
+              </a:ext>
+            </a:extLst>
+          </p:cNvPr>
+          <p:cNvPicPr>
+            <a:picLocks noChangeAspect="1"/>
+          </p:cNvPicPr>
+          <p:nvPr/>
+        </p:nvPicPr>
+        <p:blipFill>
+          <a:blip r:embed="rId2"/>
+          <a:srcRect t="52794" b="8200"/>
+          <a:stretch>
+            <a:fillRect/>
+          </a:stretch>
+        </p:blipFill>
+        <p:spPr>
+          <a:xfrm>
+            <a:off x="920536" y="938097"/>
+            <a:ext cx="10633473" cy="5444291"/>
+          </a:xfrm>
+          <a:prstGeom prst="rect">
+            <a:avLst/>
+          </a:prstGeom>
+        </p:spPr>
+      </p:pic>
+      <p:sp>
+        <p:nvSpPr>
+          <p:cNvPr id="4" name="TextBox 3">
+            <a:extLst>
+              <a:ext uri="{FF2B5EF4-FFF2-40B4-BE49-F238E27FC236}">
+                <a16:creationId xmlns:a16="http://schemas.microsoft.com/office/drawing/2014/main" id="{FF7444F8-A53D-7A04-162D-6CF4DC64DF89}"/>
+              </a:ext>
+            </a:extLst>
+          </p:cNvPr>
           <p:cNvSpPr txBox="1"/>
           <p:nvPr/>
         </p:nvSpPr>
         <p:spPr>
           <a:xfrm>
-            <a:off x="731520" y="457200"/>
+            <a:off x="684107" y="68579"/>
             <a:ext cx="10058400" cy="731520"/>
           </a:xfrm>
           <a:prstGeom prst="rect">
@@ -6682,7 +6577,7 @@
           <a:lstStyle/>
           <a:p>
             <a:pPr algn="l">
-              <a:defRPr sz="3600" b="1">
+              <a:defRPr sz="3800" b="1">
                 <a:solidFill>
                   <a:srgbClr val="FFFFFF"/>
                 </a:solidFill>
@@ -6690,21 +6585,28 @@
               </a:defRPr>
             </a:pPr>
             <a:r>
-              <a:t>Ablation Study: What Makes the Difference?</a:t>
-            </a:r>
-          </a:p>
-        </p:txBody>
-      </p:sp>
-      <p:sp>
-        <p:nvSpPr>
-          <p:cNvPr id="4" name="Rectangle 3"/>
+              <a:rPr dirty="0"/>
+              <a:t>Model Architecture</a:t>
+            </a:r>
+          </a:p>
+        </p:txBody>
+      </p:sp>
+      <p:sp>
+        <p:nvSpPr>
+          <p:cNvPr id="5" name="Rectangle 4">
+            <a:extLst>
+              <a:ext uri="{FF2B5EF4-FFF2-40B4-BE49-F238E27FC236}">
+                <a16:creationId xmlns:a16="http://schemas.microsoft.com/office/drawing/2014/main" id="{1D7C0C50-57A0-72A0-83B0-CF19291D356A}"/>
+              </a:ext>
+            </a:extLst>
+          </p:cNvPr>
           <p:cNvSpPr/>
           <p:nvPr/>
         </p:nvSpPr>
         <p:spPr>
           <a:xfrm>
-            <a:off x="731520" y="1051560"/>
-            <a:ext cx="2286000" cy="54864"/>
+            <a:off x="824653" y="676910"/>
+            <a:ext cx="4572000" cy="45719"/>
           </a:xfrm>
           <a:prstGeom prst="rect">
             <a:avLst/>
@@ -6735,19 +6637,131 @@
           <a:lstStyle/>
           <a:p>
             <a:pPr algn="ctr"/>
-          </a:p>
-        </p:txBody>
-      </p:sp>
-      <p:sp>
-        <p:nvSpPr>
-          <p:cNvPr id="5" name="Rectangle 4"/>
+            <a:endParaRPr/>
+          </a:p>
+        </p:txBody>
+      </p:sp>
+    </p:spTree>
+    <p:extLst>
+      <p:ext uri="{BB962C8B-B14F-4D97-AF65-F5344CB8AC3E}">
+        <p14:creationId xmlns:p14="http://schemas.microsoft.com/office/powerpoint/2010/main" val="82576130"/>
+      </p:ext>
+    </p:extLst>
+  </p:cSld>
+  <p:clrMapOvr>
+    <a:masterClrMapping/>
+  </p:clrMapOvr>
+</p:sld>
+</file>
+
+<file path=ppt/slides/slide6.xml><?xml version="1.0" encoding="utf-8"?>
+<p:sld xmlns:a="http://schemas.openxmlformats.org/drawingml/2006/main" xmlns:r="http://schemas.openxmlformats.org/officeDocument/2006/relationships" xmlns:p="http://schemas.openxmlformats.org/presentationml/2006/main">
+  <p:cSld>
+    <p:spTree>
+      <p:nvGrpSpPr>
+        <p:cNvPr id="1" name=""/>
+        <p:cNvGrpSpPr/>
+        <p:nvPr/>
+      </p:nvGrpSpPr>
+      <p:grpSpPr>
+        <a:xfrm>
+          <a:off x="0" y="0"/>
+          <a:ext cx="0" cy="0"/>
+          <a:chOff x="0" y="0"/>
+          <a:chExt cx="0" cy="0"/>
+        </a:xfrm>
+      </p:grpSpPr>
+      <p:sp>
+        <p:nvSpPr>
+          <p:cNvPr id="2" name="Rectangle 1"/>
           <p:cNvSpPr/>
           <p:nvPr/>
         </p:nvSpPr>
         <p:spPr>
           <a:xfrm>
-            <a:off x="548640" y="1371600"/>
-            <a:ext cx="3474720" cy="502920"/>
+            <a:off x="0" y="0"/>
+            <a:ext cx="12191695" cy="6858000"/>
+          </a:xfrm>
+          <a:prstGeom prst="rect">
+            <a:avLst/>
+          </a:prstGeom>
+          <a:solidFill>
+            <a:srgbClr val="0F172A"/>
+          </a:solidFill>
+          <a:ln>
+            <a:noFill/>
+          </a:ln>
+        </p:spPr>
+        <p:style>
+          <a:lnRef idx="1">
+            <a:schemeClr val="accent1"/>
+          </a:lnRef>
+          <a:fillRef idx="3">
+            <a:schemeClr val="accent1"/>
+          </a:fillRef>
+          <a:effectRef idx="2">
+            <a:schemeClr val="accent1"/>
+          </a:effectRef>
+          <a:fontRef idx="minor">
+            <a:schemeClr val="lt1"/>
+          </a:fontRef>
+        </p:style>
+        <p:txBody>
+          <a:bodyPr rtlCol="0" anchor="ctr"/>
+          <a:lstStyle/>
+          <a:p>
+            <a:pPr algn="ctr"/>
+            <a:endParaRPr/>
+          </a:p>
+        </p:txBody>
+      </p:sp>
+      <p:sp>
+        <p:nvSpPr>
+          <p:cNvPr id="3" name="TextBox 2"/>
+          <p:cNvSpPr txBox="1"/>
+          <p:nvPr/>
+        </p:nvSpPr>
+        <p:spPr>
+          <a:xfrm>
+            <a:off x="731520" y="457200"/>
+            <a:ext cx="10058400" cy="731520"/>
+          </a:xfrm>
+          <a:prstGeom prst="rect">
+            <a:avLst/>
+          </a:prstGeom>
+          <a:noFill/>
+        </p:spPr>
+        <p:txBody>
+          <a:bodyPr wrap="square">
+            <a:spAutoFit/>
+          </a:bodyPr>
+          <a:lstStyle/>
+          <a:p>
+            <a:pPr algn="l">
+              <a:defRPr sz="3600" b="1">
+                <a:solidFill>
+                  <a:srgbClr val="FFFFFF"/>
+                </a:solidFill>
+                <a:latin typeface="Segoe UI"/>
+              </a:defRPr>
+            </a:pPr>
+            <a:r>
+              <a:rPr dirty="0"/>
+              <a:t>Ablation Study: What Makes the Difference?</a:t>
+            </a:r>
+          </a:p>
+        </p:txBody>
+      </p:sp>
+      <p:sp>
+        <p:nvSpPr>
+          <p:cNvPr id="4" name="Rectangle 3"/>
+          <p:cNvSpPr/>
+          <p:nvPr/>
+        </p:nvSpPr>
+        <p:spPr>
+          <a:xfrm>
+            <a:off x="731519" y="1051560"/>
+            <a:ext cx="9750213" cy="45719"/>
           </a:xfrm>
           <a:prstGeom prst="rect">
             <a:avLst/>
@@ -6778,55 +6792,20 @@
           <a:lstStyle/>
           <a:p>
             <a:pPr algn="ctr"/>
-          </a:p>
-        </p:txBody>
-      </p:sp>
-      <p:sp>
-        <p:nvSpPr>
-          <p:cNvPr id="6" name="TextBox 5"/>
-          <p:cNvSpPr txBox="1"/>
-          <p:nvPr/>
-        </p:nvSpPr>
-        <p:spPr>
-          <a:xfrm>
-            <a:off x="594360" y="1481328"/>
-            <a:ext cx="3383280" cy="502920"/>
-          </a:xfrm>
-          <a:prstGeom prst="rect">
-            <a:avLst/>
-          </a:prstGeom>
-          <a:noFill/>
-        </p:spPr>
-        <p:txBody>
-          <a:bodyPr wrap="square">
-            <a:spAutoFit/>
-          </a:bodyPr>
-          <a:lstStyle/>
-          <a:p>
-            <a:pPr algn="ctr">
-              <a:defRPr sz="1200" b="1">
-                <a:solidFill>
-                  <a:srgbClr val="FFFFFF"/>
-                </a:solidFill>
-                <a:latin typeface="Segoe UI"/>
-              </a:defRPr>
-            </a:pPr>
-            <a:r>
-              <a:t>Experiment</a:t>
-            </a:r>
-          </a:p>
-        </p:txBody>
-      </p:sp>
-      <p:sp>
-        <p:nvSpPr>
-          <p:cNvPr id="7" name="Rectangle 6"/>
+            <a:endParaRPr/>
+          </a:p>
+        </p:txBody>
+      </p:sp>
+      <p:sp>
+        <p:nvSpPr>
+          <p:cNvPr id="5" name="Rectangle 4"/>
           <p:cNvSpPr/>
           <p:nvPr/>
         </p:nvSpPr>
         <p:spPr>
           <a:xfrm>
-            <a:off x="4023360" y="1371600"/>
-            <a:ext cx="1645920" cy="502920"/>
+            <a:off x="1058004" y="1316736"/>
+            <a:ext cx="3474720" cy="502920"/>
           </a:xfrm>
           <a:prstGeom prst="rect">
             <a:avLst/>
@@ -6857,19 +6836,20 @@
           <a:lstStyle/>
           <a:p>
             <a:pPr algn="ctr"/>
-          </a:p>
-        </p:txBody>
-      </p:sp>
-      <p:sp>
-        <p:nvSpPr>
-          <p:cNvPr id="8" name="TextBox 7"/>
+            <a:endParaRPr/>
+          </a:p>
+        </p:txBody>
+      </p:sp>
+      <p:sp>
+        <p:nvSpPr>
+          <p:cNvPr id="6" name="TextBox 5"/>
           <p:cNvSpPr txBox="1"/>
           <p:nvPr/>
         </p:nvSpPr>
         <p:spPr>
           <a:xfrm>
-            <a:off x="4069080" y="1481328"/>
-            <a:ext cx="1554480" cy="502920"/>
+            <a:off x="1103724" y="1426464"/>
+            <a:ext cx="3383280" cy="502920"/>
           </a:xfrm>
           <a:prstGeom prst="rect">
             <a:avLst/>
@@ -6891,21 +6871,22 @@
               </a:defRPr>
             </a:pPr>
             <a:r>
-              <a:t>Channels</a:t>
-            </a:r>
-          </a:p>
-        </p:txBody>
-      </p:sp>
-      <p:sp>
-        <p:nvSpPr>
-          <p:cNvPr id="9" name="Rectangle 8"/>
+              <a:rPr dirty="0"/>
+              <a:t>Experiment</a:t>
+            </a:r>
+          </a:p>
+        </p:txBody>
+      </p:sp>
+      <p:sp>
+        <p:nvSpPr>
+          <p:cNvPr id="7" name="Rectangle 6"/>
           <p:cNvSpPr/>
           <p:nvPr/>
         </p:nvSpPr>
         <p:spPr>
           <a:xfrm>
-            <a:off x="5669280" y="1371600"/>
-            <a:ext cx="1280160" cy="502920"/>
+            <a:off x="4532724" y="1316736"/>
+            <a:ext cx="1645920" cy="502920"/>
           </a:xfrm>
           <a:prstGeom prst="rect">
             <a:avLst/>
@@ -6936,19 +6917,20 @@
           <a:lstStyle/>
           <a:p>
             <a:pPr algn="ctr"/>
-          </a:p>
-        </p:txBody>
-      </p:sp>
-      <p:sp>
-        <p:nvSpPr>
-          <p:cNvPr id="10" name="TextBox 9"/>
+            <a:endParaRPr/>
+          </a:p>
+        </p:txBody>
+      </p:sp>
+      <p:sp>
+        <p:nvSpPr>
+          <p:cNvPr id="8" name="TextBox 7"/>
           <p:cNvSpPr txBox="1"/>
           <p:nvPr/>
         </p:nvSpPr>
         <p:spPr>
           <a:xfrm>
-            <a:off x="5715000" y="1481328"/>
-            <a:ext cx="1188720" cy="502920"/>
+            <a:off x="4578444" y="1426464"/>
+            <a:ext cx="1554480" cy="502920"/>
           </a:xfrm>
           <a:prstGeom prst="rect">
             <a:avLst/>
@@ -6970,21 +6952,22 @@
               </a:defRPr>
             </a:pPr>
             <a:r>
-              <a:t>Pretrained</a:t>
-            </a:r>
-          </a:p>
-        </p:txBody>
-      </p:sp>
-      <p:sp>
-        <p:nvSpPr>
-          <p:cNvPr id="11" name="Rectangle 10"/>
+              <a:rPr dirty="0"/>
+              <a:t>Channels</a:t>
+            </a:r>
+          </a:p>
+        </p:txBody>
+      </p:sp>
+      <p:sp>
+        <p:nvSpPr>
+          <p:cNvPr id="9" name="Rectangle 8"/>
           <p:cNvSpPr/>
           <p:nvPr/>
         </p:nvSpPr>
         <p:spPr>
           <a:xfrm>
-            <a:off x="6949440" y="1371600"/>
-            <a:ext cx="1097280" cy="502920"/>
+            <a:off x="6178644" y="1316736"/>
+            <a:ext cx="1280160" cy="502920"/>
           </a:xfrm>
           <a:prstGeom prst="rect">
             <a:avLst/>
@@ -7015,19 +6998,20 @@
           <a:lstStyle/>
           <a:p>
             <a:pPr algn="ctr"/>
-          </a:p>
-        </p:txBody>
-      </p:sp>
-      <p:sp>
-        <p:nvSpPr>
-          <p:cNvPr id="12" name="TextBox 11"/>
+            <a:endParaRPr/>
+          </a:p>
+        </p:txBody>
+      </p:sp>
+      <p:sp>
+        <p:nvSpPr>
+          <p:cNvPr id="10" name="TextBox 9"/>
           <p:cNvSpPr txBox="1"/>
           <p:nvPr/>
         </p:nvSpPr>
         <p:spPr>
           <a:xfrm>
-            <a:off x="6995160" y="1481328"/>
-            <a:ext cx="1005840" cy="502920"/>
+            <a:off x="6224364" y="1426464"/>
+            <a:ext cx="1188720" cy="502920"/>
           </a:xfrm>
           <a:prstGeom prst="rect">
             <a:avLst/>
@@ -7049,21 +7033,22 @@
               </a:defRPr>
             </a:pPr>
             <a:r>
-              <a:t>Loss</a:t>
-            </a:r>
-          </a:p>
-        </p:txBody>
-      </p:sp>
-      <p:sp>
-        <p:nvSpPr>
-          <p:cNvPr id="13" name="Rectangle 12"/>
+              <a:rPr dirty="0"/>
+              <a:t>Pretrained</a:t>
+            </a:r>
+          </a:p>
+        </p:txBody>
+      </p:sp>
+      <p:sp>
+        <p:nvSpPr>
+          <p:cNvPr id="11" name="Rectangle 10"/>
           <p:cNvSpPr/>
           <p:nvPr/>
         </p:nvSpPr>
         <p:spPr>
           <a:xfrm>
-            <a:off x="8046720" y="1371600"/>
-            <a:ext cx="914400" cy="502920"/>
+            <a:off x="7458804" y="1316736"/>
+            <a:ext cx="1097280" cy="502920"/>
           </a:xfrm>
           <a:prstGeom prst="rect">
             <a:avLst/>
@@ -7094,19 +7079,20 @@
           <a:lstStyle/>
           <a:p>
             <a:pPr algn="ctr"/>
-          </a:p>
-        </p:txBody>
-      </p:sp>
-      <p:sp>
-        <p:nvSpPr>
-          <p:cNvPr id="14" name="TextBox 13"/>
+            <a:endParaRPr/>
+          </a:p>
+        </p:txBody>
+      </p:sp>
+      <p:sp>
+        <p:nvSpPr>
+          <p:cNvPr id="12" name="TextBox 11"/>
           <p:cNvSpPr txBox="1"/>
           <p:nvPr/>
         </p:nvSpPr>
         <p:spPr>
           <a:xfrm>
-            <a:off x="8092440" y="1481328"/>
-            <a:ext cx="822960" cy="502920"/>
+            <a:off x="7504524" y="1426464"/>
+            <a:ext cx="1005840" cy="502920"/>
           </a:xfrm>
           <a:prstGeom prst="rect">
             <a:avLst/>
@@ -7128,21 +7114,22 @@
               </a:defRPr>
             </a:pPr>
             <a:r>
-              <a:t>R</a:t>
-            </a:r>
-          </a:p>
-        </p:txBody>
-      </p:sp>
-      <p:sp>
-        <p:nvSpPr>
-          <p:cNvPr id="15" name="Rectangle 14"/>
+              <a:rPr dirty="0"/>
+              <a:t>Loss</a:t>
+            </a:r>
+          </a:p>
+        </p:txBody>
+      </p:sp>
+      <p:sp>
+        <p:nvSpPr>
+          <p:cNvPr id="13" name="Rectangle 12"/>
           <p:cNvSpPr/>
           <p:nvPr/>
         </p:nvSpPr>
         <p:spPr>
           <a:xfrm>
-            <a:off x="8961120" y="1371600"/>
-            <a:ext cx="1645920" cy="502920"/>
+            <a:off x="8556084" y="1316736"/>
+            <a:ext cx="914400" cy="502920"/>
           </a:xfrm>
           <a:prstGeom prst="rect">
             <a:avLst/>
@@ -7173,19 +7160,20 @@
           <a:lstStyle/>
           <a:p>
             <a:pPr algn="ctr"/>
-          </a:p>
-        </p:txBody>
-      </p:sp>
-      <p:sp>
-        <p:nvSpPr>
-          <p:cNvPr id="16" name="TextBox 15"/>
+            <a:endParaRPr/>
+          </a:p>
+        </p:txBody>
+      </p:sp>
+      <p:sp>
+        <p:nvSpPr>
+          <p:cNvPr id="14" name="TextBox 13"/>
           <p:cNvSpPr txBox="1"/>
           <p:nvPr/>
         </p:nvSpPr>
         <p:spPr>
           <a:xfrm>
-            <a:off x="9006840" y="1481328"/>
-            <a:ext cx="1554480" cy="502920"/>
+            <a:off x="8601804" y="1426464"/>
+            <a:ext cx="822960" cy="502920"/>
           </a:xfrm>
           <a:prstGeom prst="rect">
             <a:avLst/>
@@ -7207,6 +7195,86 @@
               </a:defRPr>
             </a:pPr>
             <a:r>
+              <a:t>R</a:t>
+            </a:r>
+          </a:p>
+        </p:txBody>
+      </p:sp>
+      <p:sp>
+        <p:nvSpPr>
+          <p:cNvPr id="15" name="Rectangle 14"/>
+          <p:cNvSpPr/>
+          <p:nvPr/>
+        </p:nvSpPr>
+        <p:spPr>
+          <a:xfrm>
+            <a:off x="9470484" y="1316736"/>
+            <a:ext cx="1645920" cy="502920"/>
+          </a:xfrm>
+          <a:prstGeom prst="rect">
+            <a:avLst/>
+          </a:prstGeom>
+          <a:solidFill>
+            <a:srgbClr val="60A5FA"/>
+          </a:solidFill>
+          <a:ln>
+            <a:noFill/>
+          </a:ln>
+        </p:spPr>
+        <p:style>
+          <a:lnRef idx="1">
+            <a:schemeClr val="accent1"/>
+          </a:lnRef>
+          <a:fillRef idx="3">
+            <a:schemeClr val="accent1"/>
+          </a:fillRef>
+          <a:effectRef idx="2">
+            <a:schemeClr val="accent1"/>
+          </a:effectRef>
+          <a:fontRef idx="minor">
+            <a:schemeClr val="lt1"/>
+          </a:fontRef>
+        </p:style>
+        <p:txBody>
+          <a:bodyPr rtlCol="0" anchor="ctr"/>
+          <a:lstStyle/>
+          <a:p>
+            <a:pPr algn="ctr"/>
+            <a:endParaRPr/>
+          </a:p>
+        </p:txBody>
+      </p:sp>
+      <p:sp>
+        <p:nvSpPr>
+          <p:cNvPr id="16" name="TextBox 15"/>
+          <p:cNvSpPr txBox="1"/>
+          <p:nvPr/>
+        </p:nvSpPr>
+        <p:spPr>
+          <a:xfrm>
+            <a:off x="9516204" y="1426464"/>
+            <a:ext cx="1554480" cy="502920"/>
+          </a:xfrm>
+          <a:prstGeom prst="rect">
+            <a:avLst/>
+          </a:prstGeom>
+          <a:noFill/>
+        </p:spPr>
+        <p:txBody>
+          <a:bodyPr wrap="square">
+            <a:spAutoFit/>
+          </a:bodyPr>
+          <a:lstStyle/>
+          <a:p>
+            <a:pPr algn="ctr">
+              <a:defRPr sz="1200" b="1">
+                <a:solidFill>
+                  <a:srgbClr val="FFFFFF"/>
+                </a:solidFill>
+                <a:latin typeface="Segoe UI"/>
+              </a:defRPr>
+            </a:pPr>
+            <a:r>
               <a:t>Urban Core Bias</a:t>
             </a:r>
           </a:p>
@@ -7220,7 +7288,7 @@
         </p:nvSpPr>
         <p:spPr>
           <a:xfrm>
-            <a:off x="548640" y="1874520"/>
+            <a:off x="1058004" y="1819656"/>
             <a:ext cx="3474720" cy="502920"/>
           </a:xfrm>
           <a:prstGeom prst="rect">
@@ -7254,6 +7322,7 @@
           <a:lstStyle/>
           <a:p>
             <a:pPr algn="ctr"/>
+            <a:endParaRPr/>
           </a:p>
         </p:txBody>
       </p:sp>
@@ -7265,8 +7334,8 @@
         </p:nvSpPr>
         <p:spPr>
           <a:xfrm>
-            <a:off x="594360" y="1984248"/>
-            <a:ext cx="1554480" cy="502920"/>
+            <a:off x="1103724" y="1929384"/>
+            <a:ext cx="3337560" cy="276999"/>
           </a:xfrm>
           <a:prstGeom prst="rect">
             <a:avLst/>
@@ -7288,6 +7357,7 @@
               </a:defRPr>
             </a:pPr>
             <a:r>
+              <a:rPr dirty="0"/>
               <a:t>baseline</a:t>
             </a:r>
           </a:p>
@@ -7301,7 +7371,7 @@
         </p:nvSpPr>
         <p:spPr>
           <a:xfrm>
-            <a:off x="4023360" y="1874520"/>
+            <a:off x="4532724" y="1819656"/>
             <a:ext cx="1645920" cy="502920"/>
           </a:xfrm>
           <a:prstGeom prst="rect">
@@ -7335,6 +7405,7 @@
           <a:lstStyle/>
           <a:p>
             <a:pPr algn="ctr"/>
+            <a:endParaRPr/>
           </a:p>
         </p:txBody>
       </p:sp>
@@ -7346,7 +7417,7 @@
         </p:nvSpPr>
         <p:spPr>
           <a:xfrm>
-            <a:off x="4069080" y="1984248"/>
+            <a:off x="4578444" y="1929384"/>
             <a:ext cx="1554480" cy="502920"/>
           </a:xfrm>
           <a:prstGeom prst="rect">
@@ -7369,6 +7440,7 @@
               </a:defRPr>
             </a:pPr>
             <a:r>
+              <a:rPr dirty="0"/>
               <a:t>2</a:t>
             </a:r>
           </a:p>
@@ -7382,7 +7454,7 @@
         </p:nvSpPr>
         <p:spPr>
           <a:xfrm>
-            <a:off x="5669280" y="1874520"/>
+            <a:off x="6178644" y="1819656"/>
             <a:ext cx="1280160" cy="502920"/>
           </a:xfrm>
           <a:prstGeom prst="rect">
@@ -7416,6 +7488,7 @@
           <a:lstStyle/>
           <a:p>
             <a:pPr algn="ctr"/>
+            <a:endParaRPr/>
           </a:p>
         </p:txBody>
       </p:sp>
@@ -7427,8 +7500,8 @@
         </p:nvSpPr>
         <p:spPr>
           <a:xfrm>
-            <a:off x="5715000" y="1984248"/>
-            <a:ext cx="1554480" cy="502920"/>
+            <a:off x="6224364" y="1929384"/>
+            <a:ext cx="1188720" cy="276999"/>
           </a:xfrm>
           <a:prstGeom prst="rect">
             <a:avLst/>
@@ -7450,6 +7523,7 @@
               </a:defRPr>
             </a:pPr>
             <a:r>
+              <a:rPr dirty="0"/>
               <a:t>No</a:t>
             </a:r>
           </a:p>
@@ -7463,7 +7537,7 @@
         </p:nvSpPr>
         <p:spPr>
           <a:xfrm>
-            <a:off x="6949440" y="1874520"/>
+            <a:off x="7458804" y="1819656"/>
             <a:ext cx="1097280" cy="502920"/>
           </a:xfrm>
           <a:prstGeom prst="rect">
@@ -7497,6 +7571,7 @@
           <a:lstStyle/>
           <a:p>
             <a:pPr algn="ctr"/>
+            <a:endParaRPr/>
           </a:p>
         </p:txBody>
       </p:sp>
@@ -7508,8 +7583,8 @@
         </p:nvSpPr>
         <p:spPr>
           <a:xfrm>
-            <a:off x="6995160" y="1984248"/>
-            <a:ext cx="1554480" cy="502920"/>
+            <a:off x="7504524" y="1929384"/>
+            <a:ext cx="1005840" cy="276999"/>
           </a:xfrm>
           <a:prstGeom prst="rect">
             <a:avLst/>
@@ -7531,6 +7606,7 @@
               </a:defRPr>
             </a:pPr>
             <a:r>
+              <a:rPr dirty="0"/>
               <a:t>MSE</a:t>
             </a:r>
           </a:p>
@@ -7544,7 +7620,7 @@
         </p:nvSpPr>
         <p:spPr>
           <a:xfrm>
-            <a:off x="8046720" y="1874520"/>
+            <a:off x="8556084" y="1819656"/>
             <a:ext cx="914400" cy="502920"/>
           </a:xfrm>
           <a:prstGeom prst="rect">
@@ -7578,6 +7654,7 @@
           <a:lstStyle/>
           <a:p>
             <a:pPr algn="ctr"/>
+            <a:endParaRPr/>
           </a:p>
         </p:txBody>
       </p:sp>
@@ -7589,8 +7666,8 @@
         </p:nvSpPr>
         <p:spPr>
           <a:xfrm>
-            <a:off x="8092440" y="1984248"/>
-            <a:ext cx="1554480" cy="502920"/>
+            <a:off x="8601804" y="1929384"/>
+            <a:ext cx="822960" cy="276999"/>
           </a:xfrm>
           <a:prstGeom prst="rect">
             <a:avLst/>
@@ -7612,6 +7689,7 @@
               </a:defRPr>
             </a:pPr>
             <a:r>
+              <a:rPr dirty="0"/>
               <a:t>0.642</a:t>
             </a:r>
           </a:p>
@@ -7625,7 +7703,7 @@
         </p:nvSpPr>
         <p:spPr>
           <a:xfrm>
-            <a:off x="8961120" y="1874520"/>
+            <a:off x="9470484" y="1819656"/>
             <a:ext cx="1645920" cy="502920"/>
           </a:xfrm>
           <a:prstGeom prst="rect">
@@ -7659,6 +7737,7 @@
           <a:lstStyle/>
           <a:p>
             <a:pPr algn="ctr"/>
+            <a:endParaRPr/>
           </a:p>
         </p:txBody>
       </p:sp>
@@ -7670,7 +7749,7 @@
         </p:nvSpPr>
         <p:spPr>
           <a:xfrm>
-            <a:off x="9006840" y="1984248"/>
+            <a:off x="9516204" y="1929384"/>
             <a:ext cx="1554480" cy="502920"/>
           </a:xfrm>
           <a:prstGeom prst="rect">
@@ -7706,7 +7785,7 @@
         </p:nvSpPr>
         <p:spPr>
           <a:xfrm>
-            <a:off x="548640" y="2377440"/>
+            <a:off x="1058004" y="2322576"/>
             <a:ext cx="3474720" cy="502920"/>
           </a:xfrm>
           <a:prstGeom prst="rect">
@@ -7740,6 +7819,7 @@
           <a:lstStyle/>
           <a:p>
             <a:pPr algn="ctr"/>
+            <a:endParaRPr/>
           </a:p>
         </p:txBody>
       </p:sp>
@@ -7751,8 +7831,8 @@
         </p:nvSpPr>
         <p:spPr>
           <a:xfrm>
-            <a:off x="594360" y="2487168"/>
-            <a:ext cx="1554480" cy="502920"/>
+            <a:off x="1103724" y="2432304"/>
+            <a:ext cx="3383280" cy="276999"/>
           </a:xfrm>
           <a:prstGeom prst="rect">
             <a:avLst/>
@@ -7774,8 +7854,10 @@
               </a:defRPr>
             </a:pPr>
             <a:r>
+              <a:rPr dirty="0" err="1"/>
               <a:t>pretrained_huber</a:t>
             </a:r>
+            <a:endParaRPr dirty="0"/>
           </a:p>
         </p:txBody>
       </p:sp>
@@ -7787,7 +7869,7 @@
         </p:nvSpPr>
         <p:spPr>
           <a:xfrm>
-            <a:off x="4023360" y="2377440"/>
+            <a:off x="4532724" y="2322576"/>
             <a:ext cx="1645920" cy="502920"/>
           </a:xfrm>
           <a:prstGeom prst="rect">
@@ -7821,6 +7903,7 @@
           <a:lstStyle/>
           <a:p>
             <a:pPr algn="ctr"/>
+            <a:endParaRPr/>
           </a:p>
         </p:txBody>
       </p:sp>
@@ -7832,7 +7915,7 @@
         </p:nvSpPr>
         <p:spPr>
           <a:xfrm>
-            <a:off x="4069080" y="2487168"/>
+            <a:off x="4578444" y="2432304"/>
             <a:ext cx="1554480" cy="502920"/>
           </a:xfrm>
           <a:prstGeom prst="rect">
@@ -7868,7 +7951,7 @@
         </p:nvSpPr>
         <p:spPr>
           <a:xfrm>
-            <a:off x="5669280" y="2377440"/>
+            <a:off x="6178644" y="2322576"/>
             <a:ext cx="1280160" cy="502920"/>
           </a:xfrm>
           <a:prstGeom prst="rect">
@@ -7902,6 +7985,7 @@
           <a:lstStyle/>
           <a:p>
             <a:pPr algn="ctr"/>
+            <a:endParaRPr/>
           </a:p>
         </p:txBody>
       </p:sp>
@@ -7913,8 +7997,8 @@
         </p:nvSpPr>
         <p:spPr>
           <a:xfrm>
-            <a:off x="5715000" y="2487168"/>
-            <a:ext cx="1554480" cy="502920"/>
+            <a:off x="6224364" y="2432304"/>
+            <a:ext cx="1188720" cy="276999"/>
           </a:xfrm>
           <a:prstGeom prst="rect">
             <a:avLst/>
@@ -7949,7 +8033,7 @@
         </p:nvSpPr>
         <p:spPr>
           <a:xfrm>
-            <a:off x="6949440" y="2377440"/>
+            <a:off x="7458804" y="2322576"/>
             <a:ext cx="1097280" cy="502920"/>
           </a:xfrm>
           <a:prstGeom prst="rect">
@@ -7983,6 +8067,7 @@
           <a:lstStyle/>
           <a:p>
             <a:pPr algn="ctr"/>
+            <a:endParaRPr/>
           </a:p>
         </p:txBody>
       </p:sp>
@@ -7994,8 +8079,8 @@
         </p:nvSpPr>
         <p:spPr>
           <a:xfrm>
-            <a:off x="6995160" y="2487168"/>
-            <a:ext cx="1554480" cy="502920"/>
+            <a:off x="7504524" y="2432304"/>
+            <a:ext cx="1005840" cy="276999"/>
           </a:xfrm>
           <a:prstGeom prst="rect">
             <a:avLst/>
@@ -8017,6 +8102,7 @@
               </a:defRPr>
             </a:pPr>
             <a:r>
+              <a:rPr dirty="0"/>
               <a:t>Huber</a:t>
             </a:r>
           </a:p>
@@ -8030,7 +8116,7 @@
         </p:nvSpPr>
         <p:spPr>
           <a:xfrm>
-            <a:off x="8046720" y="2377440"/>
+            <a:off x="8556084" y="2322576"/>
             <a:ext cx="914400" cy="502920"/>
           </a:xfrm>
           <a:prstGeom prst="rect">
@@ -8064,6 +8150,7 @@
           <a:lstStyle/>
           <a:p>
             <a:pPr algn="ctr"/>
+            <a:endParaRPr/>
           </a:p>
         </p:txBody>
       </p:sp>
@@ -8075,8 +8162,8 @@
         </p:nvSpPr>
         <p:spPr>
           <a:xfrm>
-            <a:off x="8092440" y="2487168"/>
-            <a:ext cx="1554480" cy="502920"/>
+            <a:off x="8601804" y="2432304"/>
+            <a:ext cx="822960" cy="276999"/>
           </a:xfrm>
           <a:prstGeom prst="rect">
             <a:avLst/>
@@ -8098,6 +8185,7 @@
               </a:defRPr>
             </a:pPr>
             <a:r>
+              <a:rPr dirty="0"/>
               <a:t>0.767</a:t>
             </a:r>
           </a:p>
@@ -8111,7 +8199,7 @@
         </p:nvSpPr>
         <p:spPr>
           <a:xfrm>
-            <a:off x="8961120" y="2377440"/>
+            <a:off x="9470484" y="2322576"/>
             <a:ext cx="1645920" cy="502920"/>
           </a:xfrm>
           <a:prstGeom prst="rect">
@@ -8145,6 +8233,7 @@
           <a:lstStyle/>
           <a:p>
             <a:pPr algn="ctr"/>
+            <a:endParaRPr/>
           </a:p>
         </p:txBody>
       </p:sp>
@@ -8156,7 +8245,7 @@
         </p:nvSpPr>
         <p:spPr>
           <a:xfrm>
-            <a:off x="9006840" y="2487168"/>
+            <a:off x="9516204" y="2432304"/>
             <a:ext cx="1554480" cy="502920"/>
           </a:xfrm>
           <a:prstGeom prst="rect">
@@ -8192,7 +8281,7 @@
         </p:nvSpPr>
         <p:spPr>
           <a:xfrm>
-            <a:off x="548640" y="2880360"/>
+            <a:off x="1058004" y="2825496"/>
             <a:ext cx="3474720" cy="502920"/>
           </a:xfrm>
           <a:prstGeom prst="rect">
@@ -8226,6 +8315,7 @@
           <a:lstStyle/>
           <a:p>
             <a:pPr algn="ctr"/>
+            <a:endParaRPr/>
           </a:p>
         </p:txBody>
       </p:sp>
@@ -8237,8 +8327,8 @@
         </p:nvSpPr>
         <p:spPr>
           <a:xfrm>
-            <a:off x="594360" y="2990088"/>
-            <a:ext cx="1554480" cy="502920"/>
+            <a:off x="1103724" y="2935224"/>
+            <a:ext cx="3337560" cy="276999"/>
           </a:xfrm>
           <a:prstGeom prst="rect">
             <a:avLst/>
@@ -8260,8 +8350,10 @@
               </a:defRPr>
             </a:pPr>
             <a:r>
+              <a:rPr dirty="0" err="1"/>
               <a:t>pretrained_ghsl_channel_huber</a:t>
             </a:r>
+            <a:endParaRPr dirty="0"/>
           </a:p>
         </p:txBody>
       </p:sp>
@@ -8273,7 +8365,7 @@
         </p:nvSpPr>
         <p:spPr>
           <a:xfrm>
-            <a:off x="4023360" y="2880360"/>
+            <a:off x="4532724" y="2825496"/>
             <a:ext cx="1645920" cy="502920"/>
           </a:xfrm>
           <a:prstGeom prst="rect">
@@ -8307,6 +8399,7 @@
           <a:lstStyle/>
           <a:p>
             <a:pPr algn="ctr"/>
+            <a:endParaRPr/>
           </a:p>
         </p:txBody>
       </p:sp>
@@ -8318,7 +8411,7 @@
         </p:nvSpPr>
         <p:spPr>
           <a:xfrm>
-            <a:off x="4069080" y="2990088"/>
+            <a:off x="4578444" y="2935224"/>
             <a:ext cx="1554480" cy="502920"/>
           </a:xfrm>
           <a:prstGeom prst="rect">
@@ -8354,7 +8447,7 @@
         </p:nvSpPr>
         <p:spPr>
           <a:xfrm>
-            <a:off x="5669280" y="2880360"/>
+            <a:off x="6178644" y="2825496"/>
             <a:ext cx="1280160" cy="502920"/>
           </a:xfrm>
           <a:prstGeom prst="rect">
@@ -8388,6 +8481,7 @@
           <a:lstStyle/>
           <a:p>
             <a:pPr algn="ctr"/>
+            <a:endParaRPr/>
           </a:p>
         </p:txBody>
       </p:sp>
@@ -8399,8 +8493,8 @@
         </p:nvSpPr>
         <p:spPr>
           <a:xfrm>
-            <a:off x="5715000" y="2990088"/>
-            <a:ext cx="1554480" cy="502920"/>
+            <a:off x="6224364" y="2935224"/>
+            <a:ext cx="1188720" cy="276999"/>
           </a:xfrm>
           <a:prstGeom prst="rect">
             <a:avLst/>
@@ -8435,7 +8529,7 @@
         </p:nvSpPr>
         <p:spPr>
           <a:xfrm>
-            <a:off x="6949440" y="2880360"/>
+            <a:off x="7458804" y="2825496"/>
             <a:ext cx="1097280" cy="502920"/>
           </a:xfrm>
           <a:prstGeom prst="rect">
@@ -8469,6 +8563,7 @@
           <a:lstStyle/>
           <a:p>
             <a:pPr algn="ctr"/>
+            <a:endParaRPr/>
           </a:p>
         </p:txBody>
       </p:sp>
@@ -8480,8 +8575,8 @@
         </p:nvSpPr>
         <p:spPr>
           <a:xfrm>
-            <a:off x="6995160" y="2990088"/>
-            <a:ext cx="1554480" cy="502920"/>
+            <a:off x="7504524" y="2935224"/>
+            <a:ext cx="1005840" cy="276999"/>
           </a:xfrm>
           <a:prstGeom prst="rect">
             <a:avLst/>
@@ -8516,7 +8611,7 @@
         </p:nvSpPr>
         <p:spPr>
           <a:xfrm>
-            <a:off x="8046720" y="2880360"/>
+            <a:off x="8556084" y="2825496"/>
             <a:ext cx="914400" cy="502920"/>
           </a:xfrm>
           <a:prstGeom prst="rect">
@@ -8550,6 +8645,7 @@
           <a:lstStyle/>
           <a:p>
             <a:pPr algn="ctr"/>
+            <a:endParaRPr/>
           </a:p>
         </p:txBody>
       </p:sp>
@@ -8561,8 +8657,8 @@
         </p:nvSpPr>
         <p:spPr>
           <a:xfrm>
-            <a:off x="8092440" y="2990088"/>
-            <a:ext cx="1554480" cy="502920"/>
+            <a:off x="8601804" y="2935224"/>
+            <a:ext cx="822960" cy="276999"/>
           </a:xfrm>
           <a:prstGeom prst="rect">
             <a:avLst/>
@@ -8584,6 +8680,7 @@
               </a:defRPr>
             </a:pPr>
             <a:r>
+              <a:rPr dirty="0"/>
               <a:t>0.875</a:t>
             </a:r>
           </a:p>
@@ -8597,7 +8694,7 @@
         </p:nvSpPr>
         <p:spPr>
           <a:xfrm>
-            <a:off x="8961120" y="2880360"/>
+            <a:off x="9470484" y="2825496"/>
             <a:ext cx="1645920" cy="502920"/>
           </a:xfrm>
           <a:prstGeom prst="rect">
@@ -8631,6 +8728,7 @@
           <a:lstStyle/>
           <a:p>
             <a:pPr algn="ctr"/>
+            <a:endParaRPr/>
           </a:p>
         </p:txBody>
       </p:sp>
@@ -8642,7 +8740,7 @@
         </p:nvSpPr>
         <p:spPr>
           <a:xfrm>
-            <a:off x="9006840" y="2990088"/>
+            <a:off x="9516204" y="2935224"/>
             <a:ext cx="1554480" cy="502920"/>
           </a:xfrm>
           <a:prstGeom prst="rect">
@@ -8665,6 +8763,7 @@
               </a:defRPr>
             </a:pPr>
             <a:r>
+              <a:rPr dirty="0"/>
               <a:t>-56.8</a:t>
             </a:r>
           </a:p>
@@ -8678,7 +8777,7 @@
         </p:nvSpPr>
         <p:spPr>
           <a:xfrm>
-            <a:off x="548640" y="3383280"/>
+            <a:off x="1058004" y="3328416"/>
             <a:ext cx="3474720" cy="502920"/>
           </a:xfrm>
           <a:prstGeom prst="rect">
@@ -8712,6 +8811,7 @@
           <a:lstStyle/>
           <a:p>
             <a:pPr algn="ctr"/>
+            <a:endParaRPr/>
           </a:p>
         </p:txBody>
       </p:sp>
@@ -8723,8 +8823,8 @@
         </p:nvSpPr>
         <p:spPr>
           <a:xfrm>
-            <a:off x="594360" y="3493008"/>
-            <a:ext cx="1554480" cy="502920"/>
+            <a:off x="1103724" y="3438144"/>
+            <a:ext cx="3383280" cy="276999"/>
           </a:xfrm>
           <a:prstGeom prst="rect">
             <a:avLst/>
@@ -8746,8 +8846,10 @@
               </a:defRPr>
             </a:pPr>
             <a:r>
+              <a:rPr dirty="0" err="1"/>
               <a:t>pretrained_ghsl_vol_channel_huber</a:t>
             </a:r>
+            <a:endParaRPr dirty="0"/>
           </a:p>
         </p:txBody>
       </p:sp>
@@ -8759,7 +8861,7 @@
         </p:nvSpPr>
         <p:spPr>
           <a:xfrm>
-            <a:off x="4023360" y="3383280"/>
+            <a:off x="4532724" y="3328416"/>
             <a:ext cx="1645920" cy="502920"/>
           </a:xfrm>
           <a:prstGeom prst="rect">
@@ -8793,6 +8895,7 @@
           <a:lstStyle/>
           <a:p>
             <a:pPr algn="ctr"/>
+            <a:endParaRPr/>
           </a:p>
         </p:txBody>
       </p:sp>
@@ -8804,7 +8907,7 @@
         </p:nvSpPr>
         <p:spPr>
           <a:xfrm>
-            <a:off x="4069080" y="3493008"/>
+            <a:off x="4578444" y="3438144"/>
             <a:ext cx="1554480" cy="502920"/>
           </a:xfrm>
           <a:prstGeom prst="rect">
@@ -8840,7 +8943,7 @@
         </p:nvSpPr>
         <p:spPr>
           <a:xfrm>
-            <a:off x="5669280" y="3383280"/>
+            <a:off x="6178644" y="3328416"/>
             <a:ext cx="1280160" cy="502920"/>
           </a:xfrm>
           <a:prstGeom prst="rect">
@@ -8874,6 +8977,7 @@
           <a:lstStyle/>
           <a:p>
             <a:pPr algn="ctr"/>
+            <a:endParaRPr/>
           </a:p>
         </p:txBody>
       </p:sp>
@@ -8885,8 +8989,8 @@
         </p:nvSpPr>
         <p:spPr>
           <a:xfrm>
-            <a:off x="5715000" y="3493008"/>
-            <a:ext cx="1554480" cy="502920"/>
+            <a:off x="6224364" y="3438144"/>
+            <a:ext cx="1188720" cy="276999"/>
           </a:xfrm>
           <a:prstGeom prst="rect">
             <a:avLst/>
@@ -8921,7 +9025,7 @@
         </p:nvSpPr>
         <p:spPr>
           <a:xfrm>
-            <a:off x="6949440" y="3383280"/>
+            <a:off x="7458804" y="3328416"/>
             <a:ext cx="1097280" cy="502920"/>
           </a:xfrm>
           <a:prstGeom prst="rect">
@@ -8955,6 +9059,7 @@
           <a:lstStyle/>
           <a:p>
             <a:pPr algn="ctr"/>
+            <a:endParaRPr/>
           </a:p>
         </p:txBody>
       </p:sp>
@@ -8966,8 +9071,8 @@
         </p:nvSpPr>
         <p:spPr>
           <a:xfrm>
-            <a:off x="6995160" y="3493008"/>
-            <a:ext cx="1554480" cy="502920"/>
+            <a:off x="7504524" y="3438144"/>
+            <a:ext cx="1005840" cy="276999"/>
           </a:xfrm>
           <a:prstGeom prst="rect">
             <a:avLst/>
@@ -9002,7 +9107,7 @@
         </p:nvSpPr>
         <p:spPr>
           <a:xfrm>
-            <a:off x="8046720" y="3383280"/>
+            <a:off x="8556084" y="3328416"/>
             <a:ext cx="914400" cy="502920"/>
           </a:xfrm>
           <a:prstGeom prst="rect">
@@ -9036,6 +9141,7 @@
           <a:lstStyle/>
           <a:p>
             <a:pPr algn="ctr"/>
+            <a:endParaRPr/>
           </a:p>
         </p:txBody>
       </p:sp>
@@ -9047,8 +9153,8 @@
         </p:nvSpPr>
         <p:spPr>
           <a:xfrm>
-            <a:off x="8092440" y="3493008"/>
-            <a:ext cx="1554480" cy="502920"/>
+            <a:off x="8601804" y="3438144"/>
+            <a:ext cx="822960" cy="276999"/>
           </a:xfrm>
           <a:prstGeom prst="rect">
             <a:avLst/>
@@ -9070,6 +9176,7 @@
               </a:defRPr>
             </a:pPr>
             <a:r>
+              <a:rPr dirty="0"/>
               <a:t>0.612</a:t>
             </a:r>
           </a:p>
@@ -9083,7 +9190,7 @@
         </p:nvSpPr>
         <p:spPr>
           <a:xfrm>
-            <a:off x="8961120" y="3383280"/>
+            <a:off x="9470484" y="3328416"/>
             <a:ext cx="1645920" cy="502920"/>
           </a:xfrm>
           <a:prstGeom prst="rect">
@@ -9117,6 +9224,7 @@
           <a:lstStyle/>
           <a:p>
             <a:pPr algn="ctr"/>
+            <a:endParaRPr/>
           </a:p>
         </p:txBody>
       </p:sp>
@@ -9128,7 +9236,7 @@
         </p:nvSpPr>
         <p:spPr>
           <a:xfrm>
-            <a:off x="9006840" y="3493008"/>
+            <a:off x="9516204" y="3438144"/>
             <a:ext cx="1554480" cy="502920"/>
           </a:xfrm>
           <a:prstGeom prst="rect">
@@ -9164,7 +9272,7 @@
         </p:nvSpPr>
         <p:spPr>
           <a:xfrm>
-            <a:off x="548640" y="3886200"/>
+            <a:off x="1058004" y="3831336"/>
             <a:ext cx="3474720" cy="502920"/>
           </a:xfrm>
           <a:prstGeom prst="rect">
@@ -9198,6 +9306,7 @@
           <a:lstStyle/>
           <a:p>
             <a:pPr algn="ctr"/>
+            <a:endParaRPr/>
           </a:p>
         </p:txBody>
       </p:sp>
@@ -9209,8 +9318,8 @@
         </p:nvSpPr>
         <p:spPr>
           <a:xfrm>
-            <a:off x="594360" y="3995928"/>
-            <a:ext cx="1554480" cy="502920"/>
+            <a:off x="1103724" y="3941064"/>
+            <a:ext cx="3337560" cy="276999"/>
           </a:xfrm>
           <a:prstGeom prst="rect">
             <a:avLst/>
@@ -9232,8 +9341,10 @@
               </a:defRPr>
             </a:pPr>
             <a:r>
+              <a:rPr dirty="0" err="1"/>
               <a:t>pretrained_ghsl_surface_vol_channel_huber</a:t>
             </a:r>
+            <a:endParaRPr dirty="0"/>
           </a:p>
         </p:txBody>
       </p:sp>
@@ -9245,7 +9356,7 @@
         </p:nvSpPr>
         <p:spPr>
           <a:xfrm>
-            <a:off x="4023360" y="3886200"/>
+            <a:off x="4532724" y="3831336"/>
             <a:ext cx="1645920" cy="502920"/>
           </a:xfrm>
           <a:prstGeom prst="rect">
@@ -9279,6 +9390,7 @@
           <a:lstStyle/>
           <a:p>
             <a:pPr algn="ctr"/>
+            <a:endParaRPr/>
           </a:p>
         </p:txBody>
       </p:sp>
@@ -9290,7 +9402,7 @@
         </p:nvSpPr>
         <p:spPr>
           <a:xfrm>
-            <a:off x="4069080" y="3995928"/>
+            <a:off x="4578444" y="3941064"/>
             <a:ext cx="1554480" cy="502920"/>
           </a:xfrm>
           <a:prstGeom prst="rect">
@@ -9326,7 +9438,7 @@
         </p:nvSpPr>
         <p:spPr>
           <a:xfrm>
-            <a:off x="5669280" y="3886200"/>
+            <a:off x="6178644" y="3831336"/>
             <a:ext cx="1280160" cy="502920"/>
           </a:xfrm>
           <a:prstGeom prst="rect">
@@ -9360,6 +9472,7 @@
           <a:lstStyle/>
           <a:p>
             <a:pPr algn="ctr"/>
+            <a:endParaRPr/>
           </a:p>
         </p:txBody>
       </p:sp>
@@ -9371,8 +9484,8 @@
         </p:nvSpPr>
         <p:spPr>
           <a:xfrm>
-            <a:off x="5715000" y="3995928"/>
-            <a:ext cx="1554480" cy="502920"/>
+            <a:off x="6224364" y="3941064"/>
+            <a:ext cx="1188720" cy="276999"/>
           </a:xfrm>
           <a:prstGeom prst="rect">
             <a:avLst/>
@@ -9407,7 +9520,7 @@
         </p:nvSpPr>
         <p:spPr>
           <a:xfrm>
-            <a:off x="6949440" y="3886200"/>
+            <a:off x="7458804" y="3831336"/>
             <a:ext cx="1097280" cy="502920"/>
           </a:xfrm>
           <a:prstGeom prst="rect">
@@ -9441,6 +9554,7 @@
           <a:lstStyle/>
           <a:p>
             <a:pPr algn="ctr"/>
+            <a:endParaRPr/>
           </a:p>
         </p:txBody>
       </p:sp>
@@ -9452,8 +9566,8 @@
         </p:nvSpPr>
         <p:spPr>
           <a:xfrm>
-            <a:off x="6995160" y="3995928"/>
-            <a:ext cx="1554480" cy="502920"/>
+            <a:off x="7504524" y="3941064"/>
+            <a:ext cx="1005840" cy="276999"/>
           </a:xfrm>
           <a:prstGeom prst="rect">
             <a:avLst/>
@@ -9488,7 +9602,7 @@
         </p:nvSpPr>
         <p:spPr>
           <a:xfrm>
-            <a:off x="8046720" y="3886200"/>
+            <a:off x="8556084" y="3831336"/>
             <a:ext cx="914400" cy="502920"/>
           </a:xfrm>
           <a:prstGeom prst="rect">
@@ -9522,6 +9636,7 @@
           <a:lstStyle/>
           <a:p>
             <a:pPr algn="ctr"/>
+            <a:endParaRPr/>
           </a:p>
         </p:txBody>
       </p:sp>
@@ -9533,8 +9648,8 @@
         </p:nvSpPr>
         <p:spPr>
           <a:xfrm>
-            <a:off x="8092440" y="3995928"/>
-            <a:ext cx="1554480" cy="502920"/>
+            <a:off x="8601804" y="3941064"/>
+            <a:ext cx="868680" cy="276999"/>
           </a:xfrm>
           <a:prstGeom prst="rect">
             <a:avLst/>
@@ -9556,6 +9671,7 @@
               </a:defRPr>
             </a:pPr>
             <a:r>
+              <a:rPr dirty="0"/>
               <a:t>0.881</a:t>
             </a:r>
           </a:p>
@@ -9569,7 +9685,7 @@
         </p:nvSpPr>
         <p:spPr>
           <a:xfrm>
-            <a:off x="8961120" y="3886200"/>
+            <a:off x="9470484" y="3831336"/>
             <a:ext cx="1645920" cy="502920"/>
           </a:xfrm>
           <a:prstGeom prst="rect">
@@ -9603,6 +9719,7 @@
           <a:lstStyle/>
           <a:p>
             <a:pPr algn="ctr"/>
+            <a:endParaRPr/>
           </a:p>
         </p:txBody>
       </p:sp>
@@ -9614,7 +9731,7 @@
         </p:nvSpPr>
         <p:spPr>
           <a:xfrm>
-            <a:off x="9006840" y="3995928"/>
+            <a:off x="9516204" y="3941064"/>
             <a:ext cx="1554480" cy="502920"/>
           </a:xfrm>
           <a:prstGeom prst="rect">
@@ -9674,794 +9791,6 @@
             </a:pPr>
             <a:r>
               <a:t>Key Insight: Building Volume ALONE hurts (R=0.612) because tall rural structures misclassify as urban. But Surface + Volume together creates synergy — volume provides 3D context that breaks NTL saturation.</a:t>
-            </a:r>
-          </a:p>
-        </p:txBody>
-      </p:sp>
-    </p:spTree>
-  </p:cSld>
-  <p:clrMapOvr>
-    <a:masterClrMapping/>
-  </p:clrMapOvr>
-</p:sld>
-</file>
-
-<file path=ppt/slides/slide6.xml><?xml version="1.0" encoding="utf-8"?>
-<p:sld xmlns:a="http://schemas.openxmlformats.org/drawingml/2006/main" xmlns:p="http://schemas.openxmlformats.org/presentationml/2006/main" xmlns:r="http://schemas.openxmlformats.org/officeDocument/2006/relationships">
-  <p:cSld>
-    <p:spTree>
-      <p:nvGrpSpPr>
-        <p:cNvPr id="1" name=""/>
-        <p:cNvGrpSpPr/>
-        <p:nvPr/>
-      </p:nvGrpSpPr>
-      <p:grpSpPr/>
-      <p:sp>
-        <p:nvSpPr>
-          <p:cNvPr id="2" name="Rectangle 1"/>
-          <p:cNvSpPr/>
-          <p:nvPr/>
-        </p:nvSpPr>
-        <p:spPr>
-          <a:xfrm>
-            <a:off x="0" y="0"/>
-            <a:ext cx="12191695" cy="6858000"/>
-          </a:xfrm>
-          <a:prstGeom prst="rect">
-            <a:avLst/>
-          </a:prstGeom>
-          <a:solidFill>
-            <a:srgbClr val="0F172A"/>
-          </a:solidFill>
-          <a:ln>
-            <a:noFill/>
-          </a:ln>
-        </p:spPr>
-        <p:style>
-          <a:lnRef idx="1">
-            <a:schemeClr val="accent1"/>
-          </a:lnRef>
-          <a:fillRef idx="3">
-            <a:schemeClr val="accent1"/>
-          </a:fillRef>
-          <a:effectRef idx="2">
-            <a:schemeClr val="accent1"/>
-          </a:effectRef>
-          <a:fontRef idx="minor">
-            <a:schemeClr val="lt1"/>
-          </a:fontRef>
-        </p:style>
-        <p:txBody>
-          <a:bodyPr rtlCol="0" anchor="ctr"/>
-          <a:lstStyle/>
-          <a:p>
-            <a:pPr algn="ctr"/>
-          </a:p>
-        </p:txBody>
-      </p:sp>
-      <p:sp>
-        <p:nvSpPr>
-          <p:cNvPr id="3" name="TextBox 2"/>
-          <p:cNvSpPr txBox="1"/>
-          <p:nvPr/>
-        </p:nvSpPr>
-        <p:spPr>
-          <a:xfrm>
-            <a:off x="731520" y="457200"/>
-            <a:ext cx="10058400" cy="731520"/>
-          </a:xfrm>
-          <a:prstGeom prst="rect">
-            <a:avLst/>
-          </a:prstGeom>
-          <a:noFill/>
-        </p:spPr>
-        <p:txBody>
-          <a:bodyPr wrap="square">
-            <a:spAutoFit/>
-          </a:bodyPr>
-          <a:lstStyle/>
-          <a:p>
-            <a:pPr algn="l">
-              <a:defRPr sz="3200" b="1">
-                <a:solidFill>
-                  <a:srgbClr val="FFFFFF"/>
-                </a:solidFill>
-                <a:latin typeface="Segoe UI"/>
-              </a:defRPr>
-            </a:pPr>
-            <a:r>
-              <a:t>Best Model: pretrained_ghsl_surface_vol_channel_huber</a:t>
-            </a:r>
-          </a:p>
-        </p:txBody>
-      </p:sp>
-      <p:sp>
-        <p:nvSpPr>
-          <p:cNvPr id="4" name="Rectangle 3"/>
-          <p:cNvSpPr/>
-          <p:nvPr/>
-        </p:nvSpPr>
-        <p:spPr>
-          <a:xfrm>
-            <a:off x="731520" y="1005840"/>
-            <a:ext cx="1828800" cy="54864"/>
-          </a:xfrm>
-          <a:prstGeom prst="rect">
-            <a:avLst/>
-          </a:prstGeom>
-          <a:solidFill>
-            <a:srgbClr val="60A5FA"/>
-          </a:solidFill>
-          <a:ln>
-            <a:noFill/>
-          </a:ln>
-        </p:spPr>
-        <p:style>
-          <a:lnRef idx="1">
-            <a:schemeClr val="accent1"/>
-          </a:lnRef>
-          <a:fillRef idx="3">
-            <a:schemeClr val="accent1"/>
-          </a:fillRef>
-          <a:effectRef idx="2">
-            <a:schemeClr val="accent1"/>
-          </a:effectRef>
-          <a:fontRef idx="minor">
-            <a:schemeClr val="lt1"/>
-          </a:fontRef>
-        </p:style>
-        <p:txBody>
-          <a:bodyPr rtlCol="0" anchor="ctr"/>
-          <a:lstStyle/>
-          <a:p>
-            <a:pPr algn="ctr"/>
-          </a:p>
-        </p:txBody>
-      </p:sp>
-      <p:sp>
-        <p:nvSpPr>
-          <p:cNvPr id="5" name="Rounded Rectangle 4"/>
-          <p:cNvSpPr/>
-          <p:nvPr/>
-        </p:nvSpPr>
-        <p:spPr>
-          <a:xfrm>
-            <a:off x="731520" y="1371600"/>
-            <a:ext cx="5029200" cy="1280160"/>
-          </a:xfrm>
-          <a:prstGeom prst="roundRect">
-            <a:avLst/>
-          </a:prstGeom>
-          <a:solidFill>
-            <a:srgbClr val="1E293B"/>
-          </a:solidFill>
-          <a:ln w="12700">
-            <a:solidFill>
-              <a:srgbClr val="334155"/>
-            </a:solidFill>
-          </a:ln>
-        </p:spPr>
-        <p:style>
-          <a:lnRef idx="1">
-            <a:schemeClr val="accent1"/>
-          </a:lnRef>
-          <a:fillRef idx="3">
-            <a:schemeClr val="accent1"/>
-          </a:fillRef>
-          <a:effectRef idx="2">
-            <a:schemeClr val="accent1"/>
-          </a:effectRef>
-          <a:fontRef idx="minor">
-            <a:schemeClr val="lt1"/>
-          </a:fontRef>
-        </p:style>
-        <p:txBody>
-          <a:bodyPr rtlCol="0" anchor="ctr"/>
-          <a:lstStyle/>
-          <a:p>
-            <a:pPr algn="ctr"/>
-          </a:p>
-        </p:txBody>
-      </p:sp>
-      <p:sp>
-        <p:nvSpPr>
-          <p:cNvPr id="6" name="TextBox 5"/>
-          <p:cNvSpPr txBox="1"/>
-          <p:nvPr/>
-        </p:nvSpPr>
-        <p:spPr>
-          <a:xfrm>
-            <a:off x="1005840" y="1508760"/>
-            <a:ext cx="4480560" cy="457200"/>
-          </a:xfrm>
-          <a:prstGeom prst="rect">
-            <a:avLst/>
-          </a:prstGeom>
-          <a:noFill/>
-        </p:spPr>
-        <p:txBody>
-          <a:bodyPr wrap="square">
-            <a:spAutoFit/>
-          </a:bodyPr>
-          <a:lstStyle/>
-          <a:p>
-            <a:pPr algn="l">
-              <a:defRPr sz="3600" b="1">
-                <a:solidFill>
-                  <a:srgbClr val="60A5FA"/>
-                </a:solidFill>
-                <a:latin typeface="Segoe UI"/>
-              </a:defRPr>
-            </a:pPr>
-            <a:r>
-              <a:t>0.881</a:t>
-            </a:r>
-          </a:p>
-        </p:txBody>
-      </p:sp>
-      <p:sp>
-        <p:nvSpPr>
-          <p:cNvPr id="7" name="TextBox 6"/>
-          <p:cNvSpPr txBox="1"/>
-          <p:nvPr/>
-        </p:nvSpPr>
-        <p:spPr>
-          <a:xfrm>
-            <a:off x="1005840" y="2011680"/>
-            <a:ext cx="4480560" cy="274320"/>
-          </a:xfrm>
-          <a:prstGeom prst="rect">
-            <a:avLst/>
-          </a:prstGeom>
-          <a:noFill/>
-        </p:spPr>
-        <p:txBody>
-          <a:bodyPr wrap="square">
-            <a:spAutoFit/>
-          </a:bodyPr>
-          <a:lstStyle/>
-          <a:p>
-            <a:pPr algn="l">
-              <a:defRPr sz="1600" b="1">
-                <a:solidFill>
-                  <a:srgbClr val="FFFFFF"/>
-                </a:solidFill>
-                <a:latin typeface="Segoe UI"/>
-              </a:defRPr>
-            </a:pPr>
-            <a:r>
-              <a:t>Overall R</a:t>
-            </a:r>
-          </a:p>
-        </p:txBody>
-      </p:sp>
-      <p:sp>
-        <p:nvSpPr>
-          <p:cNvPr id="8" name="TextBox 7"/>
-          <p:cNvSpPr txBox="1"/>
-          <p:nvPr/>
-        </p:nvSpPr>
-        <p:spPr>
-          <a:xfrm>
-            <a:off x="1005840" y="2286000"/>
-            <a:ext cx="4480560" cy="274320"/>
-          </a:xfrm>
-          <a:prstGeom prst="rect">
-            <a:avLst/>
-          </a:prstGeom>
-          <a:noFill/>
-        </p:spPr>
-        <p:txBody>
-          <a:bodyPr wrap="square">
-            <a:spAutoFit/>
-          </a:bodyPr>
-          <a:lstStyle/>
-          <a:p>
-            <a:pPr algn="l">
-              <a:defRPr sz="1200" b="0">
-                <a:solidFill>
-                  <a:srgbClr val="94A3B8"/>
-                </a:solidFill>
-                <a:latin typeface="Segoe UI"/>
-              </a:defRPr>
-            </a:pPr>
-            <a:r>
-              <a:t>Highest spatial correlation achieved</a:t>
-            </a:r>
-          </a:p>
-        </p:txBody>
-      </p:sp>
-      <p:sp>
-        <p:nvSpPr>
-          <p:cNvPr id="9" name="Rounded Rectangle 8"/>
-          <p:cNvSpPr/>
-          <p:nvPr/>
-        </p:nvSpPr>
-        <p:spPr>
-          <a:xfrm>
-            <a:off x="6217920" y="1371600"/>
-            <a:ext cx="5029200" cy="1280160"/>
-          </a:xfrm>
-          <a:prstGeom prst="roundRect">
-            <a:avLst/>
-          </a:prstGeom>
-          <a:solidFill>
-            <a:srgbClr val="1E293B"/>
-          </a:solidFill>
-          <a:ln w="12700">
-            <a:solidFill>
-              <a:srgbClr val="334155"/>
-            </a:solidFill>
-          </a:ln>
-        </p:spPr>
-        <p:style>
-          <a:lnRef idx="1">
-            <a:schemeClr val="accent1"/>
-          </a:lnRef>
-          <a:fillRef idx="3">
-            <a:schemeClr val="accent1"/>
-          </a:fillRef>
-          <a:effectRef idx="2">
-            <a:schemeClr val="accent1"/>
-          </a:effectRef>
-          <a:fontRef idx="minor">
-            <a:schemeClr val="lt1"/>
-          </a:fontRef>
-        </p:style>
-        <p:txBody>
-          <a:bodyPr rtlCol="0" anchor="ctr"/>
-          <a:lstStyle/>
-          <a:p>
-            <a:pPr algn="ctr"/>
-          </a:p>
-        </p:txBody>
-      </p:sp>
-      <p:sp>
-        <p:nvSpPr>
-          <p:cNvPr id="10" name="TextBox 9"/>
-          <p:cNvSpPr txBox="1"/>
-          <p:nvPr/>
-        </p:nvSpPr>
-        <p:spPr>
-          <a:xfrm>
-            <a:off x="6492240" y="1508760"/>
-            <a:ext cx="4480560" cy="457200"/>
-          </a:xfrm>
-          <a:prstGeom prst="rect">
-            <a:avLst/>
-          </a:prstGeom>
-          <a:noFill/>
-        </p:spPr>
-        <p:txBody>
-          <a:bodyPr wrap="square">
-            <a:spAutoFit/>
-          </a:bodyPr>
-          <a:lstStyle/>
-          <a:p>
-            <a:pPr algn="l">
-              <a:defRPr sz="3600" b="1">
-                <a:solidFill>
-                  <a:srgbClr val="60A5FA"/>
-                </a:solidFill>
-                <a:latin typeface="Segoe UI"/>
-              </a:defRPr>
-            </a:pPr>
-            <a:r>
-              <a:t>2.24</a:t>
-            </a:r>
-          </a:p>
-        </p:txBody>
-      </p:sp>
-      <p:sp>
-        <p:nvSpPr>
-          <p:cNvPr id="11" name="TextBox 10"/>
-          <p:cNvSpPr txBox="1"/>
-          <p:nvPr/>
-        </p:nvSpPr>
-        <p:spPr>
-          <a:xfrm>
-            <a:off x="6492240" y="2011680"/>
-            <a:ext cx="4480560" cy="274320"/>
-          </a:xfrm>
-          <a:prstGeom prst="rect">
-            <a:avLst/>
-          </a:prstGeom>
-          <a:noFill/>
-        </p:spPr>
-        <p:txBody>
-          <a:bodyPr wrap="square">
-            <a:spAutoFit/>
-          </a:bodyPr>
-          <a:lstStyle/>
-          <a:p>
-            <a:pPr algn="l">
-              <a:defRPr sz="1600" b="1">
-                <a:solidFill>
-                  <a:srgbClr val="FFFFFF"/>
-                </a:solidFill>
-                <a:latin typeface="Segoe UI"/>
-              </a:defRPr>
-            </a:pPr>
-            <a:r>
-              <a:t>Overall MAE</a:t>
-            </a:r>
-          </a:p>
-        </p:txBody>
-      </p:sp>
-      <p:sp>
-        <p:nvSpPr>
-          <p:cNvPr id="12" name="TextBox 11"/>
-          <p:cNvSpPr txBox="1"/>
-          <p:nvPr/>
-        </p:nvSpPr>
-        <p:spPr>
-          <a:xfrm>
-            <a:off x="6492240" y="2286000"/>
-            <a:ext cx="4480560" cy="274320"/>
-          </a:xfrm>
-          <a:prstGeom prst="rect">
-            <a:avLst/>
-          </a:prstGeom>
-          <a:noFill/>
-        </p:spPr>
-        <p:txBody>
-          <a:bodyPr wrap="square">
-            <a:spAutoFit/>
-          </a:bodyPr>
-          <a:lstStyle/>
-          <a:p>
-            <a:pPr algn="l">
-              <a:defRPr sz="1200" b="0">
-                <a:solidFill>
-                  <a:srgbClr val="94A3B8"/>
-                </a:solidFill>
-                <a:latin typeface="Segoe UI"/>
-              </a:defRPr>
-            </a:pPr>
-            <a:r>
-              <a:t>People per 500m pixel</a:t>
-            </a:r>
-          </a:p>
-        </p:txBody>
-      </p:sp>
-      <p:sp>
-        <p:nvSpPr>
-          <p:cNvPr id="13" name="Rounded Rectangle 12"/>
-          <p:cNvSpPr/>
-          <p:nvPr/>
-        </p:nvSpPr>
-        <p:spPr>
-          <a:xfrm>
-            <a:off x="731520" y="2834640"/>
-            <a:ext cx="5029200" cy="1280160"/>
-          </a:xfrm>
-          <a:prstGeom prst="roundRect">
-            <a:avLst/>
-          </a:prstGeom>
-          <a:solidFill>
-            <a:srgbClr val="1E293B"/>
-          </a:solidFill>
-          <a:ln w="12700">
-            <a:solidFill>
-              <a:srgbClr val="334155"/>
-            </a:solidFill>
-          </a:ln>
-        </p:spPr>
-        <p:style>
-          <a:lnRef idx="1">
-            <a:schemeClr val="accent1"/>
-          </a:lnRef>
-          <a:fillRef idx="3">
-            <a:schemeClr val="accent1"/>
-          </a:fillRef>
-          <a:effectRef idx="2">
-            <a:schemeClr val="accent1"/>
-          </a:effectRef>
-          <a:fontRef idx="minor">
-            <a:schemeClr val="lt1"/>
-          </a:fontRef>
-        </p:style>
-        <p:txBody>
-          <a:bodyPr rtlCol="0" anchor="ctr"/>
-          <a:lstStyle/>
-          <a:p>
-            <a:pPr algn="ctr"/>
-          </a:p>
-        </p:txBody>
-      </p:sp>
-      <p:sp>
-        <p:nvSpPr>
-          <p:cNvPr id="14" name="TextBox 13"/>
-          <p:cNvSpPr txBox="1"/>
-          <p:nvPr/>
-        </p:nvSpPr>
-        <p:spPr>
-          <a:xfrm>
-            <a:off x="1005840" y="2971800"/>
-            <a:ext cx="4480560" cy="457200"/>
-          </a:xfrm>
-          <a:prstGeom prst="rect">
-            <a:avLst/>
-          </a:prstGeom>
-          <a:noFill/>
-        </p:spPr>
-        <p:txBody>
-          <a:bodyPr wrap="square">
-            <a:spAutoFit/>
-          </a:bodyPr>
-          <a:lstStyle/>
-          <a:p>
-            <a:pPr algn="l">
-              <a:defRPr sz="3600" b="1">
-                <a:solidFill>
-                  <a:srgbClr val="60A5FA"/>
-                </a:solidFill>
-                <a:latin typeface="Segoe UI"/>
-              </a:defRPr>
-            </a:pPr>
-            <a:r>
-              <a:t>1.012</a:t>
-            </a:r>
-          </a:p>
-        </p:txBody>
-      </p:sp>
-      <p:sp>
-        <p:nvSpPr>
-          <p:cNvPr id="15" name="TextBox 14"/>
-          <p:cNvSpPr txBox="1"/>
-          <p:nvPr/>
-        </p:nvSpPr>
-        <p:spPr>
-          <a:xfrm>
-            <a:off x="1005840" y="3474720"/>
-            <a:ext cx="4480560" cy="274320"/>
-          </a:xfrm>
-          <a:prstGeom prst="rect">
-            <a:avLst/>
-          </a:prstGeom>
-          <a:noFill/>
-        </p:spPr>
-        <p:txBody>
-          <a:bodyPr wrap="square">
-            <a:spAutoFit/>
-          </a:bodyPr>
-          <a:lstStyle/>
-          <a:p>
-            <a:pPr algn="l">
-              <a:defRPr sz="1600" b="1">
-                <a:solidFill>
-                  <a:srgbClr val="FFFFFF"/>
-                </a:solidFill>
-                <a:latin typeface="Segoe UI"/>
-              </a:defRPr>
-            </a:pPr>
-            <a:r>
-              <a:t>Scale Factor</a:t>
-            </a:r>
-          </a:p>
-        </p:txBody>
-      </p:sp>
-      <p:sp>
-        <p:nvSpPr>
-          <p:cNvPr id="16" name="TextBox 15"/>
-          <p:cNvSpPr txBox="1"/>
-          <p:nvPr/>
-        </p:nvSpPr>
-        <p:spPr>
-          <a:xfrm>
-            <a:off x="1005840" y="3749040"/>
-            <a:ext cx="4480560" cy="274320"/>
-          </a:xfrm>
-          <a:prstGeom prst="rect">
-            <a:avLst/>
-          </a:prstGeom>
-          <a:noFill/>
-        </p:spPr>
-        <p:txBody>
-          <a:bodyPr wrap="square">
-            <a:spAutoFit/>
-          </a:bodyPr>
-          <a:lstStyle/>
-          <a:p>
-            <a:pPr algn="l">
-              <a:defRPr sz="1200" b="0">
-                <a:solidFill>
-                  <a:srgbClr val="94A3B8"/>
-                </a:solidFill>
-                <a:latin typeface="Segoe UI"/>
-              </a:defRPr>
-            </a:pPr>
-            <a:r>
-              <a:t>Essentially exact national total (7.45M)</a:t>
-            </a:r>
-          </a:p>
-        </p:txBody>
-      </p:sp>
-      <p:sp>
-        <p:nvSpPr>
-          <p:cNvPr id="17" name="Rounded Rectangle 16"/>
-          <p:cNvSpPr/>
-          <p:nvPr/>
-        </p:nvSpPr>
-        <p:spPr>
-          <a:xfrm>
-            <a:off x="6217920" y="2834640"/>
-            <a:ext cx="5029200" cy="1280160"/>
-          </a:xfrm>
-          <a:prstGeom prst="roundRect">
-            <a:avLst/>
-          </a:prstGeom>
-          <a:solidFill>
-            <a:srgbClr val="1E293B"/>
-          </a:solidFill>
-          <a:ln w="12700">
-            <a:solidFill>
-              <a:srgbClr val="334155"/>
-            </a:solidFill>
-          </a:ln>
-        </p:spPr>
-        <p:style>
-          <a:lnRef idx="1">
-            <a:schemeClr val="accent1"/>
-          </a:lnRef>
-          <a:fillRef idx="3">
-            <a:schemeClr val="accent1"/>
-          </a:fillRef>
-          <a:effectRef idx="2">
-            <a:schemeClr val="accent1"/>
-          </a:effectRef>
-          <a:fontRef idx="minor">
-            <a:schemeClr val="lt1"/>
-          </a:fontRef>
-        </p:style>
-        <p:txBody>
-          <a:bodyPr rtlCol="0" anchor="ctr"/>
-          <a:lstStyle/>
-          <a:p>
-            <a:pPr algn="ctr"/>
-          </a:p>
-        </p:txBody>
-      </p:sp>
-      <p:sp>
-        <p:nvSpPr>
-          <p:cNvPr id="18" name="TextBox 17"/>
-          <p:cNvSpPr txBox="1"/>
-          <p:nvPr/>
-        </p:nvSpPr>
-        <p:spPr>
-          <a:xfrm>
-            <a:off x="6492240" y="2971800"/>
-            <a:ext cx="4480560" cy="457200"/>
-          </a:xfrm>
-          <a:prstGeom prst="rect">
-            <a:avLst/>
-          </a:prstGeom>
-          <a:noFill/>
-        </p:spPr>
-        <p:txBody>
-          <a:bodyPr wrap="square">
-            <a:spAutoFit/>
-          </a:bodyPr>
-          <a:lstStyle/>
-          <a:p>
-            <a:pPr algn="l">
-              <a:defRPr sz="3600" b="1">
-                <a:solidFill>
-                  <a:srgbClr val="60A5FA"/>
-                </a:solidFill>
-                <a:latin typeface="Segoe UI"/>
-              </a:defRPr>
-            </a:pPr>
-            <a:r>
-              <a:t>0.958</a:t>
-            </a:r>
-          </a:p>
-        </p:txBody>
-      </p:sp>
-      <p:sp>
-        <p:nvSpPr>
-          <p:cNvPr id="19" name="TextBox 18"/>
-          <p:cNvSpPr txBox="1"/>
-          <p:nvPr/>
-        </p:nvSpPr>
-        <p:spPr>
-          <a:xfrm>
-            <a:off x="6492240" y="3474720"/>
-            <a:ext cx="4480560" cy="274320"/>
-          </a:xfrm>
-          <a:prstGeom prst="rect">
-            <a:avLst/>
-          </a:prstGeom>
-          <a:noFill/>
-        </p:spPr>
-        <p:txBody>
-          <a:bodyPr wrap="square">
-            <a:spAutoFit/>
-          </a:bodyPr>
-          <a:lstStyle/>
-          <a:p>
-            <a:pPr algn="l">
-              <a:defRPr sz="1600" b="1">
-                <a:solidFill>
-                  <a:srgbClr val="FFFFFF"/>
-                </a:solidFill>
-                <a:latin typeface="Segoe UI"/>
-              </a:defRPr>
-            </a:pPr>
-            <a:r>
-              <a:t>Rural R</a:t>
-            </a:r>
-          </a:p>
-        </p:txBody>
-      </p:sp>
-      <p:sp>
-        <p:nvSpPr>
-          <p:cNvPr id="20" name="TextBox 19"/>
-          <p:cNvSpPr txBox="1"/>
-          <p:nvPr/>
-        </p:nvSpPr>
-        <p:spPr>
-          <a:xfrm>
-            <a:off x="6492240" y="3749040"/>
-            <a:ext cx="4480560" cy="274320"/>
-          </a:xfrm>
-          <a:prstGeom prst="rect">
-            <a:avLst/>
-          </a:prstGeom>
-          <a:noFill/>
-        </p:spPr>
-        <p:txBody>
-          <a:bodyPr wrap="square">
-            <a:spAutoFit/>
-          </a:bodyPr>
-          <a:lstStyle/>
-          <a:p>
-            <a:pPr algn="l">
-              <a:defRPr sz="1200" b="0">
-                <a:solidFill>
-                  <a:srgbClr val="94A3B8"/>
-                </a:solidFill>
-                <a:latin typeface="Segoe UI"/>
-              </a:defRPr>
-            </a:pPr>
-            <a:r>
-              <a:t>Nearly perfect correlation</a:t>
-            </a:r>
-          </a:p>
-        </p:txBody>
-      </p:sp>
-      <p:sp>
-        <p:nvSpPr>
-          <p:cNvPr id="21" name="TextBox 20"/>
-          <p:cNvSpPr txBox="1"/>
-          <p:nvPr/>
-        </p:nvSpPr>
-        <p:spPr>
-          <a:xfrm>
-            <a:off x="731520" y="4572000"/>
-            <a:ext cx="10515600" cy="731520"/>
-          </a:xfrm>
-          <a:prstGeom prst="rect">
-            <a:avLst/>
-          </a:prstGeom>
-          <a:noFill/>
-        </p:spPr>
-        <p:txBody>
-          <a:bodyPr wrap="square">
-            <a:spAutoFit/>
-          </a:bodyPr>
-          <a:lstStyle/>
-          <a:p>
-            <a:pPr algn="l">
-              <a:defRPr sz="1400" b="0">
-                <a:solidFill>
-                  <a:srgbClr val="CBD5E1"/>
-                </a:solidFill>
-                <a:latin typeface="Segoe UI"/>
-              </a:defRPr>
-            </a:pPr>
-            <a:r>
-              <a:t>Density Breakdown: Rural (&lt;20) MAE=0.93, R=0.958  |  Peri-urban (20-100) MAE=6.71, R=0.889  |  Urban core (&gt;100) MAE=60.65, R=0.339</a:t>
             </a:r>
           </a:p>
         </p:txBody>
@@ -10475,7 +9804,7 @@
 </file>
 
 <file path=ppt/slides/slide7.xml><?xml version="1.0" encoding="utf-8"?>
-<p:sld xmlns:a="http://schemas.openxmlformats.org/drawingml/2006/main" xmlns:p="http://schemas.openxmlformats.org/presentationml/2006/main" xmlns:r="http://schemas.openxmlformats.org/officeDocument/2006/relationships">
+<p:sld xmlns:a="http://schemas.openxmlformats.org/drawingml/2006/main" xmlns:r="http://schemas.openxmlformats.org/officeDocument/2006/relationships" xmlns:p="http://schemas.openxmlformats.org/presentationml/2006/main">
   <p:cSld>
     <p:spTree>
       <p:nvGrpSpPr>
@@ -10483,7 +9812,14 @@
         <p:cNvGrpSpPr/>
         <p:nvPr/>
       </p:nvGrpSpPr>
-      <p:grpSpPr/>
+      <p:grpSpPr>
+        <a:xfrm>
+          <a:off x="0" y="0"/>
+          <a:ext cx="0" cy="0"/>
+          <a:chOff x="0" y="0"/>
+          <a:chExt cx="0" cy="0"/>
+        </a:xfrm>
+      </p:grpSpPr>
       <p:sp>
         <p:nvSpPr>
           <p:cNvPr id="2" name="Rectangle 1"/>
@@ -10524,6 +9860,7 @@
           <a:lstStyle/>
           <a:p>
             <a:pPr algn="ctr"/>
+            <a:endParaRPr/>
           </a:p>
         </p:txBody>
       </p:sp>
@@ -10550,7 +9887,7 @@
           <a:lstStyle/>
           <a:p>
             <a:pPr algn="l">
-              <a:defRPr sz="3800" b="1">
+              <a:defRPr sz="3200" b="1">
                 <a:solidFill>
                   <a:srgbClr val="FFFFFF"/>
                 </a:solidFill>
@@ -10558,8 +9895,14 @@
               </a:defRPr>
             </a:pPr>
             <a:r>
-              <a:t>Live Demo: Streamlit App</a:t>
-            </a:r>
+              <a:rPr dirty="0"/>
+              <a:t>Best Model: </a:t>
+            </a:r>
+            <a:r>
+              <a:rPr dirty="0" err="1"/>
+              <a:t>pretrained_ghsl_surface_vol_channel_huber</a:t>
+            </a:r>
+            <a:endParaRPr dirty="0"/>
           </a:p>
         </p:txBody>
       </p:sp>
@@ -10571,8 +9914,8 @@
         </p:nvSpPr>
         <p:spPr>
           <a:xfrm>
-            <a:off x="731520" y="1097280"/>
-            <a:ext cx="1371600" cy="54864"/>
+            <a:off x="731519" y="1005840"/>
+            <a:ext cx="2460414" cy="45719"/>
           </a:xfrm>
           <a:prstGeom prst="rect">
             <a:avLst/>
@@ -10603,19 +9946,66 @@
           <a:lstStyle/>
           <a:p>
             <a:pPr algn="ctr"/>
-          </a:p>
-        </p:txBody>
-      </p:sp>
-      <p:sp>
-        <p:nvSpPr>
-          <p:cNvPr id="5" name="TextBox 4"/>
+            <a:endParaRPr/>
+          </a:p>
+        </p:txBody>
+      </p:sp>
+      <p:sp>
+        <p:nvSpPr>
+          <p:cNvPr id="5" name="Rounded Rectangle 4"/>
+          <p:cNvSpPr/>
+          <p:nvPr/>
+        </p:nvSpPr>
+        <p:spPr>
+          <a:xfrm>
+            <a:off x="892387" y="1691640"/>
+            <a:ext cx="5029200" cy="1280160"/>
+          </a:xfrm>
+          <a:prstGeom prst="roundRect">
+            <a:avLst/>
+          </a:prstGeom>
+          <a:solidFill>
+            <a:srgbClr val="1E293B"/>
+          </a:solidFill>
+          <a:ln w="12700">
+            <a:solidFill>
+              <a:srgbClr val="334155"/>
+            </a:solidFill>
+          </a:ln>
+        </p:spPr>
+        <p:style>
+          <a:lnRef idx="1">
+            <a:schemeClr val="accent1"/>
+          </a:lnRef>
+          <a:fillRef idx="3">
+            <a:schemeClr val="accent1"/>
+          </a:fillRef>
+          <a:effectRef idx="2">
+            <a:schemeClr val="accent1"/>
+          </a:effectRef>
+          <a:fontRef idx="minor">
+            <a:schemeClr val="lt1"/>
+          </a:fontRef>
+        </p:style>
+        <p:txBody>
+          <a:bodyPr rtlCol="0" anchor="ctr"/>
+          <a:lstStyle/>
+          <a:p>
+            <a:pPr algn="ctr"/>
+            <a:endParaRPr/>
+          </a:p>
+        </p:txBody>
+      </p:sp>
+      <p:sp>
+        <p:nvSpPr>
+          <p:cNvPr id="6" name="TextBox 5"/>
           <p:cNvSpPr txBox="1"/>
           <p:nvPr/>
         </p:nvSpPr>
         <p:spPr>
           <a:xfrm>
-            <a:off x="731520" y="1371600"/>
-            <a:ext cx="10515600" cy="914400"/>
+            <a:off x="1166707" y="1828800"/>
+            <a:ext cx="4480560" cy="646331"/>
           </a:xfrm>
           <a:prstGeom prst="rect">
             <a:avLst/>
@@ -10629,29 +10019,29 @@
           <a:lstStyle/>
           <a:p>
             <a:pPr algn="l">
-              <a:defRPr sz="1800" b="0">
-                <a:solidFill>
-                  <a:srgbClr val="CBD5E1"/>
+              <a:defRPr sz="3600" b="1">
+                <a:solidFill>
+                  <a:srgbClr val="60A5FA"/>
                 </a:solidFill>
                 <a:latin typeface="Segoe UI"/>
               </a:defRPr>
             </a:pPr>
             <a:r>
-              <a:t>Interactive web application for region selection, real-time prediction, and explainability.</a:t>
-            </a:r>
-          </a:p>
-        </p:txBody>
-      </p:sp>
-      <p:sp>
-        <p:nvSpPr>
-          <p:cNvPr id="6" name="TextBox 5"/>
+              <a:t>0.881</a:t>
+            </a:r>
+          </a:p>
+        </p:txBody>
+      </p:sp>
+      <p:sp>
+        <p:nvSpPr>
+          <p:cNvPr id="7" name="TextBox 6"/>
           <p:cNvSpPr txBox="1"/>
           <p:nvPr/>
         </p:nvSpPr>
         <p:spPr>
           <a:xfrm>
-            <a:off x="731520" y="2286000"/>
-            <a:ext cx="731520" cy="457200"/>
+            <a:off x="1166707" y="2331720"/>
+            <a:ext cx="4480560" cy="338554"/>
           </a:xfrm>
           <a:prstGeom prst="rect">
             <a:avLst/>
@@ -10665,29 +10055,29 @@
           <a:lstStyle/>
           <a:p>
             <a:pPr algn="l">
-              <a:defRPr sz="2800" b="0">
-                <a:solidFill>
-                  <a:srgbClr val="60A5FA"/>
+              <a:defRPr sz="1600" b="1">
+                <a:solidFill>
+                  <a:srgbClr val="FFFFFF"/>
                 </a:solidFill>
                 <a:latin typeface="Segoe UI"/>
               </a:defRPr>
             </a:pPr>
             <a:r>
-              <a:t>🗺️</a:t>
-            </a:r>
-          </a:p>
-        </p:txBody>
-      </p:sp>
-      <p:sp>
-        <p:nvSpPr>
-          <p:cNvPr id="7" name="TextBox 6"/>
+              <a:t>Overall R</a:t>
+            </a:r>
+          </a:p>
+        </p:txBody>
+      </p:sp>
+      <p:sp>
+        <p:nvSpPr>
+          <p:cNvPr id="8" name="TextBox 7"/>
           <p:cNvSpPr txBox="1"/>
           <p:nvPr/>
         </p:nvSpPr>
         <p:spPr>
           <a:xfrm>
-            <a:off x="1371600" y="2286000"/>
-            <a:ext cx="4114800" cy="365760"/>
+            <a:off x="1166707" y="2606040"/>
+            <a:ext cx="4480560" cy="274320"/>
           </a:xfrm>
           <a:prstGeom prst="rect">
             <a:avLst/>
@@ -10701,29 +10091,75 @@
           <a:lstStyle/>
           <a:p>
             <a:pPr algn="l">
-              <a:defRPr sz="1800" b="1">
-                <a:solidFill>
-                  <a:srgbClr val="FFFFFF"/>
+              <a:defRPr sz="1200" b="0">
+                <a:solidFill>
+                  <a:srgbClr val="94A3B8"/>
                 </a:solidFill>
                 <a:latin typeface="Segoe UI"/>
               </a:defRPr>
             </a:pPr>
             <a:r>
-              <a:t>Interactive Map</a:t>
-            </a:r>
-          </a:p>
-        </p:txBody>
-      </p:sp>
-      <p:sp>
-        <p:nvSpPr>
-          <p:cNvPr id="8" name="TextBox 7"/>
+              <a:t>Highest spatial correlation achieved</a:t>
+            </a:r>
+          </a:p>
+        </p:txBody>
+      </p:sp>
+      <p:sp>
+        <p:nvSpPr>
+          <p:cNvPr id="9" name="Rounded Rectangle 8"/>
+          <p:cNvSpPr/>
+          <p:nvPr/>
+        </p:nvSpPr>
+        <p:spPr>
+          <a:xfrm>
+            <a:off x="6378787" y="1691640"/>
+            <a:ext cx="5029200" cy="1280160"/>
+          </a:xfrm>
+          <a:prstGeom prst="roundRect">
+            <a:avLst/>
+          </a:prstGeom>
+          <a:solidFill>
+            <a:srgbClr val="1E293B"/>
+          </a:solidFill>
+          <a:ln w="12700">
+            <a:solidFill>
+              <a:srgbClr val="334155"/>
+            </a:solidFill>
+          </a:ln>
+        </p:spPr>
+        <p:style>
+          <a:lnRef idx="1">
+            <a:schemeClr val="accent1"/>
+          </a:lnRef>
+          <a:fillRef idx="3">
+            <a:schemeClr val="accent1"/>
+          </a:fillRef>
+          <a:effectRef idx="2">
+            <a:schemeClr val="accent1"/>
+          </a:effectRef>
+          <a:fontRef idx="minor">
+            <a:schemeClr val="lt1"/>
+          </a:fontRef>
+        </p:style>
+        <p:txBody>
+          <a:bodyPr rtlCol="0" anchor="ctr"/>
+          <a:lstStyle/>
+          <a:p>
+            <a:pPr algn="ctr"/>
+            <a:endParaRPr/>
+          </a:p>
+        </p:txBody>
+      </p:sp>
+      <p:sp>
+        <p:nvSpPr>
+          <p:cNvPr id="10" name="TextBox 9"/>
           <p:cNvSpPr txBox="1"/>
           <p:nvPr/>
         </p:nvSpPr>
         <p:spPr>
           <a:xfrm>
-            <a:off x="1371600" y="2651760"/>
-            <a:ext cx="4114800" cy="365760"/>
+            <a:off x="6653107" y="1828800"/>
+            <a:ext cx="4480560" cy="646331"/>
           </a:xfrm>
           <a:prstGeom prst="rect">
             <a:avLst/>
@@ -10737,29 +10173,29 @@
           <a:lstStyle/>
           <a:p>
             <a:pPr algn="l">
-              <a:defRPr sz="1300" b="0">
-                <a:solidFill>
-                  <a:srgbClr val="94A3B8"/>
+              <a:defRPr sz="3600" b="1">
+                <a:solidFill>
+                  <a:srgbClr val="60A5FA"/>
                 </a:solidFill>
                 <a:latin typeface="Segoe UI"/>
               </a:defRPr>
             </a:pPr>
             <a:r>
-              <a:t>Draw a rectangle over any region in Pakistan</a:t>
-            </a:r>
-          </a:p>
-        </p:txBody>
-      </p:sp>
-      <p:sp>
-        <p:nvSpPr>
-          <p:cNvPr id="9" name="TextBox 8"/>
+              <a:t>2.24</a:t>
+            </a:r>
+          </a:p>
+        </p:txBody>
+      </p:sp>
+      <p:sp>
+        <p:nvSpPr>
+          <p:cNvPr id="11" name="TextBox 10"/>
           <p:cNvSpPr txBox="1"/>
           <p:nvPr/>
         </p:nvSpPr>
         <p:spPr>
           <a:xfrm>
-            <a:off x="6217920" y="2286000"/>
-            <a:ext cx="731520" cy="457200"/>
+            <a:off x="6653107" y="2331720"/>
+            <a:ext cx="4480560" cy="338554"/>
           </a:xfrm>
           <a:prstGeom prst="rect">
             <a:avLst/>
@@ -10773,29 +10209,30 @@
           <a:lstStyle/>
           <a:p>
             <a:pPr algn="l">
-              <a:defRPr sz="2800" b="0">
-                <a:solidFill>
-                  <a:srgbClr val="60A5FA"/>
+              <a:defRPr sz="1600" b="1">
+                <a:solidFill>
+                  <a:srgbClr val="FFFFFF"/>
                 </a:solidFill>
                 <a:latin typeface="Segoe UI"/>
               </a:defRPr>
             </a:pPr>
             <a:r>
-              <a:t>⚡</a:t>
-            </a:r>
-          </a:p>
-        </p:txBody>
-      </p:sp>
-      <p:sp>
-        <p:nvSpPr>
-          <p:cNvPr id="10" name="TextBox 9"/>
+              <a:rPr dirty="0"/>
+              <a:t>Overall MAE</a:t>
+            </a:r>
+          </a:p>
+        </p:txBody>
+      </p:sp>
+      <p:sp>
+        <p:nvSpPr>
+          <p:cNvPr id="12" name="TextBox 11"/>
           <p:cNvSpPr txBox="1"/>
           <p:nvPr/>
         </p:nvSpPr>
         <p:spPr>
           <a:xfrm>
-            <a:off x="6858000" y="2286000"/>
-            <a:ext cx="4114800" cy="365760"/>
+            <a:off x="6653107" y="2606040"/>
+            <a:ext cx="4480560" cy="274320"/>
           </a:xfrm>
           <a:prstGeom prst="rect">
             <a:avLst/>
@@ -10809,29 +10246,75 @@
           <a:lstStyle/>
           <a:p>
             <a:pPr algn="l">
-              <a:defRPr sz="1800" b="1">
-                <a:solidFill>
-                  <a:srgbClr val="FFFFFF"/>
+              <a:defRPr sz="1200" b="0">
+                <a:solidFill>
+                  <a:srgbClr val="94A3B8"/>
                 </a:solidFill>
                 <a:latin typeface="Segoe UI"/>
               </a:defRPr>
             </a:pPr>
             <a:r>
-              <a:t>Real-Time Prediction</a:t>
-            </a:r>
-          </a:p>
-        </p:txBody>
-      </p:sp>
-      <p:sp>
-        <p:nvSpPr>
-          <p:cNvPr id="11" name="TextBox 10"/>
+              <a:t>People per 500m pixel</a:t>
+            </a:r>
+          </a:p>
+        </p:txBody>
+      </p:sp>
+      <p:sp>
+        <p:nvSpPr>
+          <p:cNvPr id="13" name="Rounded Rectangle 12"/>
+          <p:cNvSpPr/>
+          <p:nvPr/>
+        </p:nvSpPr>
+        <p:spPr>
+          <a:xfrm>
+            <a:off x="892387" y="3154680"/>
+            <a:ext cx="5029200" cy="1280160"/>
+          </a:xfrm>
+          <a:prstGeom prst="roundRect">
+            <a:avLst/>
+          </a:prstGeom>
+          <a:solidFill>
+            <a:srgbClr val="1E293B"/>
+          </a:solidFill>
+          <a:ln w="12700">
+            <a:solidFill>
+              <a:srgbClr val="334155"/>
+            </a:solidFill>
+          </a:ln>
+        </p:spPr>
+        <p:style>
+          <a:lnRef idx="1">
+            <a:schemeClr val="accent1"/>
+          </a:lnRef>
+          <a:fillRef idx="3">
+            <a:schemeClr val="accent1"/>
+          </a:fillRef>
+          <a:effectRef idx="2">
+            <a:schemeClr val="accent1"/>
+          </a:effectRef>
+          <a:fontRef idx="minor">
+            <a:schemeClr val="lt1"/>
+          </a:fontRef>
+        </p:style>
+        <p:txBody>
+          <a:bodyPr rtlCol="0" anchor="ctr"/>
+          <a:lstStyle/>
+          <a:p>
+            <a:pPr algn="ctr"/>
+            <a:endParaRPr/>
+          </a:p>
+        </p:txBody>
+      </p:sp>
+      <p:sp>
+        <p:nvSpPr>
+          <p:cNvPr id="14" name="TextBox 13"/>
           <p:cNvSpPr txBox="1"/>
           <p:nvPr/>
         </p:nvSpPr>
         <p:spPr>
           <a:xfrm>
-            <a:off x="6858000" y="2651760"/>
-            <a:ext cx="4114800" cy="365760"/>
+            <a:off x="1166707" y="3291840"/>
+            <a:ext cx="4480560" cy="646331"/>
           </a:xfrm>
           <a:prstGeom prst="rect">
             <a:avLst/>
@@ -10845,29 +10328,29 @@
           <a:lstStyle/>
           <a:p>
             <a:pPr algn="l">
-              <a:defRPr sz="1300" b="0">
-                <a:solidFill>
-                  <a:srgbClr val="94A3B8"/>
+              <a:defRPr sz="3600" b="1">
+                <a:solidFill>
+                  <a:srgbClr val="60A5FA"/>
                 </a:solidFill>
                 <a:latin typeface="Segoe UI"/>
               </a:defRPr>
             </a:pPr>
             <a:r>
-              <a:t>4-channel CNN inference in &lt; 2 seconds</a:t>
-            </a:r>
-          </a:p>
-        </p:txBody>
-      </p:sp>
-      <p:sp>
-        <p:nvSpPr>
-          <p:cNvPr id="12" name="TextBox 11"/>
+              <a:t>1.012</a:t>
+            </a:r>
+          </a:p>
+        </p:txBody>
+      </p:sp>
+      <p:sp>
+        <p:nvSpPr>
+          <p:cNvPr id="15" name="TextBox 14"/>
           <p:cNvSpPr txBox="1"/>
           <p:nvPr/>
         </p:nvSpPr>
         <p:spPr>
           <a:xfrm>
-            <a:off x="731520" y="3474720"/>
-            <a:ext cx="731520" cy="457200"/>
+            <a:off x="1166707" y="3794760"/>
+            <a:ext cx="4480560" cy="338554"/>
           </a:xfrm>
           <a:prstGeom prst="rect">
             <a:avLst/>
@@ -10881,29 +10364,29 @@
           <a:lstStyle/>
           <a:p>
             <a:pPr algn="l">
-              <a:defRPr sz="2800" b="0">
-                <a:solidFill>
-                  <a:srgbClr val="60A5FA"/>
+              <a:defRPr sz="1600" b="1">
+                <a:solidFill>
+                  <a:srgbClr val="FFFFFF"/>
                 </a:solidFill>
                 <a:latin typeface="Segoe UI"/>
               </a:defRPr>
             </a:pPr>
             <a:r>
-              <a:t>📊</a:t>
-            </a:r>
-          </a:p>
-        </p:txBody>
-      </p:sp>
-      <p:sp>
-        <p:nvSpPr>
-          <p:cNvPr id="13" name="TextBox 12"/>
+              <a:t>Scale Factor</a:t>
+            </a:r>
+          </a:p>
+        </p:txBody>
+      </p:sp>
+      <p:sp>
+        <p:nvSpPr>
+          <p:cNvPr id="16" name="TextBox 15"/>
           <p:cNvSpPr txBox="1"/>
           <p:nvPr/>
         </p:nvSpPr>
         <p:spPr>
           <a:xfrm>
-            <a:off x="1371600" y="3474720"/>
-            <a:ext cx="4114800" cy="365760"/>
+            <a:off x="1166707" y="4069080"/>
+            <a:ext cx="4480560" cy="276999"/>
           </a:xfrm>
           <a:prstGeom prst="rect">
             <a:avLst/>
@@ -10917,29 +10400,77 @@
           <a:lstStyle/>
           <a:p>
             <a:pPr algn="l">
-              <a:defRPr sz="1800" b="1">
-                <a:solidFill>
-                  <a:srgbClr val="FFFFFF"/>
+              <a:defRPr sz="1200" b="0">
+                <a:solidFill>
+                  <a:srgbClr val="94A3B8"/>
                 </a:solidFill>
                 <a:latin typeface="Segoe UI"/>
               </a:defRPr>
             </a:pPr>
             <a:r>
-              <a:t>Data Quality Audit</a:t>
-            </a:r>
-          </a:p>
-        </p:txBody>
-      </p:sp>
-      <p:sp>
-        <p:nvSpPr>
-          <p:cNvPr id="14" name="TextBox 13"/>
+              <a:rPr dirty="0"/>
+              <a:t>Essentially exact national total</a:t>
+            </a:r>
+            <a:endParaRPr lang="en-GB" dirty="0"/>
+          </a:p>
+        </p:txBody>
+      </p:sp>
+      <p:sp>
+        <p:nvSpPr>
+          <p:cNvPr id="17" name="Rounded Rectangle 16"/>
+          <p:cNvSpPr/>
+          <p:nvPr/>
+        </p:nvSpPr>
+        <p:spPr>
+          <a:xfrm>
+            <a:off x="6378787" y="3154680"/>
+            <a:ext cx="5029200" cy="1280160"/>
+          </a:xfrm>
+          <a:prstGeom prst="roundRect">
+            <a:avLst/>
+          </a:prstGeom>
+          <a:solidFill>
+            <a:srgbClr val="1E293B"/>
+          </a:solidFill>
+          <a:ln w="12700">
+            <a:solidFill>
+              <a:srgbClr val="334155"/>
+            </a:solidFill>
+          </a:ln>
+        </p:spPr>
+        <p:style>
+          <a:lnRef idx="1">
+            <a:schemeClr val="accent1"/>
+          </a:lnRef>
+          <a:fillRef idx="3">
+            <a:schemeClr val="accent1"/>
+          </a:fillRef>
+          <a:effectRef idx="2">
+            <a:schemeClr val="accent1"/>
+          </a:effectRef>
+          <a:fontRef idx="minor">
+            <a:schemeClr val="lt1"/>
+          </a:fontRef>
+        </p:style>
+        <p:txBody>
+          <a:bodyPr rtlCol="0" anchor="ctr"/>
+          <a:lstStyle/>
+          <a:p>
+            <a:pPr algn="ctr"/>
+            <a:endParaRPr/>
+          </a:p>
+        </p:txBody>
+      </p:sp>
+      <p:sp>
+        <p:nvSpPr>
+          <p:cNvPr id="18" name="TextBox 17"/>
           <p:cNvSpPr txBox="1"/>
           <p:nvPr/>
         </p:nvSpPr>
         <p:spPr>
           <a:xfrm>
-            <a:off x="1371600" y="3840480"/>
-            <a:ext cx="4114800" cy="365760"/>
+            <a:off x="6653107" y="3291840"/>
+            <a:ext cx="4480560" cy="646331"/>
           </a:xfrm>
           <a:prstGeom prst="rect">
             <a:avLst/>
@@ -10953,29 +10484,29 @@
           <a:lstStyle/>
           <a:p>
             <a:pPr algn="l">
-              <a:defRPr sz="1300" b="0">
-                <a:solidFill>
-                  <a:srgbClr val="94A3B8"/>
+              <a:defRPr sz="3600" b="1">
+                <a:solidFill>
+                  <a:srgbClr val="60A5FA"/>
                 </a:solidFill>
                 <a:latin typeface="Segoe UI"/>
               </a:defRPr>
             </a:pPr>
             <a:r>
-              <a:t>5-dimension scorecard with explanations</a:t>
-            </a:r>
-          </a:p>
-        </p:txBody>
-      </p:sp>
-      <p:sp>
-        <p:nvSpPr>
-          <p:cNvPr id="15" name="TextBox 14"/>
+              <a:t>0.958</a:t>
+            </a:r>
+          </a:p>
+        </p:txBody>
+      </p:sp>
+      <p:sp>
+        <p:nvSpPr>
+          <p:cNvPr id="19" name="TextBox 18"/>
           <p:cNvSpPr txBox="1"/>
           <p:nvPr/>
         </p:nvSpPr>
         <p:spPr>
           <a:xfrm>
-            <a:off x="6217920" y="3474720"/>
-            <a:ext cx="731520" cy="457200"/>
+            <a:off x="6653107" y="3794760"/>
+            <a:ext cx="4480560" cy="338554"/>
           </a:xfrm>
           <a:prstGeom prst="rect">
             <a:avLst/>
@@ -10989,29 +10520,29 @@
           <a:lstStyle/>
           <a:p>
             <a:pPr algn="l">
-              <a:defRPr sz="2800" b="0">
-                <a:solidFill>
-                  <a:srgbClr val="60A5FA"/>
+              <a:defRPr sz="1600" b="1">
+                <a:solidFill>
+                  <a:srgbClr val="FFFFFF"/>
                 </a:solidFill>
                 <a:latin typeface="Segoe UI"/>
               </a:defRPr>
             </a:pPr>
             <a:r>
-              <a:t>🔥</a:t>
-            </a:r>
-          </a:p>
-        </p:txBody>
-      </p:sp>
-      <p:sp>
-        <p:nvSpPr>
-          <p:cNvPr id="16" name="TextBox 15"/>
+              <a:t>Rural R</a:t>
+            </a:r>
+          </a:p>
+        </p:txBody>
+      </p:sp>
+      <p:sp>
+        <p:nvSpPr>
+          <p:cNvPr id="20" name="TextBox 19"/>
           <p:cNvSpPr txBox="1"/>
           <p:nvPr/>
         </p:nvSpPr>
         <p:spPr>
           <a:xfrm>
-            <a:off x="6858000" y="3474720"/>
-            <a:ext cx="4114800" cy="365760"/>
+            <a:off x="6653107" y="4069080"/>
+            <a:ext cx="4480560" cy="274320"/>
           </a:xfrm>
           <a:prstGeom prst="rect">
             <a:avLst/>
@@ -11025,29 +10556,29 @@
           <a:lstStyle/>
           <a:p>
             <a:pPr algn="l">
-              <a:defRPr sz="1800" b="1">
-                <a:solidFill>
-                  <a:srgbClr val="FFFFFF"/>
+              <a:defRPr sz="1200" b="0">
+                <a:solidFill>
+                  <a:srgbClr val="94A3B8"/>
                 </a:solidFill>
                 <a:latin typeface="Segoe UI"/>
               </a:defRPr>
             </a:pPr>
             <a:r>
-              <a:t>Grad-CAM Heatmap</a:t>
-            </a:r>
-          </a:p>
-        </p:txBody>
-      </p:sp>
-      <p:sp>
-        <p:nvSpPr>
-          <p:cNvPr id="17" name="TextBox 16"/>
+              <a:t>Nearly perfect correlation</a:t>
+            </a:r>
+          </a:p>
+        </p:txBody>
+      </p:sp>
+      <p:sp>
+        <p:nvSpPr>
+          <p:cNvPr id="21" name="TextBox 20"/>
           <p:cNvSpPr txBox="1"/>
           <p:nvPr/>
         </p:nvSpPr>
         <p:spPr>
           <a:xfrm>
-            <a:off x="6858000" y="3840480"/>
-            <a:ext cx="4114800" cy="365760"/>
+            <a:off x="731520" y="5003800"/>
+            <a:ext cx="10515600" cy="731520"/>
           </a:xfrm>
           <a:prstGeom prst="rect">
             <a:avLst/>
@@ -11061,159 +10592,16 @@
           <a:lstStyle/>
           <a:p>
             <a:pPr algn="l">
-              <a:defRPr sz="1300" b="0">
-                <a:solidFill>
-                  <a:srgbClr val="94A3B8"/>
+              <a:defRPr sz="1400" b="0">
+                <a:solidFill>
+                  <a:srgbClr val="CBD5E1"/>
                 </a:solidFill>
                 <a:latin typeface="Segoe UI"/>
               </a:defRPr>
             </a:pPr>
             <a:r>
-              <a:t>See which pixels drive the prediction</a:t>
-            </a:r>
-          </a:p>
-        </p:txBody>
-      </p:sp>
-      <p:sp>
-        <p:nvSpPr>
-          <p:cNvPr id="18" name="TextBox 17"/>
-          <p:cNvSpPr txBox="1"/>
-          <p:nvPr/>
-        </p:nvSpPr>
-        <p:spPr>
-          <a:xfrm>
-            <a:off x="731520" y="4663440"/>
-            <a:ext cx="731520" cy="457200"/>
-          </a:xfrm>
-          <a:prstGeom prst="rect">
-            <a:avLst/>
-          </a:prstGeom>
-          <a:noFill/>
-        </p:spPr>
-        <p:txBody>
-          <a:bodyPr wrap="square">
-            <a:spAutoFit/>
-          </a:bodyPr>
-          <a:lstStyle/>
-          <a:p>
-            <a:pPr algn="l">
-              <a:defRPr sz="2800" b="0">
-                <a:solidFill>
-                  <a:srgbClr val="60A5FA"/>
-                </a:solidFill>
-                <a:latin typeface="Segoe UI"/>
-              </a:defRPr>
-            </a:pPr>
-            <a:r>
-              <a:t>📚</a:t>
-            </a:r>
-          </a:p>
-        </p:txBody>
-      </p:sp>
-      <p:sp>
-        <p:nvSpPr>
-          <p:cNvPr id="19" name="TextBox 18"/>
-          <p:cNvSpPr txBox="1"/>
-          <p:nvPr/>
-        </p:nvSpPr>
-        <p:spPr>
-          <a:xfrm>
-            <a:off x="1371600" y="4663440"/>
-            <a:ext cx="4114800" cy="365760"/>
-          </a:xfrm>
-          <a:prstGeom prst="rect">
-            <a:avLst/>
-          </a:prstGeom>
-          <a:noFill/>
-        </p:spPr>
-        <p:txBody>
-          <a:bodyPr wrap="square">
-            <a:spAutoFit/>
-          </a:bodyPr>
-          <a:lstStyle/>
-          <a:p>
-            <a:pPr algn="l">
-              <a:defRPr sz="1800" b="1">
-                <a:solidFill>
-                  <a:srgbClr val="FFFFFF"/>
-                </a:solidFill>
-                <a:latin typeface="Segoe UI"/>
-              </a:defRPr>
-            </a:pPr>
-            <a:r>
-              <a:t>RAG Literature</a:t>
-            </a:r>
-          </a:p>
-        </p:txBody>
-      </p:sp>
-      <p:sp>
-        <p:nvSpPr>
-          <p:cNvPr id="20" name="TextBox 19"/>
-          <p:cNvSpPr txBox="1"/>
-          <p:nvPr/>
-        </p:nvSpPr>
-        <p:spPr>
-          <a:xfrm>
-            <a:off x="1371600" y="5029200"/>
-            <a:ext cx="4114800" cy="365760"/>
-          </a:xfrm>
-          <a:prstGeom prst="rect">
-            <a:avLst/>
-          </a:prstGeom>
-          <a:noFill/>
-        </p:spPr>
-        <p:txBody>
-          <a:bodyPr wrap="square">
-            <a:spAutoFit/>
-          </a:bodyPr>
-          <a:lstStyle/>
-          <a:p>
-            <a:pPr algn="l">
-              <a:defRPr sz="1300" b="0">
-                <a:solidFill>
-                  <a:srgbClr val="94A3B8"/>
-                </a:solidFill>
-                <a:latin typeface="Segoe UI"/>
-              </a:defRPr>
-            </a:pPr>
-            <a:r>
-              <a:t>8 academic papers indexed for grounding</a:t>
-            </a:r>
-          </a:p>
-        </p:txBody>
-      </p:sp>
-      <p:sp>
-        <p:nvSpPr>
-          <p:cNvPr id="21" name="TextBox 20"/>
-          <p:cNvSpPr txBox="1"/>
-          <p:nvPr/>
-        </p:nvSpPr>
-        <p:spPr>
-          <a:xfrm>
-            <a:off x="731520" y="5303520"/>
-            <a:ext cx="10515600" cy="548640"/>
-          </a:xfrm>
-          <a:prstGeom prst="rect">
-            <a:avLst/>
-          </a:prstGeom>
-          <a:noFill/>
-        </p:spPr>
-        <p:txBody>
-          <a:bodyPr wrap="square">
-            <a:spAutoFit/>
-          </a:bodyPr>
-          <a:lstStyle/>
-          <a:p>
-            <a:pPr algn="l">
-              <a:defRPr sz="1400" b="1">
-                <a:solidFill>
-                  <a:srgbClr val="A78BFA"/>
-                </a:solidFill>
-                <a:latin typeface="Segoe UI"/>
-              </a:defRPr>
-            </a:pPr>
-            <a:r>
-              <a:t>Launch:  C:\pakvenv\Scripts\python.exe -m streamlit run app\streamlit_app.py</a:t>
+              <a:rPr dirty="0"/>
+              <a:t>Density Breakdown: Rural (&lt;20) MAE=0.93, R=0.958  |  Peri-urban (20-100) MAE=6.71, R=0.889  |  Urban core (&gt;100) MAE=60.65, R=0.339</a:t>
             </a:r>
           </a:p>
         </p:txBody>
@@ -11227,7 +10615,7 @@
 </file>
 
 <file path=ppt/slides/slide8.xml><?xml version="1.0" encoding="utf-8"?>
-<p:sld xmlns:a="http://schemas.openxmlformats.org/drawingml/2006/main" xmlns:p="http://schemas.openxmlformats.org/presentationml/2006/main" xmlns:r="http://schemas.openxmlformats.org/officeDocument/2006/relationships">
+<p:sld xmlns:a="http://schemas.openxmlformats.org/drawingml/2006/main" xmlns:r="http://schemas.openxmlformats.org/officeDocument/2006/relationships" xmlns:p="http://schemas.openxmlformats.org/presentationml/2006/main">
   <p:cSld>
     <p:spTree>
       <p:nvGrpSpPr>
@@ -11235,7 +10623,14 @@
         <p:cNvGrpSpPr/>
         <p:nvPr/>
       </p:nvGrpSpPr>
-      <p:grpSpPr/>
+      <p:grpSpPr>
+        <a:xfrm>
+          <a:off x="0" y="0"/>
+          <a:ext cx="0" cy="0"/>
+          <a:chOff x="0" y="0"/>
+          <a:chExt cx="0" cy="0"/>
+        </a:xfrm>
+      </p:grpSpPr>
       <p:sp>
         <p:nvSpPr>
           <p:cNvPr id="2" name="Rectangle 1"/>
@@ -11276,6 +10671,7 @@
           <a:lstStyle/>
           <a:p>
             <a:pPr algn="ctr"/>
+            <a:endParaRPr/>
           </a:p>
         </p:txBody>
       </p:sp>
@@ -11310,7 +10706,16 @@
               </a:defRPr>
             </a:pPr>
             <a:r>
-              <a:t>Conclusion</a:t>
+              <a:rPr dirty="0"/>
+              <a:t>Live Demo: </a:t>
+            </a:r>
+            <a:r>
+              <a:rPr dirty="0" err="1"/>
+              <a:t>Streamlit</a:t>
+            </a:r>
+            <a:r>
+              <a:rPr dirty="0"/>
+              <a:t> App</a:t>
             </a:r>
           </a:p>
         </p:txBody>
@@ -11324,7 +10729,7 @@
         <p:spPr>
           <a:xfrm>
             <a:off x="731520" y="1097280"/>
-            <a:ext cx="1097280" cy="54864"/>
+            <a:ext cx="6050280" cy="45719"/>
           </a:xfrm>
           <a:prstGeom prst="rect">
             <a:avLst/>
@@ -11355,62 +10760,20 @@
           <a:lstStyle/>
           <a:p>
             <a:pPr algn="ctr"/>
-          </a:p>
-        </p:txBody>
-      </p:sp>
-      <p:sp>
-        <p:nvSpPr>
-          <p:cNvPr id="5" name="Oval 4"/>
-          <p:cNvSpPr/>
-          <p:nvPr/>
-        </p:nvSpPr>
-        <p:spPr>
-          <a:xfrm>
-            <a:off x="822960" y="1554480"/>
-            <a:ext cx="137160" cy="137160"/>
-          </a:xfrm>
-          <a:prstGeom prst="ellipse">
-            <a:avLst/>
-          </a:prstGeom>
-          <a:solidFill>
-            <a:srgbClr val="60A5FA"/>
-          </a:solidFill>
-          <a:ln>
-            <a:noFill/>
-          </a:ln>
-        </p:spPr>
-        <p:style>
-          <a:lnRef idx="1">
-            <a:schemeClr val="accent1"/>
-          </a:lnRef>
-          <a:fillRef idx="3">
-            <a:schemeClr val="accent1"/>
-          </a:fillRef>
-          <a:effectRef idx="2">
-            <a:schemeClr val="accent1"/>
-          </a:effectRef>
-          <a:fontRef idx="minor">
-            <a:schemeClr val="lt1"/>
-          </a:fontRef>
-        </p:style>
-        <p:txBody>
-          <a:bodyPr rtlCol="0" anchor="ctr"/>
-          <a:lstStyle/>
-          <a:p>
-            <a:pPr algn="ctr"/>
-          </a:p>
-        </p:txBody>
-      </p:sp>
-      <p:sp>
-        <p:nvSpPr>
-          <p:cNvPr id="6" name="TextBox 5"/>
+            <a:endParaRPr/>
+          </a:p>
+        </p:txBody>
+      </p:sp>
+      <p:sp>
+        <p:nvSpPr>
+          <p:cNvPr id="5" name="TextBox 4"/>
           <p:cNvSpPr txBox="1"/>
           <p:nvPr/>
         </p:nvSpPr>
         <p:spPr>
           <a:xfrm>
-            <a:off x="1188720" y="1463040"/>
-            <a:ext cx="9601200" cy="548640"/>
+            <a:off x="731520" y="1371600"/>
+            <a:ext cx="10515600" cy="914400"/>
           </a:xfrm>
           <a:prstGeom prst="rect">
             <a:avLst/>
@@ -11424,7 +10787,7 @@
           <a:lstStyle/>
           <a:p>
             <a:pPr algn="l">
-              <a:defRPr sz="1700" b="0">
+              <a:defRPr sz="1800" b="0">
                 <a:solidFill>
                   <a:srgbClr val="CBD5E1"/>
                 </a:solidFill>
@@ -11432,64 +10795,21 @@
               </a:defRPr>
             </a:pPr>
             <a:r>
-              <a:t>Fusing temporal NTL with 3D built-up structure yields R = 0.88 — state-of-the-art for Pakistan at 500m resolution.</a:t>
-            </a:r>
-          </a:p>
-        </p:txBody>
-      </p:sp>
-      <p:sp>
-        <p:nvSpPr>
-          <p:cNvPr id="7" name="Oval 6"/>
-          <p:cNvSpPr/>
-          <p:nvPr/>
-        </p:nvSpPr>
-        <p:spPr>
-          <a:xfrm>
-            <a:off x="822960" y="2377440"/>
-            <a:ext cx="137160" cy="137160"/>
-          </a:xfrm>
-          <a:prstGeom prst="ellipse">
-            <a:avLst/>
-          </a:prstGeom>
-          <a:solidFill>
-            <a:srgbClr val="60A5FA"/>
-          </a:solidFill>
-          <a:ln>
-            <a:noFill/>
-          </a:ln>
-        </p:spPr>
-        <p:style>
-          <a:lnRef idx="1">
-            <a:schemeClr val="accent1"/>
-          </a:lnRef>
-          <a:fillRef idx="3">
-            <a:schemeClr val="accent1"/>
-          </a:fillRef>
-          <a:effectRef idx="2">
-            <a:schemeClr val="accent1"/>
-          </a:effectRef>
-          <a:fontRef idx="minor">
-            <a:schemeClr val="lt1"/>
-          </a:fontRef>
-        </p:style>
-        <p:txBody>
-          <a:bodyPr rtlCol="0" anchor="ctr"/>
-          <a:lstStyle/>
-          <a:p>
-            <a:pPr algn="ctr"/>
-          </a:p>
-        </p:txBody>
-      </p:sp>
-      <p:sp>
-        <p:nvSpPr>
-          <p:cNvPr id="8" name="TextBox 7"/>
+              <a:t>Interactive web application for region selection, real-time prediction, and explainability.</a:t>
+            </a:r>
+          </a:p>
+        </p:txBody>
+      </p:sp>
+      <p:sp>
+        <p:nvSpPr>
+          <p:cNvPr id="6" name="TextBox 5"/>
           <p:cNvSpPr txBox="1"/>
           <p:nvPr/>
         </p:nvSpPr>
         <p:spPr>
           <a:xfrm>
-            <a:off x="1188720" y="2286000"/>
-            <a:ext cx="9601200" cy="548640"/>
+            <a:off x="731520" y="2286000"/>
+            <a:ext cx="731520" cy="457200"/>
           </a:xfrm>
           <a:prstGeom prst="rect">
             <a:avLst/>
@@ -11503,72 +10823,29 @@
           <a:lstStyle/>
           <a:p>
             <a:pPr algn="l">
-              <a:defRPr sz="1700" b="0">
-                <a:solidFill>
-                  <a:srgbClr val="CBD5E1"/>
+              <a:defRPr sz="2800" b="0">
+                <a:solidFill>
+                  <a:srgbClr val="60A5FA"/>
                 </a:solidFill>
                 <a:latin typeface="Segoe UI"/>
               </a:defRPr>
             </a:pPr>
             <a:r>
-              <a:t>ImageNet pretraining (+0.24 R) and Huber loss are the biggest performance levers.</a:t>
-            </a:r>
-          </a:p>
-        </p:txBody>
-      </p:sp>
-      <p:sp>
-        <p:nvSpPr>
-          <p:cNvPr id="9" name="Oval 8"/>
-          <p:cNvSpPr/>
-          <p:nvPr/>
-        </p:nvSpPr>
-        <p:spPr>
-          <a:xfrm>
-            <a:off x="822960" y="3200400"/>
-            <a:ext cx="137160" cy="137160"/>
-          </a:xfrm>
-          <a:prstGeom prst="ellipse">
-            <a:avLst/>
-          </a:prstGeom>
-          <a:solidFill>
-            <a:srgbClr val="60A5FA"/>
-          </a:solidFill>
-          <a:ln>
-            <a:noFill/>
-          </a:ln>
-        </p:spPr>
-        <p:style>
-          <a:lnRef idx="1">
-            <a:schemeClr val="accent1"/>
-          </a:lnRef>
-          <a:fillRef idx="3">
-            <a:schemeClr val="accent1"/>
-          </a:fillRef>
-          <a:effectRef idx="2">
-            <a:schemeClr val="accent1"/>
-          </a:effectRef>
-          <a:fontRef idx="minor">
-            <a:schemeClr val="lt1"/>
-          </a:fontRef>
-        </p:style>
-        <p:txBody>
-          <a:bodyPr rtlCol="0" anchor="ctr"/>
-          <a:lstStyle/>
-          <a:p>
-            <a:pPr algn="ctr"/>
-          </a:p>
-        </p:txBody>
-      </p:sp>
-      <p:sp>
-        <p:nvSpPr>
-          <p:cNvPr id="10" name="TextBox 9"/>
+              <a:t>🗺️</a:t>
+            </a:r>
+          </a:p>
+        </p:txBody>
+      </p:sp>
+      <p:sp>
+        <p:nvSpPr>
+          <p:cNvPr id="7" name="TextBox 6"/>
           <p:cNvSpPr txBox="1"/>
           <p:nvPr/>
         </p:nvSpPr>
         <p:spPr>
           <a:xfrm>
-            <a:off x="1188720" y="3108960"/>
-            <a:ext cx="9601200" cy="548640"/>
+            <a:off x="1371600" y="2286000"/>
+            <a:ext cx="4114800" cy="365760"/>
           </a:xfrm>
           <a:prstGeom prst="rect">
             <a:avLst/>
@@ -11582,72 +10859,29 @@
           <a:lstStyle/>
           <a:p>
             <a:pPr algn="l">
-              <a:defRPr sz="1700" b="0">
-                <a:solidFill>
-                  <a:srgbClr val="CBD5E1"/>
+              <a:defRPr sz="1800" b="1">
+                <a:solidFill>
+                  <a:srgbClr val="FFFFFF"/>
                 </a:solidFill>
                 <a:latin typeface="Segoe UI"/>
               </a:defRPr>
             </a:pPr>
             <a:r>
-              <a:t>GHSL building volume only works when paired with surface context — volume alone confuses the model.</a:t>
-            </a:r>
-          </a:p>
-        </p:txBody>
-      </p:sp>
-      <p:sp>
-        <p:nvSpPr>
-          <p:cNvPr id="11" name="Oval 10"/>
-          <p:cNvSpPr/>
-          <p:nvPr/>
-        </p:nvSpPr>
-        <p:spPr>
-          <a:xfrm>
-            <a:off x="822960" y="4023360"/>
-            <a:ext cx="137160" cy="137160"/>
-          </a:xfrm>
-          <a:prstGeom prst="ellipse">
-            <a:avLst/>
-          </a:prstGeom>
-          <a:solidFill>
-            <a:srgbClr val="60A5FA"/>
-          </a:solidFill>
-          <a:ln>
-            <a:noFill/>
-          </a:ln>
-        </p:spPr>
-        <p:style>
-          <a:lnRef idx="1">
-            <a:schemeClr val="accent1"/>
-          </a:lnRef>
-          <a:fillRef idx="3">
-            <a:schemeClr val="accent1"/>
-          </a:fillRef>
-          <a:effectRef idx="2">
-            <a:schemeClr val="accent1"/>
-          </a:effectRef>
-          <a:fontRef idx="minor">
-            <a:schemeClr val="lt1"/>
-          </a:fontRef>
-        </p:style>
-        <p:txBody>
-          <a:bodyPr rtlCol="0" anchor="ctr"/>
-          <a:lstStyle/>
-          <a:p>
-            <a:pPr algn="ctr"/>
-          </a:p>
-        </p:txBody>
-      </p:sp>
-      <p:sp>
-        <p:nvSpPr>
-          <p:cNvPr id="12" name="TextBox 11"/>
+              <a:t>Interactive Map</a:t>
+            </a:r>
+          </a:p>
+        </p:txBody>
+      </p:sp>
+      <p:sp>
+        <p:nvSpPr>
+          <p:cNvPr id="8" name="TextBox 7"/>
           <p:cNvSpPr txBox="1"/>
           <p:nvPr/>
         </p:nvSpPr>
         <p:spPr>
           <a:xfrm>
-            <a:off x="1188720" y="3931920"/>
-            <a:ext cx="9601200" cy="548640"/>
+            <a:off x="1371600" y="2651760"/>
+            <a:ext cx="4114800" cy="365760"/>
           </a:xfrm>
           <a:prstGeom prst="rect">
             <a:avLst/>
@@ -11661,29 +10895,29 @@
           <a:lstStyle/>
           <a:p>
             <a:pPr algn="l">
-              <a:defRPr sz="1700" b="0">
-                <a:solidFill>
-                  <a:srgbClr val="CBD5E1"/>
+              <a:defRPr sz="1300" b="0">
+                <a:solidFill>
+                  <a:srgbClr val="94A3B8"/>
                 </a:solidFill>
                 <a:latin typeface="Segoe UI"/>
               </a:defRPr>
             </a:pPr>
             <a:r>
-              <a:t>The fully interactive Streamlit app brings the research to life for end users.</a:t>
-            </a:r>
-          </a:p>
-        </p:txBody>
-      </p:sp>
-      <p:sp>
-        <p:nvSpPr>
-          <p:cNvPr id="13" name="TextBox 12"/>
+              <a:t>Draw a rectangle over any region in Pakistan</a:t>
+            </a:r>
+          </a:p>
+        </p:txBody>
+      </p:sp>
+      <p:sp>
+        <p:nvSpPr>
+          <p:cNvPr id="9" name="TextBox 8"/>
           <p:cNvSpPr txBox="1"/>
           <p:nvPr/>
         </p:nvSpPr>
         <p:spPr>
           <a:xfrm>
-            <a:off x="731520" y="4754880"/>
-            <a:ext cx="10515600" cy="731520"/>
+            <a:off x="6217920" y="2286000"/>
+            <a:ext cx="731520" cy="457200"/>
           </a:xfrm>
           <a:prstGeom prst="rect">
             <a:avLst/>
@@ -11697,7 +10931,79 @@
           <a:lstStyle/>
           <a:p>
             <a:pPr algn="l">
-              <a:defRPr sz="1400" b="0">
+              <a:defRPr sz="2800" b="0">
+                <a:solidFill>
+                  <a:srgbClr val="60A5FA"/>
+                </a:solidFill>
+                <a:latin typeface="Segoe UI"/>
+              </a:defRPr>
+            </a:pPr>
+            <a:r>
+              <a:t>⚡</a:t>
+            </a:r>
+          </a:p>
+        </p:txBody>
+      </p:sp>
+      <p:sp>
+        <p:nvSpPr>
+          <p:cNvPr id="10" name="TextBox 9"/>
+          <p:cNvSpPr txBox="1"/>
+          <p:nvPr/>
+        </p:nvSpPr>
+        <p:spPr>
+          <a:xfrm>
+            <a:off x="6858000" y="2286000"/>
+            <a:ext cx="4114800" cy="365760"/>
+          </a:xfrm>
+          <a:prstGeom prst="rect">
+            <a:avLst/>
+          </a:prstGeom>
+          <a:noFill/>
+        </p:spPr>
+        <p:txBody>
+          <a:bodyPr wrap="square">
+            <a:spAutoFit/>
+          </a:bodyPr>
+          <a:lstStyle/>
+          <a:p>
+            <a:pPr algn="l">
+              <a:defRPr sz="1800" b="1">
+                <a:solidFill>
+                  <a:srgbClr val="FFFFFF"/>
+                </a:solidFill>
+                <a:latin typeface="Segoe UI"/>
+              </a:defRPr>
+            </a:pPr>
+            <a:r>
+              <a:t>Real-Time Prediction</a:t>
+            </a:r>
+          </a:p>
+        </p:txBody>
+      </p:sp>
+      <p:sp>
+        <p:nvSpPr>
+          <p:cNvPr id="11" name="TextBox 10"/>
+          <p:cNvSpPr txBox="1"/>
+          <p:nvPr/>
+        </p:nvSpPr>
+        <p:spPr>
+          <a:xfrm>
+            <a:off x="6858000" y="2651760"/>
+            <a:ext cx="4114800" cy="365760"/>
+          </a:xfrm>
+          <a:prstGeom prst="rect">
+            <a:avLst/>
+          </a:prstGeom>
+          <a:noFill/>
+        </p:spPr>
+        <p:txBody>
+          <a:bodyPr wrap="square">
+            <a:spAutoFit/>
+          </a:bodyPr>
+          <a:lstStyle/>
+          <a:p>
+            <a:pPr algn="l">
+              <a:defRPr sz="1300" b="0">
                 <a:solidFill>
                   <a:srgbClr val="94A3B8"/>
                 </a:solidFill>
@@ -11705,7 +11011,333 @@
               </a:defRPr>
             </a:pPr>
             <a:r>
-              <a:t>Future Work: Stratified CV stability  |  NASA Black Marble NTL  |  OSM road density as 5th channel  |  Transfer to India/Bangladesh</a:t>
+              <a:t>4-channel CNN inference in &lt; 2 seconds</a:t>
+            </a:r>
+          </a:p>
+        </p:txBody>
+      </p:sp>
+      <p:sp>
+        <p:nvSpPr>
+          <p:cNvPr id="12" name="TextBox 11"/>
+          <p:cNvSpPr txBox="1"/>
+          <p:nvPr/>
+        </p:nvSpPr>
+        <p:spPr>
+          <a:xfrm>
+            <a:off x="731520" y="3474720"/>
+            <a:ext cx="731520" cy="457200"/>
+          </a:xfrm>
+          <a:prstGeom prst="rect">
+            <a:avLst/>
+          </a:prstGeom>
+          <a:noFill/>
+        </p:spPr>
+        <p:txBody>
+          <a:bodyPr wrap="square">
+            <a:spAutoFit/>
+          </a:bodyPr>
+          <a:lstStyle/>
+          <a:p>
+            <a:pPr algn="l">
+              <a:defRPr sz="2800" b="0">
+                <a:solidFill>
+                  <a:srgbClr val="60A5FA"/>
+                </a:solidFill>
+                <a:latin typeface="Segoe UI"/>
+              </a:defRPr>
+            </a:pPr>
+            <a:r>
+              <a:t>📊</a:t>
+            </a:r>
+          </a:p>
+        </p:txBody>
+      </p:sp>
+      <p:sp>
+        <p:nvSpPr>
+          <p:cNvPr id="13" name="TextBox 12"/>
+          <p:cNvSpPr txBox="1"/>
+          <p:nvPr/>
+        </p:nvSpPr>
+        <p:spPr>
+          <a:xfrm>
+            <a:off x="1371600" y="3474720"/>
+            <a:ext cx="4114800" cy="365760"/>
+          </a:xfrm>
+          <a:prstGeom prst="rect">
+            <a:avLst/>
+          </a:prstGeom>
+          <a:noFill/>
+        </p:spPr>
+        <p:txBody>
+          <a:bodyPr wrap="square">
+            <a:spAutoFit/>
+          </a:bodyPr>
+          <a:lstStyle/>
+          <a:p>
+            <a:pPr algn="l">
+              <a:defRPr sz="1800" b="1">
+                <a:solidFill>
+                  <a:srgbClr val="FFFFFF"/>
+                </a:solidFill>
+                <a:latin typeface="Segoe UI"/>
+              </a:defRPr>
+            </a:pPr>
+            <a:r>
+              <a:t>Data Quality Audit</a:t>
+            </a:r>
+          </a:p>
+        </p:txBody>
+      </p:sp>
+      <p:sp>
+        <p:nvSpPr>
+          <p:cNvPr id="14" name="TextBox 13"/>
+          <p:cNvSpPr txBox="1"/>
+          <p:nvPr/>
+        </p:nvSpPr>
+        <p:spPr>
+          <a:xfrm>
+            <a:off x="1371600" y="3840480"/>
+            <a:ext cx="4114800" cy="365760"/>
+          </a:xfrm>
+          <a:prstGeom prst="rect">
+            <a:avLst/>
+          </a:prstGeom>
+          <a:noFill/>
+        </p:spPr>
+        <p:txBody>
+          <a:bodyPr wrap="square">
+            <a:spAutoFit/>
+          </a:bodyPr>
+          <a:lstStyle/>
+          <a:p>
+            <a:pPr algn="l">
+              <a:defRPr sz="1300" b="0">
+                <a:solidFill>
+                  <a:srgbClr val="94A3B8"/>
+                </a:solidFill>
+                <a:latin typeface="Segoe UI"/>
+              </a:defRPr>
+            </a:pPr>
+            <a:r>
+              <a:t>5-dimension scorecard with explanations</a:t>
+            </a:r>
+          </a:p>
+        </p:txBody>
+      </p:sp>
+      <p:sp>
+        <p:nvSpPr>
+          <p:cNvPr id="15" name="TextBox 14"/>
+          <p:cNvSpPr txBox="1"/>
+          <p:nvPr/>
+        </p:nvSpPr>
+        <p:spPr>
+          <a:xfrm>
+            <a:off x="6217920" y="3474720"/>
+            <a:ext cx="731520" cy="457200"/>
+          </a:xfrm>
+          <a:prstGeom prst="rect">
+            <a:avLst/>
+          </a:prstGeom>
+          <a:noFill/>
+        </p:spPr>
+        <p:txBody>
+          <a:bodyPr wrap="square">
+            <a:spAutoFit/>
+          </a:bodyPr>
+          <a:lstStyle/>
+          <a:p>
+            <a:pPr algn="l">
+              <a:defRPr sz="2800" b="0">
+                <a:solidFill>
+                  <a:srgbClr val="60A5FA"/>
+                </a:solidFill>
+                <a:latin typeface="Segoe UI"/>
+              </a:defRPr>
+            </a:pPr>
+            <a:r>
+              <a:t>🔥</a:t>
+            </a:r>
+          </a:p>
+        </p:txBody>
+      </p:sp>
+      <p:sp>
+        <p:nvSpPr>
+          <p:cNvPr id="16" name="TextBox 15"/>
+          <p:cNvSpPr txBox="1"/>
+          <p:nvPr/>
+        </p:nvSpPr>
+        <p:spPr>
+          <a:xfrm>
+            <a:off x="6858000" y="3474720"/>
+            <a:ext cx="4114800" cy="365760"/>
+          </a:xfrm>
+          <a:prstGeom prst="rect">
+            <a:avLst/>
+          </a:prstGeom>
+          <a:noFill/>
+        </p:spPr>
+        <p:txBody>
+          <a:bodyPr wrap="square">
+            <a:spAutoFit/>
+          </a:bodyPr>
+          <a:lstStyle/>
+          <a:p>
+            <a:pPr algn="l">
+              <a:defRPr sz="1800" b="1">
+                <a:solidFill>
+                  <a:srgbClr val="FFFFFF"/>
+                </a:solidFill>
+                <a:latin typeface="Segoe UI"/>
+              </a:defRPr>
+            </a:pPr>
+            <a:r>
+              <a:rPr dirty="0"/>
+              <a:t>Grad-CAM Heatmap</a:t>
+            </a:r>
+          </a:p>
+        </p:txBody>
+      </p:sp>
+      <p:sp>
+        <p:nvSpPr>
+          <p:cNvPr id="17" name="TextBox 16"/>
+          <p:cNvSpPr txBox="1"/>
+          <p:nvPr/>
+        </p:nvSpPr>
+        <p:spPr>
+          <a:xfrm>
+            <a:off x="6858000" y="3840480"/>
+            <a:ext cx="4114800" cy="365760"/>
+          </a:xfrm>
+          <a:prstGeom prst="rect">
+            <a:avLst/>
+          </a:prstGeom>
+          <a:noFill/>
+        </p:spPr>
+        <p:txBody>
+          <a:bodyPr wrap="square">
+            <a:spAutoFit/>
+          </a:bodyPr>
+          <a:lstStyle/>
+          <a:p>
+            <a:pPr algn="l">
+              <a:defRPr sz="1300" b="0">
+                <a:solidFill>
+                  <a:srgbClr val="94A3B8"/>
+                </a:solidFill>
+                <a:latin typeface="Segoe UI"/>
+              </a:defRPr>
+            </a:pPr>
+            <a:r>
+              <a:t>See which pixels drive the prediction</a:t>
+            </a:r>
+          </a:p>
+        </p:txBody>
+      </p:sp>
+      <p:sp>
+        <p:nvSpPr>
+          <p:cNvPr id="18" name="TextBox 17"/>
+          <p:cNvSpPr txBox="1"/>
+          <p:nvPr/>
+        </p:nvSpPr>
+        <p:spPr>
+          <a:xfrm>
+            <a:off x="731520" y="4663440"/>
+            <a:ext cx="731520" cy="457200"/>
+          </a:xfrm>
+          <a:prstGeom prst="rect">
+            <a:avLst/>
+          </a:prstGeom>
+          <a:noFill/>
+        </p:spPr>
+        <p:txBody>
+          <a:bodyPr wrap="square">
+            <a:spAutoFit/>
+          </a:bodyPr>
+          <a:lstStyle/>
+          <a:p>
+            <a:pPr algn="l">
+              <a:defRPr sz="2800" b="0">
+                <a:solidFill>
+                  <a:srgbClr val="60A5FA"/>
+                </a:solidFill>
+                <a:latin typeface="Segoe UI"/>
+              </a:defRPr>
+            </a:pPr>
+            <a:r>
+              <a:t>📚</a:t>
+            </a:r>
+          </a:p>
+        </p:txBody>
+      </p:sp>
+      <p:sp>
+        <p:nvSpPr>
+          <p:cNvPr id="19" name="TextBox 18"/>
+          <p:cNvSpPr txBox="1"/>
+          <p:nvPr/>
+        </p:nvSpPr>
+        <p:spPr>
+          <a:xfrm>
+            <a:off x="1371600" y="4663440"/>
+            <a:ext cx="4114800" cy="365760"/>
+          </a:xfrm>
+          <a:prstGeom prst="rect">
+            <a:avLst/>
+          </a:prstGeom>
+          <a:noFill/>
+        </p:spPr>
+        <p:txBody>
+          <a:bodyPr wrap="square">
+            <a:spAutoFit/>
+          </a:bodyPr>
+          <a:lstStyle/>
+          <a:p>
+            <a:pPr algn="l">
+              <a:defRPr sz="1800" b="1">
+                <a:solidFill>
+                  <a:srgbClr val="FFFFFF"/>
+                </a:solidFill>
+                <a:latin typeface="Segoe UI"/>
+              </a:defRPr>
+            </a:pPr>
+            <a:r>
+              <a:rPr dirty="0"/>
+              <a:t>RAG Literature</a:t>
+            </a:r>
+          </a:p>
+        </p:txBody>
+      </p:sp>
+      <p:sp>
+        <p:nvSpPr>
+          <p:cNvPr id="20" name="TextBox 19"/>
+          <p:cNvSpPr txBox="1"/>
+          <p:nvPr/>
+        </p:nvSpPr>
+        <p:spPr>
+          <a:xfrm>
+            <a:off x="1371600" y="5029200"/>
+            <a:ext cx="4114800" cy="365760"/>
+          </a:xfrm>
+          <a:prstGeom prst="rect">
+            <a:avLst/>
+          </a:prstGeom>
+          <a:noFill/>
+        </p:spPr>
+        <p:txBody>
+          <a:bodyPr wrap="square">
+            <a:spAutoFit/>
+          </a:bodyPr>
+          <a:lstStyle/>
+          <a:p>
+            <a:pPr algn="l">
+              <a:defRPr sz="1300" b="0">
+                <a:solidFill>
+                  <a:srgbClr val="94A3B8"/>
+                </a:solidFill>
+                <a:latin typeface="Segoe UI"/>
+              </a:defRPr>
+            </a:pPr>
+            <a:r>
+              <a:t>8 academic papers indexed for grounding</a:t>
             </a:r>
           </a:p>
         </p:txBody>
@@ -11719,7 +11351,7 @@
 </file>
 
 <file path=ppt/slides/slide9.xml><?xml version="1.0" encoding="utf-8"?>
-<p:sld xmlns:a="http://schemas.openxmlformats.org/drawingml/2006/main" xmlns:p="http://schemas.openxmlformats.org/presentationml/2006/main" xmlns:r="http://schemas.openxmlformats.org/officeDocument/2006/relationships">
+<p:sld xmlns:a="http://schemas.openxmlformats.org/drawingml/2006/main" xmlns:r="http://schemas.openxmlformats.org/officeDocument/2006/relationships" xmlns:p="http://schemas.openxmlformats.org/presentationml/2006/main">
   <p:cSld>
     <p:spTree>
       <p:nvGrpSpPr>
@@ -11727,7 +11359,14 @@
         <p:cNvGrpSpPr/>
         <p:nvPr/>
       </p:nvGrpSpPr>
-      <p:grpSpPr/>
+      <p:grpSpPr>
+        <a:xfrm>
+          <a:off x="0" y="0"/>
+          <a:ext cx="0" cy="0"/>
+          <a:chOff x="0" y="0"/>
+          <a:chExt cx="0" cy="0"/>
+        </a:xfrm>
+      </p:grpSpPr>
       <p:sp>
         <p:nvSpPr>
           <p:cNvPr id="2" name="Rectangle 1"/>
@@ -11768,21 +11407,58 @@
           <a:lstStyle/>
           <a:p>
             <a:pPr algn="ctr"/>
-          </a:p>
-        </p:txBody>
-      </p:sp>
-      <p:sp>
-        <p:nvSpPr>
-          <p:cNvPr id="3" name="Oval 2"/>
+            <a:endParaRPr/>
+          </a:p>
+        </p:txBody>
+      </p:sp>
+      <p:sp>
+        <p:nvSpPr>
+          <p:cNvPr id="3" name="TextBox 2"/>
+          <p:cNvSpPr txBox="1"/>
+          <p:nvPr/>
+        </p:nvSpPr>
+        <p:spPr>
+          <a:xfrm>
+            <a:off x="731520" y="457200"/>
+            <a:ext cx="10058400" cy="731520"/>
+          </a:xfrm>
+          <a:prstGeom prst="rect">
+            <a:avLst/>
+          </a:prstGeom>
+          <a:noFill/>
+        </p:spPr>
+        <p:txBody>
+          <a:bodyPr wrap="square">
+            <a:spAutoFit/>
+          </a:bodyPr>
+          <a:lstStyle/>
+          <a:p>
+            <a:pPr algn="l">
+              <a:defRPr sz="3800" b="1">
+                <a:solidFill>
+                  <a:srgbClr val="FFFFFF"/>
+                </a:solidFill>
+                <a:latin typeface="Segoe UI"/>
+              </a:defRPr>
+            </a:pPr>
+            <a:r>
+              <a:t>Conclusion</a:t>
+            </a:r>
+          </a:p>
+        </p:txBody>
+      </p:sp>
+      <p:sp>
+        <p:nvSpPr>
+          <p:cNvPr id="4" name="Rectangle 3"/>
           <p:cNvSpPr/>
           <p:nvPr/>
         </p:nvSpPr>
         <p:spPr>
           <a:xfrm>
-            <a:off x="9144000" y="-914400"/>
-            <a:ext cx="3657600" cy="3657600"/>
-          </a:xfrm>
-          <a:prstGeom prst="ellipse">
+            <a:off x="731519" y="1097280"/>
+            <a:ext cx="2705947" cy="45719"/>
+          </a:xfrm>
+          <a:prstGeom prst="rect">
             <a:avLst/>
           </a:prstGeom>
           <a:solidFill>
@@ -11811,100 +11487,22 @@
           <a:lstStyle/>
           <a:p>
             <a:pPr algn="ctr"/>
-          </a:p>
-        </p:txBody>
-      </p:sp>
-      <p:sp>
-        <p:nvSpPr>
-          <p:cNvPr id="4" name="Oval 3"/>
+            <a:endParaRPr/>
+          </a:p>
+        </p:txBody>
+      </p:sp>
+      <p:sp>
+        <p:nvSpPr>
+          <p:cNvPr id="5" name="Oval 4"/>
           <p:cNvSpPr/>
           <p:nvPr/>
         </p:nvSpPr>
         <p:spPr>
           <a:xfrm>
-            <a:off x="-1371600" y="4572000"/>
-            <a:ext cx="3200400" cy="3200400"/>
+            <a:off x="822960" y="1554480"/>
+            <a:ext cx="137160" cy="137160"/>
           </a:xfrm>
           <a:prstGeom prst="ellipse">
-            <a:avLst/>
-          </a:prstGeom>
-          <a:solidFill>
-            <a:srgbClr val="A78BFA"/>
-          </a:solidFill>
-          <a:ln>
-            <a:noFill/>
-          </a:ln>
-        </p:spPr>
-        <p:style>
-          <a:lnRef idx="1">
-            <a:schemeClr val="accent1"/>
-          </a:lnRef>
-          <a:fillRef idx="3">
-            <a:schemeClr val="accent1"/>
-          </a:fillRef>
-          <a:effectRef idx="2">
-            <a:schemeClr val="accent1"/>
-          </a:effectRef>
-          <a:fontRef idx="minor">
-            <a:schemeClr val="lt1"/>
-          </a:fontRef>
-        </p:style>
-        <p:txBody>
-          <a:bodyPr rtlCol="0" anchor="ctr"/>
-          <a:lstStyle/>
-          <a:p>
-            <a:pPr algn="ctr"/>
-          </a:p>
-        </p:txBody>
-      </p:sp>
-      <p:sp>
-        <p:nvSpPr>
-          <p:cNvPr id="5" name="TextBox 4"/>
-          <p:cNvSpPr txBox="1"/>
-          <p:nvPr/>
-        </p:nvSpPr>
-        <p:spPr>
-          <a:xfrm>
-            <a:off x="914400" y="2011680"/>
-            <a:ext cx="10058400" cy="914400"/>
-          </a:xfrm>
-          <a:prstGeom prst="rect">
-            <a:avLst/>
-          </a:prstGeom>
-          <a:noFill/>
-        </p:spPr>
-        <p:txBody>
-          <a:bodyPr wrap="square">
-            <a:spAutoFit/>
-          </a:bodyPr>
-          <a:lstStyle/>
-          <a:p>
-            <a:pPr algn="ctr">
-              <a:defRPr sz="6000" b="1">
-                <a:solidFill>
-                  <a:srgbClr val="FFFFFF"/>
-                </a:solidFill>
-                <a:latin typeface="Segoe UI"/>
-              </a:defRPr>
-            </a:pPr>
-            <a:r>
-              <a:t>Thank You</a:t>
-            </a:r>
-          </a:p>
-        </p:txBody>
-      </p:sp>
-      <p:sp>
-        <p:nvSpPr>
-          <p:cNvPr id="6" name="Rectangle 5"/>
-          <p:cNvSpPr/>
-          <p:nvPr/>
-        </p:nvSpPr>
-        <p:spPr>
-          <a:xfrm>
-            <a:off x="5303520" y="3017520"/>
-            <a:ext cx="1554480" cy="73152"/>
-          </a:xfrm>
-          <a:prstGeom prst="rect">
             <a:avLst/>
           </a:prstGeom>
           <a:solidFill>
@@ -11933,19 +11531,20 @@
           <a:lstStyle/>
           <a:p>
             <a:pPr algn="ctr"/>
-          </a:p>
-        </p:txBody>
-      </p:sp>
-      <p:sp>
-        <p:nvSpPr>
-          <p:cNvPr id="7" name="TextBox 6"/>
+            <a:endParaRPr/>
+          </a:p>
+        </p:txBody>
+      </p:sp>
+      <p:sp>
+        <p:nvSpPr>
+          <p:cNvPr id="6" name="TextBox 5"/>
           <p:cNvSpPr txBox="1"/>
           <p:nvPr/>
         </p:nvSpPr>
         <p:spPr>
           <a:xfrm>
-            <a:off x="914400" y="3291840"/>
-            <a:ext cx="10058400" cy="731520"/>
+            <a:off x="1188720" y="1463040"/>
+            <a:ext cx="9601200" cy="548640"/>
           </a:xfrm>
           <a:prstGeom prst="rect">
             <a:avLst/>
@@ -11958,8 +11557,8 @@
           </a:bodyPr>
           <a:lstStyle/>
           <a:p>
-            <a:pPr algn="ctr">
-              <a:defRPr sz="2800" b="0">
+            <a:pPr algn="l">
+              <a:defRPr sz="1700" b="0">
                 <a:solidFill>
                   <a:srgbClr val="CBD5E1"/>
                 </a:solidFill>
@@ -11967,8 +11566,53 @@
               </a:defRPr>
             </a:pPr>
             <a:r>
-              <a:t>Questions?</a:t>
-            </a:r>
+              <a:rPr dirty="0"/>
+              <a:t>Fusing temporal NTL with 3D built-up structure yields R = 0.88 — state-of-the-art for Pakistan at 500m resolution.</a:t>
+            </a:r>
+          </a:p>
+        </p:txBody>
+      </p:sp>
+      <p:sp>
+        <p:nvSpPr>
+          <p:cNvPr id="7" name="Oval 6"/>
+          <p:cNvSpPr/>
+          <p:nvPr/>
+        </p:nvSpPr>
+        <p:spPr>
+          <a:xfrm>
+            <a:off x="822960" y="2377440"/>
+            <a:ext cx="137160" cy="137160"/>
+          </a:xfrm>
+          <a:prstGeom prst="ellipse">
+            <a:avLst/>
+          </a:prstGeom>
+          <a:solidFill>
+            <a:srgbClr val="60A5FA"/>
+          </a:solidFill>
+          <a:ln>
+            <a:noFill/>
+          </a:ln>
+        </p:spPr>
+        <p:style>
+          <a:lnRef idx="1">
+            <a:schemeClr val="accent1"/>
+          </a:lnRef>
+          <a:fillRef idx="3">
+            <a:schemeClr val="accent1"/>
+          </a:fillRef>
+          <a:effectRef idx="2">
+            <a:schemeClr val="accent1"/>
+          </a:effectRef>
+          <a:fontRef idx="minor">
+            <a:schemeClr val="lt1"/>
+          </a:fontRef>
+        </p:style>
+        <p:txBody>
+          <a:bodyPr rtlCol="0" anchor="ctr"/>
+          <a:lstStyle/>
+          <a:p>
+            <a:pPr algn="ctr"/>
+            <a:endParaRPr/>
           </a:p>
         </p:txBody>
       </p:sp>
@@ -11980,8 +11624,8 @@
         </p:nvSpPr>
         <p:spPr>
           <a:xfrm>
-            <a:off x="914400" y="4114800"/>
-            <a:ext cx="10058400" cy="731520"/>
+            <a:off x="1188720" y="2286000"/>
+            <a:ext cx="9601200" cy="548640"/>
           </a:xfrm>
           <a:prstGeom prst="rect">
             <a:avLst/>
@@ -11994,30 +11638,74 @@
           </a:bodyPr>
           <a:lstStyle/>
           <a:p>
-            <a:pPr algn="ctr">
-              <a:defRPr sz="1400" b="0">
-                <a:solidFill>
-                  <a:srgbClr val="94A3B8"/>
+            <a:pPr algn="l">
+              <a:defRPr sz="1700" b="0">
+                <a:solidFill>
+                  <a:srgbClr val="CBD5E1"/>
                 </a:solidFill>
                 <a:latin typeface="Segoe UI"/>
               </a:defRPr>
             </a:pPr>
             <a:r>
-              <a:t>Team: [Author 1  Data Engineering]  |  [Author 2  Model Engineering]  |  [Author 3  Evaluation &amp; Application]</a:t>
-            </a:r>
-          </a:p>
-        </p:txBody>
-      </p:sp>
-      <p:sp>
-        <p:nvSpPr>
-          <p:cNvPr id="9" name="TextBox 8"/>
+              <a:t>ImageNet pretraining (+0.24 R) and Huber loss are the biggest performance levers.</a:t>
+            </a:r>
+          </a:p>
+        </p:txBody>
+      </p:sp>
+      <p:sp>
+        <p:nvSpPr>
+          <p:cNvPr id="9" name="Oval 8"/>
+          <p:cNvSpPr/>
+          <p:nvPr/>
+        </p:nvSpPr>
+        <p:spPr>
+          <a:xfrm>
+            <a:off x="822960" y="3200400"/>
+            <a:ext cx="137160" cy="137160"/>
+          </a:xfrm>
+          <a:prstGeom prst="ellipse">
+            <a:avLst/>
+          </a:prstGeom>
+          <a:solidFill>
+            <a:srgbClr val="60A5FA"/>
+          </a:solidFill>
+          <a:ln>
+            <a:noFill/>
+          </a:ln>
+        </p:spPr>
+        <p:style>
+          <a:lnRef idx="1">
+            <a:schemeClr val="accent1"/>
+          </a:lnRef>
+          <a:fillRef idx="3">
+            <a:schemeClr val="accent1"/>
+          </a:fillRef>
+          <a:effectRef idx="2">
+            <a:schemeClr val="accent1"/>
+          </a:effectRef>
+          <a:fontRef idx="minor">
+            <a:schemeClr val="lt1"/>
+          </a:fontRef>
+        </p:style>
+        <p:txBody>
+          <a:bodyPr rtlCol="0" anchor="ctr"/>
+          <a:lstStyle/>
+          <a:p>
+            <a:pPr algn="ctr"/>
+            <a:endParaRPr/>
+          </a:p>
+        </p:txBody>
+      </p:sp>
+      <p:sp>
+        <p:nvSpPr>
+          <p:cNvPr id="10" name="TextBox 9"/>
           <p:cNvSpPr txBox="1"/>
           <p:nvPr/>
         </p:nvSpPr>
         <p:spPr>
           <a:xfrm>
-            <a:off x="914400" y="4572000"/>
-            <a:ext cx="10058400" cy="548640"/>
+            <a:off x="1188720" y="3108960"/>
+            <a:ext cx="9601200" cy="548640"/>
           </a:xfrm>
           <a:prstGeom prst="rect">
             <a:avLst/>
@@ -12030,8 +11718,134 @@
           </a:bodyPr>
           <a:lstStyle/>
           <a:p>
-            <a:pPr algn="ctr">
-              <a:defRPr sz="1300" b="0">
+            <a:pPr algn="l">
+              <a:defRPr sz="1700" b="0">
+                <a:solidFill>
+                  <a:srgbClr val="CBD5E1"/>
+                </a:solidFill>
+                <a:latin typeface="Segoe UI"/>
+              </a:defRPr>
+            </a:pPr>
+            <a:r>
+              <a:rPr dirty="0"/>
+              <a:t>GHSL building volume only works when paired with surface context — volume alone confuses the model.</a:t>
+            </a:r>
+          </a:p>
+        </p:txBody>
+      </p:sp>
+      <p:sp>
+        <p:nvSpPr>
+          <p:cNvPr id="11" name="Oval 10"/>
+          <p:cNvSpPr/>
+          <p:nvPr/>
+        </p:nvSpPr>
+        <p:spPr>
+          <a:xfrm>
+            <a:off x="822960" y="4023360"/>
+            <a:ext cx="137160" cy="137160"/>
+          </a:xfrm>
+          <a:prstGeom prst="ellipse">
+            <a:avLst/>
+          </a:prstGeom>
+          <a:solidFill>
+            <a:srgbClr val="60A5FA"/>
+          </a:solidFill>
+          <a:ln>
+            <a:noFill/>
+          </a:ln>
+        </p:spPr>
+        <p:style>
+          <a:lnRef idx="1">
+            <a:schemeClr val="accent1"/>
+          </a:lnRef>
+          <a:fillRef idx="3">
+            <a:schemeClr val="accent1"/>
+          </a:fillRef>
+          <a:effectRef idx="2">
+            <a:schemeClr val="accent1"/>
+          </a:effectRef>
+          <a:fontRef idx="minor">
+            <a:schemeClr val="lt1"/>
+          </a:fontRef>
+        </p:style>
+        <p:txBody>
+          <a:bodyPr rtlCol="0" anchor="ctr"/>
+          <a:lstStyle/>
+          <a:p>
+            <a:pPr algn="ctr"/>
+            <a:endParaRPr/>
+          </a:p>
+        </p:txBody>
+      </p:sp>
+      <p:sp>
+        <p:nvSpPr>
+          <p:cNvPr id="12" name="TextBox 11"/>
+          <p:cNvSpPr txBox="1"/>
+          <p:nvPr/>
+        </p:nvSpPr>
+        <p:spPr>
+          <a:xfrm>
+            <a:off x="1188720" y="3931920"/>
+            <a:ext cx="9601200" cy="548640"/>
+          </a:xfrm>
+          <a:prstGeom prst="rect">
+            <a:avLst/>
+          </a:prstGeom>
+          <a:noFill/>
+        </p:spPr>
+        <p:txBody>
+          <a:bodyPr wrap="square">
+            <a:spAutoFit/>
+          </a:bodyPr>
+          <a:lstStyle/>
+          <a:p>
+            <a:pPr algn="l">
+              <a:defRPr sz="1700" b="0">
+                <a:solidFill>
+                  <a:srgbClr val="CBD5E1"/>
+                </a:solidFill>
+                <a:latin typeface="Segoe UI"/>
+              </a:defRPr>
+            </a:pPr>
+            <a:r>
+              <a:rPr dirty="0"/>
+              <a:t>The fully interactive </a:t>
+            </a:r>
+            <a:r>
+              <a:rPr dirty="0" err="1"/>
+              <a:t>Streamlit</a:t>
+            </a:r>
+            <a:r>
+              <a:rPr dirty="0"/>
+              <a:t> app brings the research to life for end users.</a:t>
+            </a:r>
+          </a:p>
+        </p:txBody>
+      </p:sp>
+      <p:sp>
+        <p:nvSpPr>
+          <p:cNvPr id="13" name="TextBox 12"/>
+          <p:cNvSpPr txBox="1"/>
+          <p:nvPr/>
+        </p:nvSpPr>
+        <p:spPr>
+          <a:xfrm>
+            <a:off x="731520" y="4754880"/>
+            <a:ext cx="10515600" cy="731520"/>
+          </a:xfrm>
+          <a:prstGeom prst="rect">
+            <a:avLst/>
+          </a:prstGeom>
+          <a:noFill/>
+        </p:spPr>
+        <p:txBody>
+          <a:bodyPr wrap="square">
+            <a:spAutoFit/>
+          </a:bodyPr>
+          <a:lstStyle/>
+          <a:p>
+            <a:pPr algn="l">
+              <a:defRPr sz="1400" b="0">
                 <a:solidFill>
                   <a:srgbClr val="94A3B8"/>
                 </a:solidFill>
@@ -12039,7 +11853,8 @@
               </a:defRPr>
             </a:pPr>
             <a:r>
-              <a:t>Code: github.com/your-repo  |  Report: PROJECT_REPORT.md</a:t>
+              <a:rPr dirty="0"/>
+              <a:t>Future Work: Stratified CV stability  |  NASA Black Marble NTL  |  OSM road density as 5th channel  |  Transfer to India/Bangladesh</a:t>
             </a:r>
           </a:p>
         </p:txBody>
